--- a/presentation/snapdragon-local-review.pptx
+++ b/presentation/snapdragon-local-review.pptx
@@ -1,118 +1,131 @@
 
 <file path=ppt/presentation.xml><?xml version="1.0" encoding="utf-8"?>
-<p:presentation xmlns:a="http://schemas.openxmlformats.org/drawingml/2006/main" xmlns:r="http://schemas.openxmlformats.org/officeDocument/2006/relationships" xmlns:p="http://schemas.openxmlformats.org/presentationml/2006/main" saveSubsetFonts="1" autoCompressPictures="0">
-  <p:sldMasterIdLst>
-    <p:sldMasterId id="2147483648" r:id="rId1"/>
-  </p:sldMasterIdLst>
-  <p:sldIdLst>
-    <p:sldId id="256" r:id="rId7"/>
-    <p:sldId id="257" r:id="rId8"/>
-    <p:sldId id="258" r:id="rId9"/>
-    <p:sldId id="259" r:id="rId10"/>
-    <p:sldId id="260" r:id="rId11"/>
-    <p:sldId id="261" r:id="rId12"/>
-    <p:sldId id="262" r:id="rId13"/>
-    <p:sldId id="263" r:id="rId14"/>
-    <p:sldId id="264" r:id="rId15"/>
-  </p:sldIdLst>
-  <p:sldSz cx="12191695" cy="6858000" type="screen4x3"/>
-  <p:notesSz cx="6858000" cy="9144000"/>
-  <p:defaultTextStyle>
-    <a:defPPr>
-      <a:defRPr lang="en-US"/>
-    </a:defPPr>
-    <a:lvl1pPr marL="0" algn="l" defTabSz="457200" rtl="0" eaLnBrk="1" latinLnBrk="0" hangingPunct="1">
-      <a:defRPr sz="1800" kern="1200">
-        <a:solidFill>
-          <a:schemeClr val="tx1"/>
-        </a:solidFill>
-        <a:latin typeface="+mn-lt"/>
-        <a:ea typeface="+mn-ea"/>
-        <a:cs typeface="+mn-cs"/>
-      </a:defRPr>
-    </a:lvl1pPr>
-    <a:lvl2pPr marL="457200" algn="l" defTabSz="457200" rtl="0" eaLnBrk="1" latinLnBrk="0" hangingPunct="1">
-      <a:defRPr sz="1800" kern="1200">
-        <a:solidFill>
-          <a:schemeClr val="tx1"/>
-        </a:solidFill>
-        <a:latin typeface="+mn-lt"/>
-        <a:ea typeface="+mn-ea"/>
-        <a:cs typeface="+mn-cs"/>
-      </a:defRPr>
-    </a:lvl2pPr>
-    <a:lvl3pPr marL="914400" algn="l" defTabSz="457200" rtl="0" eaLnBrk="1" latinLnBrk="0" hangingPunct="1">
-      <a:defRPr sz="1800" kern="1200">
-        <a:solidFill>
-          <a:schemeClr val="tx1"/>
-        </a:solidFill>
-        <a:latin typeface="+mn-lt"/>
-        <a:ea typeface="+mn-ea"/>
-        <a:cs typeface="+mn-cs"/>
-      </a:defRPr>
-    </a:lvl3pPr>
-    <a:lvl4pPr marL="1371600" algn="l" defTabSz="457200" rtl="0" eaLnBrk="1" latinLnBrk="0" hangingPunct="1">
-      <a:defRPr sz="1800" kern="1200">
-        <a:solidFill>
-          <a:schemeClr val="tx1"/>
-        </a:solidFill>
-        <a:latin typeface="+mn-lt"/>
-        <a:ea typeface="+mn-ea"/>
-        <a:cs typeface="+mn-cs"/>
-      </a:defRPr>
-    </a:lvl4pPr>
-    <a:lvl5pPr marL="1828800" algn="l" defTabSz="457200" rtl="0" eaLnBrk="1" latinLnBrk="0" hangingPunct="1">
-      <a:defRPr sz="1800" kern="1200">
-        <a:solidFill>
-          <a:schemeClr val="tx1"/>
-        </a:solidFill>
-        <a:latin typeface="+mn-lt"/>
-        <a:ea typeface="+mn-ea"/>
-        <a:cs typeface="+mn-cs"/>
-      </a:defRPr>
-    </a:lvl5pPr>
-    <a:lvl6pPr marL="2286000" algn="l" defTabSz="457200" rtl="0" eaLnBrk="1" latinLnBrk="0" hangingPunct="1">
-      <a:defRPr sz="1800" kern="1200">
-        <a:solidFill>
-          <a:schemeClr val="tx1"/>
-        </a:solidFill>
-        <a:latin typeface="+mn-lt"/>
-        <a:ea typeface="+mn-ea"/>
-        <a:cs typeface="+mn-cs"/>
-      </a:defRPr>
-    </a:lvl6pPr>
-    <a:lvl7pPr marL="2743200" algn="l" defTabSz="457200" rtl="0" eaLnBrk="1" latinLnBrk="0" hangingPunct="1">
-      <a:defRPr sz="1800" kern="1200">
-        <a:solidFill>
-          <a:schemeClr val="tx1"/>
-        </a:solidFill>
-        <a:latin typeface="+mn-lt"/>
-        <a:ea typeface="+mn-ea"/>
-        <a:cs typeface="+mn-cs"/>
-      </a:defRPr>
-    </a:lvl7pPr>
-    <a:lvl8pPr marL="3200400" algn="l" defTabSz="457200" rtl="0" eaLnBrk="1" latinLnBrk="0" hangingPunct="1">
-      <a:defRPr sz="1800" kern="1200">
-        <a:solidFill>
-          <a:schemeClr val="tx1"/>
-        </a:solidFill>
-        <a:latin typeface="+mn-lt"/>
-        <a:ea typeface="+mn-ea"/>
-        <a:cs typeface="+mn-cs"/>
-      </a:defRPr>
-    </a:lvl8pPr>
-    <a:lvl9pPr marL="3657600" algn="l" defTabSz="457200" rtl="0" eaLnBrk="1" latinLnBrk="0" hangingPunct="1">
-      <a:defRPr sz="1800" kern="1200">
-        <a:solidFill>
-          <a:schemeClr val="tx1"/>
-        </a:solidFill>
-        <a:latin typeface="+mn-lt"/>
-        <a:ea typeface="+mn-ea"/>
-        <a:cs typeface="+mn-cs"/>
-      </a:defRPr>
-    </a:lvl9pPr>
-  </p:defaultTextStyle>
-</p:presentation>
+<ns0:presentation xmlns:ns0="http://schemas.openxmlformats.org/presentationml/2006/main" xmlns:ns1="http://schemas.openxmlformats.org/officeDocument/2006/relationships" xmlns:ns2="http://schemas.openxmlformats.org/drawingml/2006/main" saveSubsetFonts="1" autoCompressPictures="0" embedTrueTypeFonts="1">
+  <ns0:sldMasterIdLst>
+    <ns0:sldMasterId id="2147483648" ns1:id="rId1"/>
+  </ns0:sldMasterIdLst>
+  <ns0:sldIdLst>
+    <ns0:sldId id="256" ns1:id="rId7"/>
+    <ns0:sldId id="257" ns1:id="rId8"/>
+    <ns0:sldId id="258" ns1:id="rId9"/>
+    <ns0:sldId id="259" ns1:id="rId10"/>
+    <ns0:sldId id="260" ns1:id="rId11"/>
+    <ns0:sldId id="261" ns1:id="rId12"/>
+    <ns0:sldId id="262" ns1:id="rId13"/>
+    <ns0:sldId id="263" ns1:id="rId14"/>
+    <ns0:sldId id="264" ns1:id="rId15"/>
+    <ns0:sldId id="265" ns1:id="rId16"/>
+  </ns0:sldIdLst>
+  <ns0:sldSz cx="12192000" cy="6858000" type="screen4x3"/>
+  <ns0:notesSz cx="6858000" cy="9144000"/>
+  <ns0:embeddedFontLst>
+    <ns0:embeddedFont>
+      <ns0:font typeface="JetBrains Mono"/>
+      <ns0:bold ns1:id="rIdFont17"/>
+      <ns0:regular ns1:id="rIdFont18"/>
+    </ns0:embeddedFont>
+    <ns0:embeddedFont>
+      <ns0:font typeface="Plus Jakarta Sans"/>
+      <ns0:bold ns1:id="rIdFont19"/>
+      <ns0:regular ns1:id="rIdFont20"/>
+    </ns0:embeddedFont>
+  </ns0:embeddedFontLst>
+  <ns0:defaultTextStyle>
+    <ns2:defPPr>
+      <ns2:defRPr lang="en-US"/>
+    </ns2:defPPr>
+    <ns2:lvl1pPr marL="0" algn="l" defTabSz="457200" rtl="0" eaLnBrk="1" latinLnBrk="0" hangingPunct="1">
+      <ns2:defRPr sz="1800" kern="1200">
+        <ns2:solidFill>
+          <ns2:schemeClr val="tx1"/>
+        </ns2:solidFill>
+        <ns2:latin typeface="+mn-lt"/>
+        <ns2:ea typeface="+mn-ea"/>
+        <ns2:cs typeface="+mn-cs"/>
+      </ns2:defRPr>
+    </ns2:lvl1pPr>
+    <ns2:lvl2pPr marL="457200" algn="l" defTabSz="457200" rtl="0" eaLnBrk="1" latinLnBrk="0" hangingPunct="1">
+      <ns2:defRPr sz="1800" kern="1200">
+        <ns2:solidFill>
+          <ns2:schemeClr val="tx1"/>
+        </ns2:solidFill>
+        <ns2:latin typeface="+mn-lt"/>
+        <ns2:ea typeface="+mn-ea"/>
+        <ns2:cs typeface="+mn-cs"/>
+      </ns2:defRPr>
+    </ns2:lvl2pPr>
+    <ns2:lvl3pPr marL="914400" algn="l" defTabSz="457200" rtl="0" eaLnBrk="1" latinLnBrk="0" hangingPunct="1">
+      <ns2:defRPr sz="1800" kern="1200">
+        <ns2:solidFill>
+          <ns2:schemeClr val="tx1"/>
+        </ns2:solidFill>
+        <ns2:latin typeface="+mn-lt"/>
+        <ns2:ea typeface="+mn-ea"/>
+        <ns2:cs typeface="+mn-cs"/>
+      </ns2:defRPr>
+    </ns2:lvl3pPr>
+    <ns2:lvl4pPr marL="1371600" algn="l" defTabSz="457200" rtl="0" eaLnBrk="1" latinLnBrk="0" hangingPunct="1">
+      <ns2:defRPr sz="1800" kern="1200">
+        <ns2:solidFill>
+          <ns2:schemeClr val="tx1"/>
+        </ns2:solidFill>
+        <ns2:latin typeface="+mn-lt"/>
+        <ns2:ea typeface="+mn-ea"/>
+        <ns2:cs typeface="+mn-cs"/>
+      </ns2:defRPr>
+    </ns2:lvl4pPr>
+    <ns2:lvl5pPr marL="1828800" algn="l" defTabSz="457200" rtl="0" eaLnBrk="1" latinLnBrk="0" hangingPunct="1">
+      <ns2:defRPr sz="1800" kern="1200">
+        <ns2:solidFill>
+          <ns2:schemeClr val="tx1"/>
+        </ns2:solidFill>
+        <ns2:latin typeface="+mn-lt"/>
+        <ns2:ea typeface="+mn-ea"/>
+        <ns2:cs typeface="+mn-cs"/>
+      </ns2:defRPr>
+    </ns2:lvl5pPr>
+    <ns2:lvl6pPr marL="2286000" algn="l" defTabSz="457200" rtl="0" eaLnBrk="1" latinLnBrk="0" hangingPunct="1">
+      <ns2:defRPr sz="1800" kern="1200">
+        <ns2:solidFill>
+          <ns2:schemeClr val="tx1"/>
+        </ns2:solidFill>
+        <ns2:latin typeface="+mn-lt"/>
+        <ns2:ea typeface="+mn-ea"/>
+        <ns2:cs typeface="+mn-cs"/>
+      </ns2:defRPr>
+    </ns2:lvl6pPr>
+    <ns2:lvl7pPr marL="2743200" algn="l" defTabSz="457200" rtl="0" eaLnBrk="1" latinLnBrk="0" hangingPunct="1">
+      <ns2:defRPr sz="1800" kern="1200">
+        <ns2:solidFill>
+          <ns2:schemeClr val="tx1"/>
+        </ns2:solidFill>
+        <ns2:latin typeface="+mn-lt"/>
+        <ns2:ea typeface="+mn-ea"/>
+        <ns2:cs typeface="+mn-cs"/>
+      </ns2:defRPr>
+    </ns2:lvl7pPr>
+    <ns2:lvl8pPr marL="3200400" algn="l" defTabSz="457200" rtl="0" eaLnBrk="1" latinLnBrk="0" hangingPunct="1">
+      <ns2:defRPr sz="1800" kern="1200">
+        <ns2:solidFill>
+          <ns2:schemeClr val="tx1"/>
+        </ns2:solidFill>
+        <ns2:latin typeface="+mn-lt"/>
+        <ns2:ea typeface="+mn-ea"/>
+        <ns2:cs typeface="+mn-cs"/>
+      </ns2:defRPr>
+    </ns2:lvl8pPr>
+    <ns2:lvl9pPr marL="3657600" algn="l" defTabSz="457200" rtl="0" eaLnBrk="1" latinLnBrk="0" hangingPunct="1">
+      <ns2:defRPr sz="1800" kern="1200">
+        <ns2:solidFill>
+          <ns2:schemeClr val="tx1"/>
+        </ns2:solidFill>
+        <ns2:latin typeface="+mn-lt"/>
+        <ns2:ea typeface="+mn-ea"/>
+        <ns2:cs typeface="+mn-cs"/>
+      </ns2:defRPr>
+    </ns2:lvl9pPr>
+  </ns0:defaultTextStyle>
+</ns0:presentation>
 </file>
 
 <file path=ppt/slideLayouts/slideLayout1.xml><?xml version="1.0" encoding="utf-8"?>
@@ -3092,7 +3105,7 @@
     <p:bg>
       <p:bgPr>
         <a:solidFill>
-          <a:srgbClr val="F6F8FC"/>
+          <a:srgbClr val="0B0F19"/>
         </a:solidFill>
         <a:effectLst/>
       </p:bgPr>
@@ -3106,39 +3119,537 @@
       <p:grpSpPr/>
       <p:sp>
         <p:nvSpPr>
-          <p:cNvPr id="2" name="TextBox 1"/>
-          <p:cNvSpPr txBox="1"/>
-          <p:nvPr/>
-        </p:nvSpPr>
-        <p:spPr>
-          <a:xfrm>
-            <a:off x="640080" y="411480"/>
-            <a:ext cx="6400800" cy="274320"/>
-          </a:xfrm>
-          <a:prstGeom prst="rect">
-            <a:avLst/>
-          </a:prstGeom>
-          <a:noFill/>
-        </p:spPr>
-        <p:txBody>
-          <a:bodyPr wrap="none">
-            <a:spAutoFit/>
-          </a:bodyPr>
-          <a:lstStyle/>
-          <a:p>
-            <a:pPr>
-              <a:defRPr sz="1200" b="1">
-                <a:solidFill>
-                  <a:srgbClr val="1E6ED2"/>
-                </a:solidFill>
-              </a:defRPr>
+          <p:cNvPr id="2" name="Rectangle 1"/>
+          <p:cNvSpPr/>
+          <p:nvPr/>
+        </p:nvSpPr>
+        <p:spPr>
+          <a:xfrm>
+            <a:off x="762000" y="5838676"/>
+            <a:ext cx="10668000" cy="409575"/>
+          </a:xfrm>
+          <a:prstGeom prst="rect">
+            <a:avLst/>
+          </a:prstGeom>
+          <a:noFill/>
+          <a:ln>
+            <a:noFill/>
+          </a:ln>
+          <a:effectLst/>
+        </p:spPr>
+        <p:style>
+          <a:lnRef idx="1">
+            <a:schemeClr val="accent1"/>
+          </a:lnRef>
+          <a:fillRef idx="3">
+            <a:schemeClr val="accent1"/>
+          </a:fillRef>
+          <a:effectRef idx="2">
+            <a:schemeClr val="accent1"/>
+          </a:effectRef>
+          <a:fontRef idx="minor">
+            <a:schemeClr val="lt1"/>
+          </a:fontRef>
+        </p:style>
+        <p:txBody>
+          <a:bodyPr rtlCol="0" anchor="ctr"/>
+          <a:lstStyle/>
+          <a:p>
+            <a:pPr algn="ctr"/>
+          </a:p>
+        </p:txBody>
+      </p:sp>
+      <p:sp>
+        <p:nvSpPr>
+          <p:cNvPr id="3" name="Rounded Rectangle 2"/>
+          <p:cNvSpPr/>
+          <p:nvPr/>
+        </p:nvSpPr>
+        <p:spPr>
+          <a:xfrm>
+            <a:off x="762000" y="2488852"/>
+            <a:ext cx="457200" cy="38100"/>
+          </a:xfrm>
+          <a:prstGeom prst="roundRect">
+            <a:avLst>
+              <a:gd name="adj" fmla="val 50000"/>
+            </a:avLst>
+          </a:prstGeom>
+          <a:solidFill>
+            <a:srgbClr val="E4002B"/>
+          </a:solidFill>
+          <a:ln>
+            <a:noFill/>
+          </a:ln>
+          <a:effectLst/>
+        </p:spPr>
+        <p:style>
+          <a:lnRef idx="1">
+            <a:schemeClr val="accent1"/>
+          </a:lnRef>
+          <a:fillRef idx="3">
+            <a:schemeClr val="accent1"/>
+          </a:fillRef>
+          <a:effectRef idx="2">
+            <a:schemeClr val="accent1"/>
+          </a:effectRef>
+          <a:fontRef idx="minor">
+            <a:schemeClr val="lt1"/>
+          </a:fontRef>
+        </p:style>
+        <p:txBody>
+          <a:bodyPr rtlCol="0" anchor="ctr"/>
+          <a:lstStyle/>
+          <a:p>
+            <a:pPr algn="ctr"/>
+          </a:p>
+        </p:txBody>
+      </p:sp>
+      <p:sp>
+        <p:nvSpPr>
+          <p:cNvPr id="4" name="Rectangle 3"/>
+          <p:cNvSpPr/>
+          <p:nvPr/>
+        </p:nvSpPr>
+        <p:spPr>
+          <a:xfrm>
+            <a:off x="762000" y="5838676"/>
+            <a:ext cx="10668000" cy="9525"/>
+          </a:xfrm>
+          <a:prstGeom prst="rect">
+            <a:avLst/>
+          </a:prstGeom>
+          <a:solidFill>
+            <a:srgbClr val="1E293B"/>
+          </a:solidFill>
+          <a:ln>
+            <a:noFill/>
+          </a:ln>
+          <a:effectLst/>
+        </p:spPr>
+        <p:style>
+          <a:lnRef idx="1">
+            <a:schemeClr val="accent1"/>
+          </a:lnRef>
+          <a:fillRef idx="3">
+            <a:schemeClr val="accent1"/>
+          </a:fillRef>
+          <a:effectRef idx="2">
+            <a:schemeClr val="accent1"/>
+          </a:effectRef>
+          <a:fontRef idx="minor">
+            <a:schemeClr val="lt1"/>
+          </a:fontRef>
+        </p:style>
+        <p:txBody>
+          <a:bodyPr rtlCol="0" anchor="ctr"/>
+          <a:lstStyle/>
+          <a:p>
+            <a:pPr algn="ctr"/>
+          </a:p>
+        </p:txBody>
+      </p:sp>
+      <p:pic>
+        <p:nvPicPr>
+          <p:cNvPr id="5" name="Picture 4" descr="image.png"/>
+          <p:cNvPicPr>
+            <a:picLocks noChangeAspect="1"/>
+          </p:cNvPicPr>
+          <p:nvPr/>
+        </p:nvPicPr>
+        <p:blipFill>
+          <a:blip r:embed="rId2"/>
+          <a:stretch>
+            <a:fillRect/>
+          </a:stretch>
+        </p:blipFill>
+        <p:spPr>
+          <a:xfrm>
+            <a:off x="762000" y="609600"/>
+            <a:ext cx="361950" cy="361950"/>
+          </a:xfrm>
+          <a:prstGeom prst="rect">
+            <a:avLst/>
+          </a:prstGeom>
+        </p:spPr>
+      </p:pic>
+      <p:sp>
+        <p:nvSpPr>
+          <p:cNvPr id="6" name="TextBox 5"/>
+          <p:cNvSpPr txBox="1"/>
+          <p:nvPr/>
+        </p:nvSpPr>
+        <p:spPr>
+          <a:xfrm>
+            <a:off x="9077325" y="704850"/>
+            <a:ext cx="2940843" cy="171450"/>
+          </a:xfrm>
+          <a:prstGeom prst="rect">
+            <a:avLst/>
+          </a:prstGeom>
+          <a:noFill/>
+        </p:spPr>
+        <p:txBody>
+          <a:bodyPr wrap="none" lIns="0" rIns="0" tIns="0" bIns="0" anchor="t">
+            <a:spAutoFit/>
+          </a:bodyPr>
+          <a:lstStyle/>
+          <a:p>
+            <a:pPr algn="l"/>
+            <a:r>
+              <a:rPr b="0" sz="1050" i="0" u="none">
+                <a:solidFill>
+                  <a:srgbClr val="94A3B8"/>
+                </a:solidFill>
+                <a:latin typeface="JetBrains Mono"/>
+              </a:rPr>
+              <a:t>01 / ARCHITECTURE OVERVIEW</a:t>
+            </a:r>
+          </a:p>
+        </p:txBody>
+      </p:sp>
+      <p:sp>
+        <p:nvSpPr>
+          <p:cNvPr id="7" name="TextBox 6"/>
+          <p:cNvSpPr txBox="1"/>
+          <p:nvPr/>
+        </p:nvSpPr>
+        <p:spPr>
+          <a:xfrm>
+            <a:off x="762000" y="2793652"/>
+            <a:ext cx="11001375" cy="607665"/>
+          </a:xfrm>
+          <a:prstGeom prst="rect">
+            <a:avLst/>
+          </a:prstGeom>
+          <a:noFill/>
+        </p:spPr>
+        <p:txBody>
+          <a:bodyPr wrap="none" lIns="0" rIns="0" tIns="0" bIns="0" anchor="t">
+            <a:spAutoFit/>
+          </a:bodyPr>
+          <a:lstStyle/>
+          <a:p>
+            <a:pPr algn="l">
+              <a:lnSpc>
+                <a:spcPts val="4784"/>
+              </a:lnSpc>
             </a:pPr>
             <a:r>
-              <a:t>SNAPDRAGON LOCAL REVIEW</a:t>
-            </a:r>
-          </a:p>
-        </p:txBody>
-      </p:sp>
+              <a:rPr b="1" sz="4350" i="0" u="none">
+                <a:solidFill>
+                  <a:srgbClr val="FFFFFF"/>
+                </a:solidFill>
+                <a:latin typeface="Plus Jakarta Sans"/>
+              </a:rPr>
+              <a:t>Snapdragon Local Review</a:t>
+            </a:r>
+          </a:p>
+        </p:txBody>
+      </p:sp>
+      <p:sp>
+        <p:nvSpPr>
+          <p:cNvPr id="8" name="TextBox 7"/>
+          <p:cNvSpPr txBox="1"/>
+          <p:nvPr/>
+        </p:nvSpPr>
+        <p:spPr>
+          <a:xfrm>
+            <a:off x="762000" y="3629917"/>
+            <a:ext cx="10477500" cy="319980"/>
+          </a:xfrm>
+          <a:prstGeom prst="rect">
+            <a:avLst/>
+          </a:prstGeom>
+          <a:noFill/>
+        </p:spPr>
+        <p:txBody>
+          <a:bodyPr wrap="none" lIns="0" rIns="0" tIns="0" bIns="0" anchor="t">
+            <a:spAutoFit/>
+          </a:bodyPr>
+          <a:lstStyle/>
+          <a:p>
+            <a:pPr algn="l">
+              <a:lnSpc>
+                <a:spcPts val="2520"/>
+              </a:lnSpc>
+            </a:pPr>
+            <a:r>
+              <a:rPr b="0" sz="1800" i="0" u="none">
+                <a:solidFill>
+                  <a:srgbClr val="CBD5E1"/>
+                </a:solidFill>
+                <a:latin typeface="Plus Jakarta Sans"/>
+              </a:rPr>
+              <a:t>Private, offline-first code and Vercel preflight checks.</a:t>
+            </a:r>
+          </a:p>
+        </p:txBody>
+      </p:sp>
+      <p:sp>
+        <p:nvSpPr>
+          <p:cNvPr id="9" name="TextBox 8"/>
+          <p:cNvSpPr txBox="1"/>
+          <p:nvPr/>
+        </p:nvSpPr>
+        <p:spPr>
+          <a:xfrm>
+            <a:off x="762000" y="4064198"/>
+            <a:ext cx="10477500" cy="257175"/>
+          </a:xfrm>
+          <a:prstGeom prst="rect">
+            <a:avLst/>
+          </a:prstGeom>
+          <a:noFill/>
+        </p:spPr>
+        <p:txBody>
+          <a:bodyPr wrap="none" lIns="0" rIns="0" tIns="0" bIns="0" anchor="t">
+            <a:spAutoFit/>
+          </a:bodyPr>
+          <a:lstStyle/>
+          <a:p>
+            <a:pPr algn="l">
+              <a:lnSpc>
+                <a:spcPts val="2025"/>
+              </a:lnSpc>
+            </a:pPr>
+            <a:r>
+              <a:rPr b="0" sz="1350" i="0" u="none">
+                <a:solidFill>
+                  <a:srgbClr val="94A3B8"/>
+                </a:solidFill>
+                <a:latin typeface="Plus Jakarta Sans"/>
+              </a:rPr>
+              <a:t>Hexagon NPU-accelerated developer feedback designed for Snapdragon PCs.</a:t>
+            </a:r>
+          </a:p>
+        </p:txBody>
+      </p:sp>
+      <p:sp>
+        <p:nvSpPr>
+          <p:cNvPr id="10" name="TextBox 9"/>
+          <p:cNvSpPr txBox="1"/>
+          <p:nvPr/>
+        </p:nvSpPr>
+        <p:spPr>
+          <a:xfrm>
+            <a:off x="762000" y="6076801"/>
+            <a:ext cx="2452687" cy="171450"/>
+          </a:xfrm>
+          <a:prstGeom prst="rect">
+            <a:avLst/>
+          </a:prstGeom>
+          <a:noFill/>
+        </p:spPr>
+        <p:txBody>
+          <a:bodyPr wrap="none" lIns="0" rIns="0" tIns="0" bIns="0" anchor="t">
+            <a:spAutoFit/>
+          </a:bodyPr>
+          <a:lstStyle/>
+          <a:p>
+            <a:pPr algn="l"/>
+            <a:r>
+              <a:rPr b="1" sz="1050" i="0" u="none">
+                <a:solidFill>
+                  <a:srgbClr val="E4002B"/>
+                </a:solidFill>
+                <a:latin typeface="Plus Jakarta Sans"/>
+              </a:rPr>
+              <a:t>ZERO CLOUD DEPENDENCY</a:t>
+            </a:r>
+          </a:p>
+        </p:txBody>
+      </p:sp>
+      <p:sp>
+        <p:nvSpPr>
+          <p:cNvPr id="11" name="TextBox 10"/>
+          <p:cNvSpPr txBox="1"/>
+          <p:nvPr/>
+        </p:nvSpPr>
+        <p:spPr>
+          <a:xfrm>
+            <a:off x="3067050" y="6076801"/>
+            <a:ext cx="361950" cy="171450"/>
+          </a:xfrm>
+          <a:prstGeom prst="rect">
+            <a:avLst/>
+          </a:prstGeom>
+          <a:noFill/>
+        </p:spPr>
+        <p:txBody>
+          <a:bodyPr wrap="none" lIns="0" rIns="0" tIns="0" bIns="0" anchor="t">
+            <a:spAutoFit/>
+          </a:bodyPr>
+          <a:lstStyle/>
+          <a:p>
+            <a:pPr algn="l"/>
+            <a:r>
+              <a:rPr b="0" sz="1050" i="0" u="none">
+                <a:solidFill>
+                  <a:srgbClr val="64748B"/>
+                </a:solidFill>
+                <a:latin typeface="Plus Jakarta Sans"/>
+              </a:rPr>
+              <a:t>•</a:t>
+            </a:r>
+          </a:p>
+        </p:txBody>
+      </p:sp>
+      <p:sp>
+        <p:nvSpPr>
+          <p:cNvPr id="12" name="TextBox 11"/>
+          <p:cNvSpPr txBox="1"/>
+          <p:nvPr/>
+        </p:nvSpPr>
+        <p:spPr>
+          <a:xfrm>
+            <a:off x="3486150" y="6076801"/>
+            <a:ext cx="2595562" cy="171450"/>
+          </a:xfrm>
+          <a:prstGeom prst="rect">
+            <a:avLst/>
+          </a:prstGeom>
+          <a:noFill/>
+        </p:spPr>
+        <p:txBody>
+          <a:bodyPr wrap="none" lIns="0" rIns="0" tIns="0" bIns="0" anchor="t">
+            <a:spAutoFit/>
+          </a:bodyPr>
+          <a:lstStyle/>
+          <a:p>
+            <a:pPr algn="l"/>
+            <a:r>
+              <a:rPr b="1" sz="1050" i="0" u="none">
+                <a:solidFill>
+                  <a:srgbClr val="E2E8F0"/>
+                </a:solidFill>
+                <a:latin typeface="Plus Jakarta Sans"/>
+              </a:rPr>
+              <a:t>Sub-second Deterministic Scans</a:t>
+            </a:r>
+          </a:p>
+        </p:txBody>
+      </p:sp>
+      <p:sp>
+        <p:nvSpPr>
+          <p:cNvPr id="13" name="TextBox 12"/>
+          <p:cNvSpPr txBox="1"/>
+          <p:nvPr/>
+        </p:nvSpPr>
+        <p:spPr>
+          <a:xfrm>
+            <a:off x="5905500" y="6076801"/>
+            <a:ext cx="361950" cy="171450"/>
+          </a:xfrm>
+          <a:prstGeom prst="rect">
+            <a:avLst/>
+          </a:prstGeom>
+          <a:noFill/>
+        </p:spPr>
+        <p:txBody>
+          <a:bodyPr wrap="none" lIns="0" rIns="0" tIns="0" bIns="0" anchor="t">
+            <a:spAutoFit/>
+          </a:bodyPr>
+          <a:lstStyle/>
+          <a:p>
+            <a:pPr algn="l"/>
+            <a:r>
+              <a:rPr b="0" sz="1050" i="0" u="none">
+                <a:solidFill>
+                  <a:srgbClr val="64748B"/>
+                </a:solidFill>
+                <a:latin typeface="Plus Jakarta Sans"/>
+              </a:rPr>
+              <a:t>•</a:t>
+            </a:r>
+          </a:p>
+        </p:txBody>
+      </p:sp>
+      <p:sp>
+        <p:nvSpPr>
+          <p:cNvPr id="14" name="TextBox 13"/>
+          <p:cNvSpPr txBox="1"/>
+          <p:nvPr/>
+        </p:nvSpPr>
+        <p:spPr>
+          <a:xfrm>
+            <a:off x="6324600" y="6076801"/>
+            <a:ext cx="1940718" cy="171450"/>
+          </a:xfrm>
+          <a:prstGeom prst="rect">
+            <a:avLst/>
+          </a:prstGeom>
+          <a:noFill/>
+        </p:spPr>
+        <p:txBody>
+          <a:bodyPr wrap="none" lIns="0" rIns="0" tIns="0" bIns="0" anchor="t">
+            <a:spAutoFit/>
+          </a:bodyPr>
+          <a:lstStyle/>
+          <a:p>
+            <a:pPr algn="l"/>
+            <a:r>
+              <a:rPr b="1" sz="1050" i="0" u="none">
+                <a:solidFill>
+                  <a:srgbClr val="E2E8F0"/>
+                </a:solidFill>
+                <a:latin typeface="Plus Jakarta Sans"/>
+              </a:rPr>
+              <a:t>On-Device Remediation</a:t>
+            </a:r>
+          </a:p>
+        </p:txBody>
+      </p:sp>
+    </p:spTree>
+  </p:cSld>
+  <p:clrMapOvr>
+    <a:masterClrMapping/>
+  </p:clrMapOvr>
+</p:sld>
+</file>
+
+<file path=ppt/slides/slide10.xml><?xml version="1.0" encoding="utf-8"?>
+<p:sld xmlns:a="http://schemas.openxmlformats.org/drawingml/2006/main" xmlns:p="http://schemas.openxmlformats.org/presentationml/2006/main" xmlns:r="http://schemas.openxmlformats.org/officeDocument/2006/relationships">
+  <p:cSld>
+    <p:bg>
+      <p:bgPr>
+        <a:solidFill>
+          <a:srgbClr val="0B0F19"/>
+        </a:solidFill>
+        <a:effectLst/>
+      </p:bgPr>
+    </p:bg>
+    <p:spTree>
+      <p:nvGrpSpPr>
+        <p:cNvPr id="1" name=""/>
+        <p:cNvGrpSpPr/>
+        <p:nvPr/>
+      </p:nvGrpSpPr>
+      <p:grpSpPr/>
+      <p:pic>
+        <p:nvPicPr>
+          <p:cNvPr id="2" name="Picture 1" descr="image.png"/>
+          <p:cNvPicPr>
+            <a:picLocks noChangeAspect="1"/>
+          </p:cNvPicPr>
+          <p:nvPr/>
+        </p:nvPicPr>
+        <p:blipFill>
+          <a:blip r:embed="rId2"/>
+          <a:stretch>
+            <a:fillRect/>
+          </a:stretch>
+        </p:blipFill>
+        <p:spPr>
+          <a:xfrm>
+            <a:off x="571500" y="1000125"/>
+            <a:ext cx="857250" cy="476250"/>
+          </a:xfrm>
+          <a:prstGeom prst="rect">
+            <a:avLst/>
+          </a:prstGeom>
+        </p:spPr>
+      </p:pic>
       <p:sp>
         <p:nvSpPr>
           <p:cNvPr id="3" name="TextBox 2"/>
@@ -3147,29 +3658,29 @@
         </p:nvSpPr>
         <p:spPr>
           <a:xfrm>
-            <a:off x="640080" y="960120"/>
-            <a:ext cx="10789920" cy="731520"/>
-          </a:xfrm>
-          <a:prstGeom prst="rect">
-            <a:avLst/>
-          </a:prstGeom>
-          <a:noFill/>
-        </p:spPr>
-        <p:txBody>
-          <a:bodyPr wrap="none">
-            <a:spAutoFit/>
-          </a:bodyPr>
-          <a:lstStyle/>
-          <a:p>
-            <a:pPr>
-              <a:defRPr sz="3400" b="1">
-                <a:solidFill>
-                  <a:srgbClr val="14203C"/>
-                </a:solidFill>
-              </a:defRPr>
-            </a:pPr>
-            <a:r>
-              <a:t>Snapdragon Local Review</a:t>
+            <a:off x="571500" y="571500"/>
+            <a:ext cx="2187773" cy="285750"/>
+          </a:xfrm>
+          <a:prstGeom prst="rect">
+            <a:avLst/>
+          </a:prstGeom>
+          <a:noFill/>
+        </p:spPr>
+        <p:txBody>
+          <a:bodyPr wrap="none" lIns="0" rIns="0" tIns="0" bIns="0" anchor="t">
+            <a:spAutoFit/>
+          </a:bodyPr>
+          <a:lstStyle/>
+          <a:p>
+            <a:pPr algn="l"/>
+            <a:r>
+              <a:rPr b="1" sz="1800" i="0" u="none">
+                <a:solidFill>
+                  <a:srgbClr val="F8FAFC"/>
+                </a:solidFill>
+                <a:latin typeface="Plus Jakarta Sans"/>
+              </a:rPr>
+              <a:t>Image Sources</a:t>
             </a:r>
           </a:p>
         </p:txBody>
@@ -3182,29 +3693,29 @@
         </p:nvSpPr>
         <p:spPr>
           <a:xfrm>
-            <a:off x="914400" y="1965960"/>
-            <a:ext cx="10332720" cy="502920"/>
-          </a:xfrm>
-          <a:prstGeom prst="rect">
-            <a:avLst/>
-          </a:prstGeom>
-          <a:noFill/>
-        </p:spPr>
-        <p:txBody>
-          <a:bodyPr wrap="none">
-            <a:spAutoFit/>
-          </a:bodyPr>
-          <a:lstStyle/>
-          <a:p>
-            <a:pPr>
-              <a:defRPr sz="2200" b="0">
-                <a:solidFill>
-                  <a:srgbClr val="2D374B"/>
-                </a:solidFill>
-              </a:defRPr>
-            </a:pPr>
-            <a:r>
-              <a:t>• Private, offline-first code and Vercel preflight</a:t>
+            <a:off x="1666875" y="1038225"/>
+            <a:ext cx="7012781" cy="152400"/>
+          </a:xfrm>
+          <a:prstGeom prst="rect">
+            <a:avLst/>
+          </a:prstGeom>
+          <a:noFill/>
+        </p:spPr>
+        <p:txBody>
+          <a:bodyPr wrap="none" lIns="0" rIns="0" tIns="0" bIns="0" anchor="t">
+            <a:spAutoFit/>
+          </a:bodyPr>
+          <a:lstStyle/>
+          <a:p>
+            <a:pPr algn="l"/>
+            <a:r>
+              <a:rPr b="0" sz="975" i="0" u="none">
+                <a:solidFill>
+                  <a:srgbClr val="F8FAFC"/>
+                </a:solidFill>
+                <a:latin typeface="Plus Jakarta Sans"/>
+              </a:rPr>
+              <a:t>https://www.freepng.com/uploads/images/202512/napdragon-logo-vector-png_1020x.jpg</a:t>
             </a:r>
           </a:p>
         </p:txBody>
@@ -3217,64 +3728,38 @@
         </p:nvSpPr>
         <p:spPr>
           <a:xfrm>
-            <a:off x="914400" y="2651760"/>
-            <a:ext cx="10332720" cy="502920"/>
-          </a:xfrm>
-          <a:prstGeom prst="rect">
-            <a:avLst/>
-          </a:prstGeom>
-          <a:noFill/>
-        </p:spPr>
-        <p:txBody>
-          <a:bodyPr wrap="none">
-            <a:spAutoFit/>
-          </a:bodyPr>
-          <a:lstStyle/>
-          <a:p>
-            <a:pPr>
-              <a:defRPr sz="2200" b="0">
-                <a:solidFill>
-                  <a:srgbClr val="2D374B"/>
-                </a:solidFill>
-              </a:defRPr>
-            </a:pPr>
-            <a:r>
-              <a:t>• NPU-accelerated developer feedback for Snapdragon PCs</a:t>
-            </a:r>
-          </a:p>
-        </p:txBody>
-      </p:sp>
-      <p:sp>
-        <p:nvSpPr>
-          <p:cNvPr id="6" name="TextBox 5"/>
-          <p:cNvSpPr txBox="1"/>
-          <p:nvPr/>
-        </p:nvSpPr>
-        <p:spPr>
-          <a:xfrm>
-            <a:off x="11155680" y="6172200"/>
-            <a:ext cx="457200" cy="274320"/>
-          </a:xfrm>
-          <a:prstGeom prst="rect">
-            <a:avLst/>
-          </a:prstGeom>
-          <a:noFill/>
-        </p:spPr>
-        <p:txBody>
-          <a:bodyPr wrap="none">
-            <a:spAutoFit/>
-          </a:bodyPr>
-          <a:lstStyle/>
-          <a:p>
-            <a:pPr>
-              <a:defRPr sz="1200" b="1">
-                <a:solidFill>
-                  <a:srgbClr val="646E82"/>
-                </a:solidFill>
-              </a:defRPr>
-            </a:pPr>
-            <a:r>
-              <a:t>01</a:t>
+            <a:off x="1666875" y="1238250"/>
+            <a:ext cx="2464593" cy="200025"/>
+          </a:xfrm>
+          <a:prstGeom prst="rect">
+            <a:avLst/>
+          </a:prstGeom>
+          <a:noFill/>
+        </p:spPr>
+        <p:txBody>
+          <a:bodyPr wrap="none" lIns="0" rIns="0" tIns="0" bIns="0" anchor="t">
+            <a:spAutoFit/>
+          </a:bodyPr>
+          <a:lstStyle/>
+          <a:p>
+            <a:pPr algn="l"/>
+            <a:r>
+              <a:rPr b="0" sz="1200" i="0" u="none">
+                <a:solidFill>
+                  <a:srgbClr val="F8FAFC"/>
+                </a:solidFill>
+                <a:latin typeface="Plus Jakarta Sans"/>
+              </a:rPr>
+              <a:t>Source: </a:t>
+            </a:r>
+            <a:r>
+              <a:rPr b="0" sz="1200" i="0" u="none">
+                <a:solidFill>
+                  <a:srgbClr val="4F46E5"/>
+                </a:solidFill>
+                <a:latin typeface="Plus Jakarta Sans"/>
+              </a:rPr>
+              <a:t>www.freepng.com</a:t>
             </a:r>
           </a:p>
         </p:txBody>
@@ -3293,7 +3778,7 @@
     <p:bg>
       <p:bgPr>
         <a:solidFill>
-          <a:srgbClr val="F6F8FC"/>
+          <a:srgbClr val="F8FAFC"/>
         </a:solidFill>
         <a:effectLst/>
       </p:bgPr>
@@ -3307,210 +3792,759 @@
       <p:grpSpPr/>
       <p:sp>
         <p:nvSpPr>
-          <p:cNvPr id="2" name="TextBox 1"/>
-          <p:cNvSpPr txBox="1"/>
-          <p:nvPr/>
-        </p:nvSpPr>
-        <p:spPr>
-          <a:xfrm>
-            <a:off x="640080" y="411480"/>
-            <a:ext cx="6400800" cy="274320"/>
-          </a:xfrm>
-          <a:prstGeom prst="rect">
-            <a:avLst/>
-          </a:prstGeom>
-          <a:noFill/>
-        </p:spPr>
-        <p:txBody>
-          <a:bodyPr wrap="none">
-            <a:spAutoFit/>
-          </a:bodyPr>
-          <a:lstStyle/>
-          <a:p>
-            <a:pPr>
-              <a:defRPr sz="1200" b="1">
-                <a:solidFill>
-                  <a:srgbClr val="1E6ED2"/>
-                </a:solidFill>
-              </a:defRPr>
+          <p:cNvPr id="2" name="Rounded Rectangle 1"/>
+          <p:cNvSpPr/>
+          <p:nvPr/>
+        </p:nvSpPr>
+        <p:spPr>
+          <a:xfrm>
+            <a:off x="762000" y="5848350"/>
+            <a:ext cx="10668000" cy="476250"/>
+          </a:xfrm>
+          <a:prstGeom prst="roundRect">
+            <a:avLst>
+              <a:gd name="adj" fmla="val 16000"/>
+            </a:avLst>
+          </a:prstGeom>
+          <a:solidFill>
+            <a:srgbClr val="F1F5F9"/>
+          </a:solidFill>
+          <a:ln>
+            <a:noFill/>
+          </a:ln>
+          <a:effectLst/>
+        </p:spPr>
+        <p:style>
+          <a:lnRef idx="1">
+            <a:schemeClr val="accent1"/>
+          </a:lnRef>
+          <a:fillRef idx="3">
+            <a:schemeClr val="accent1"/>
+          </a:fillRef>
+          <a:effectRef idx="2">
+            <a:schemeClr val="accent1"/>
+          </a:effectRef>
+          <a:fontRef idx="minor">
+            <a:schemeClr val="lt1"/>
+          </a:fontRef>
+        </p:style>
+        <p:txBody>
+          <a:bodyPr rtlCol="0" anchor="ctr"/>
+          <a:lstStyle/>
+          <a:p>
+            <a:pPr algn="ctr"/>
+          </a:p>
+        </p:txBody>
+      </p:sp>
+      <p:sp>
+        <p:nvSpPr>
+          <p:cNvPr id="3" name="Rounded Rectangle 2"/>
+          <p:cNvSpPr/>
+          <p:nvPr/>
+        </p:nvSpPr>
+        <p:spPr>
+          <a:xfrm>
+            <a:off x="762000" y="2459831"/>
+            <a:ext cx="3403550" cy="2138362"/>
+          </a:xfrm>
+          <a:prstGeom prst="roundRect">
+            <a:avLst>
+              <a:gd name="adj" fmla="val 5345"/>
+            </a:avLst>
+          </a:prstGeom>
+          <a:solidFill>
+            <a:srgbClr val="FFFFFF"/>
+          </a:solidFill>
+          <a:ln>
+            <a:noFill/>
+          </a:ln>
+          <a:effectLst/>
+        </p:spPr>
+        <p:style>
+          <a:lnRef idx="1">
+            <a:schemeClr val="accent1"/>
+          </a:lnRef>
+          <a:fillRef idx="3">
+            <a:schemeClr val="accent1"/>
+          </a:fillRef>
+          <a:effectRef idx="2">
+            <a:schemeClr val="accent1"/>
+          </a:effectRef>
+          <a:fontRef idx="minor">
+            <a:schemeClr val="lt1"/>
+          </a:fontRef>
+        </p:style>
+        <p:txBody>
+          <a:bodyPr rtlCol="0" anchor="ctr"/>
+          <a:lstStyle/>
+          <a:p>
+            <a:pPr algn="ctr"/>
+          </a:p>
+        </p:txBody>
+      </p:sp>
+      <p:sp>
+        <p:nvSpPr>
+          <p:cNvPr id="4" name="Rounded Rectangle 3"/>
+          <p:cNvSpPr/>
+          <p:nvPr/>
+        </p:nvSpPr>
+        <p:spPr>
+          <a:xfrm>
+            <a:off x="4394150" y="2459831"/>
+            <a:ext cx="3403550" cy="2138362"/>
+          </a:xfrm>
+          <a:prstGeom prst="roundRect">
+            <a:avLst>
+              <a:gd name="adj" fmla="val 5345"/>
+            </a:avLst>
+          </a:prstGeom>
+          <a:solidFill>
+            <a:srgbClr val="FFFFFF"/>
+          </a:solidFill>
+          <a:ln>
+            <a:noFill/>
+          </a:ln>
+          <a:effectLst/>
+        </p:spPr>
+        <p:style>
+          <a:lnRef idx="1">
+            <a:schemeClr val="accent1"/>
+          </a:lnRef>
+          <a:fillRef idx="3">
+            <a:schemeClr val="accent1"/>
+          </a:fillRef>
+          <a:effectRef idx="2">
+            <a:schemeClr val="accent1"/>
+          </a:effectRef>
+          <a:fontRef idx="minor">
+            <a:schemeClr val="lt1"/>
+          </a:fontRef>
+        </p:style>
+        <p:txBody>
+          <a:bodyPr rtlCol="0" anchor="ctr"/>
+          <a:lstStyle/>
+          <a:p>
+            <a:pPr algn="ctr"/>
+          </a:p>
+        </p:txBody>
+      </p:sp>
+      <p:sp>
+        <p:nvSpPr>
+          <p:cNvPr id="5" name="Rounded Rectangle 4"/>
+          <p:cNvSpPr/>
+          <p:nvPr/>
+        </p:nvSpPr>
+        <p:spPr>
+          <a:xfrm>
+            <a:off x="8026300" y="2459831"/>
+            <a:ext cx="3403550" cy="2138362"/>
+          </a:xfrm>
+          <a:prstGeom prst="roundRect">
+            <a:avLst>
+              <a:gd name="adj" fmla="val 5345"/>
+            </a:avLst>
+          </a:prstGeom>
+          <a:solidFill>
+            <a:srgbClr val="FFFFFF"/>
+          </a:solidFill>
+          <a:ln>
+            <a:noFill/>
+          </a:ln>
+          <a:effectLst/>
+        </p:spPr>
+        <p:style>
+          <a:lnRef idx="1">
+            <a:schemeClr val="accent1"/>
+          </a:lnRef>
+          <a:fillRef idx="3">
+            <a:schemeClr val="accent1"/>
+          </a:fillRef>
+          <a:effectRef idx="2">
+            <a:schemeClr val="accent1"/>
+          </a:effectRef>
+          <a:fontRef idx="minor">
+            <a:schemeClr val="lt1"/>
+          </a:fontRef>
+        </p:style>
+        <p:txBody>
+          <a:bodyPr rtlCol="0" anchor="ctr"/>
+          <a:lstStyle/>
+          <a:p>
+            <a:pPr algn="ctr"/>
+          </a:p>
+        </p:txBody>
+      </p:sp>
+      <p:sp>
+        <p:nvSpPr>
+          <p:cNvPr id="6" name="Rectangle 5"/>
+          <p:cNvSpPr/>
+          <p:nvPr/>
+        </p:nvSpPr>
+        <p:spPr>
+          <a:xfrm>
+            <a:off x="762000" y="2459831"/>
+            <a:ext cx="38100" cy="2138362"/>
+          </a:xfrm>
+          <a:prstGeom prst="rect">
+            <a:avLst/>
+          </a:prstGeom>
+          <a:solidFill>
+            <a:srgbClr val="E4002B"/>
+          </a:solidFill>
+          <a:ln>
+            <a:noFill/>
+          </a:ln>
+          <a:effectLst/>
+        </p:spPr>
+        <p:style>
+          <a:lnRef idx="1">
+            <a:schemeClr val="accent1"/>
+          </a:lnRef>
+          <a:fillRef idx="3">
+            <a:schemeClr val="accent1"/>
+          </a:fillRef>
+          <a:effectRef idx="2">
+            <a:schemeClr val="accent1"/>
+          </a:effectRef>
+          <a:fontRef idx="minor">
+            <a:schemeClr val="lt1"/>
+          </a:fontRef>
+        </p:style>
+        <p:txBody>
+          <a:bodyPr rtlCol="0" anchor="ctr"/>
+          <a:lstStyle/>
+          <a:p>
+            <a:pPr algn="ctr"/>
+          </a:p>
+        </p:txBody>
+      </p:sp>
+      <p:sp>
+        <p:nvSpPr>
+          <p:cNvPr id="7" name="Rectangle 6"/>
+          <p:cNvSpPr/>
+          <p:nvPr/>
+        </p:nvSpPr>
+        <p:spPr>
+          <a:xfrm>
+            <a:off x="4394150" y="2459831"/>
+            <a:ext cx="38100" cy="2138362"/>
+          </a:xfrm>
+          <a:prstGeom prst="rect">
+            <a:avLst/>
+          </a:prstGeom>
+          <a:solidFill>
+            <a:srgbClr val="0F172A"/>
+          </a:solidFill>
+          <a:ln>
+            <a:noFill/>
+          </a:ln>
+          <a:effectLst/>
+        </p:spPr>
+        <p:style>
+          <a:lnRef idx="1">
+            <a:schemeClr val="accent1"/>
+          </a:lnRef>
+          <a:fillRef idx="3">
+            <a:schemeClr val="accent1"/>
+          </a:fillRef>
+          <a:effectRef idx="2">
+            <a:schemeClr val="accent1"/>
+          </a:effectRef>
+          <a:fontRef idx="minor">
+            <a:schemeClr val="lt1"/>
+          </a:fontRef>
+        </p:style>
+        <p:txBody>
+          <a:bodyPr rtlCol="0" anchor="ctr"/>
+          <a:lstStyle/>
+          <a:p>
+            <a:pPr algn="ctr"/>
+          </a:p>
+        </p:txBody>
+      </p:sp>
+      <p:sp>
+        <p:nvSpPr>
+          <p:cNvPr id="8" name="Rectangle 7"/>
+          <p:cNvSpPr/>
+          <p:nvPr/>
+        </p:nvSpPr>
+        <p:spPr>
+          <a:xfrm>
+            <a:off x="8026300" y="2459831"/>
+            <a:ext cx="38100" cy="2138362"/>
+          </a:xfrm>
+          <a:prstGeom prst="rect">
+            <a:avLst/>
+          </a:prstGeom>
+          <a:solidFill>
+            <a:srgbClr val="64748B"/>
+          </a:solidFill>
+          <a:ln>
+            <a:noFill/>
+          </a:ln>
+          <a:effectLst/>
+        </p:spPr>
+        <p:style>
+          <a:lnRef idx="1">
+            <a:schemeClr val="accent1"/>
+          </a:lnRef>
+          <a:fillRef idx="3">
+            <a:schemeClr val="accent1"/>
+          </a:fillRef>
+          <a:effectRef idx="2">
+            <a:schemeClr val="accent1"/>
+          </a:effectRef>
+          <a:fontRef idx="minor">
+            <a:schemeClr val="lt1"/>
+          </a:fontRef>
+        </p:style>
+        <p:txBody>
+          <a:bodyPr rtlCol="0" anchor="ctr"/>
+          <a:lstStyle/>
+          <a:p>
+            <a:pPr algn="ctr"/>
+          </a:p>
+        </p:txBody>
+      </p:sp>
+      <p:pic>
+        <p:nvPicPr>
+          <p:cNvPr id="9" name="Picture 8" descr="image.png"/>
+          <p:cNvPicPr>
+            <a:picLocks noChangeAspect="1"/>
+          </p:cNvPicPr>
+          <p:nvPr/>
+        </p:nvPicPr>
+        <p:blipFill>
+          <a:blip r:embed="rId2"/>
+          <a:stretch>
+            <a:fillRect/>
+          </a:stretch>
+        </p:blipFill>
+        <p:spPr>
+          <a:xfrm>
+            <a:off x="1085850" y="2802731"/>
+            <a:ext cx="333375" cy="266700"/>
+          </a:xfrm>
+          <a:prstGeom prst="rect">
+            <a:avLst/>
+          </a:prstGeom>
+        </p:spPr>
+      </p:pic>
+      <p:pic>
+        <p:nvPicPr>
+          <p:cNvPr id="10" name="Picture 9" descr="image.png"/>
+          <p:cNvPicPr>
+            <a:picLocks noChangeAspect="1"/>
+          </p:cNvPicPr>
+          <p:nvPr/>
+        </p:nvPicPr>
+        <p:blipFill>
+          <a:blip r:embed="rId3"/>
+          <a:stretch>
+            <a:fillRect/>
+          </a:stretch>
+        </p:blipFill>
+        <p:spPr>
+          <a:xfrm>
+            <a:off x="4718000" y="2802731"/>
+            <a:ext cx="266700" cy="266700"/>
+          </a:xfrm>
+          <a:prstGeom prst="rect">
+            <a:avLst/>
+          </a:prstGeom>
+        </p:spPr>
+      </p:pic>
+      <p:pic>
+        <p:nvPicPr>
+          <p:cNvPr id="11" name="Picture 10" descr="image.png"/>
+          <p:cNvPicPr>
+            <a:picLocks noChangeAspect="1"/>
+          </p:cNvPicPr>
+          <p:nvPr/>
+        </p:nvPicPr>
+        <p:blipFill>
+          <a:blip r:embed="rId4"/>
+          <a:stretch>
+            <a:fillRect/>
+          </a:stretch>
+        </p:blipFill>
+        <p:spPr>
+          <a:xfrm>
+            <a:off x="8350150" y="2802731"/>
+            <a:ext cx="266700" cy="266700"/>
+          </a:xfrm>
+          <a:prstGeom prst="rect">
+            <a:avLst/>
+          </a:prstGeom>
+        </p:spPr>
+      </p:pic>
+      <p:sp>
+        <p:nvSpPr>
+          <p:cNvPr id="12" name="TextBox 11"/>
+          <p:cNvSpPr txBox="1"/>
+          <p:nvPr/>
+        </p:nvSpPr>
+        <p:spPr>
+          <a:xfrm>
+            <a:off x="762000" y="533400"/>
+            <a:ext cx="11430000" cy="171450"/>
+          </a:xfrm>
+          <a:prstGeom prst="rect">
+            <a:avLst/>
+          </a:prstGeom>
+          <a:noFill/>
+        </p:spPr>
+        <p:txBody>
+          <a:bodyPr wrap="none" lIns="0" rIns="0" tIns="0" bIns="0" anchor="t">
+            <a:spAutoFit/>
+          </a:bodyPr>
+          <a:lstStyle/>
+          <a:p>
+            <a:pPr algn="l"/>
+            <a:r>
+              <a:rPr b="1" sz="1050" i="0" u="none">
+                <a:solidFill>
+                  <a:srgbClr val="E4002B"/>
+                </a:solidFill>
+                <a:latin typeface="Plus Jakarta Sans"/>
+              </a:rPr>
+              <a:t>CURRENT BOTTLENECKS</a:t>
+            </a:r>
+          </a:p>
+        </p:txBody>
+      </p:sp>
+      <p:sp>
+        <p:nvSpPr>
+          <p:cNvPr id="13" name="TextBox 12"/>
+          <p:cNvSpPr txBox="1"/>
+          <p:nvPr/>
+        </p:nvSpPr>
+        <p:spPr>
+          <a:xfrm>
+            <a:off x="762000" y="781050"/>
+            <a:ext cx="11430000" cy="428625"/>
+          </a:xfrm>
+          <a:prstGeom prst="rect">
+            <a:avLst/>
+          </a:prstGeom>
+          <a:noFill/>
+        </p:spPr>
+        <p:txBody>
+          <a:bodyPr wrap="none" lIns="0" rIns="0" tIns="0" bIns="0" anchor="t">
+            <a:spAutoFit/>
+          </a:bodyPr>
+          <a:lstStyle/>
+          <a:p>
+            <a:pPr algn="l"/>
+            <a:r>
+              <a:rPr b="1" sz="2700" i="0" u="none">
+                <a:solidFill>
+                  <a:srgbClr val="0F172A"/>
+                </a:solidFill>
+                <a:latin typeface="Plus Jakarta Sans"/>
+              </a:rPr>
+              <a:t>The Developer Friction Point</a:t>
+            </a:r>
+          </a:p>
+        </p:txBody>
+      </p:sp>
+      <p:sp>
+        <p:nvSpPr>
+          <p:cNvPr id="14" name="TextBox 13"/>
+          <p:cNvSpPr txBox="1"/>
+          <p:nvPr/>
+        </p:nvSpPr>
+        <p:spPr>
+          <a:xfrm>
+            <a:off x="990600" y="6000750"/>
+            <a:ext cx="6084093" cy="171450"/>
+          </a:xfrm>
+          <a:prstGeom prst="rect">
+            <a:avLst/>
+          </a:prstGeom>
+          <a:noFill/>
+        </p:spPr>
+        <p:txBody>
+          <a:bodyPr wrap="none" lIns="0" rIns="0" tIns="0" bIns="0" anchor="t">
+            <a:spAutoFit/>
+          </a:bodyPr>
+          <a:lstStyle/>
+          <a:p>
+            <a:pPr algn="l"/>
+            <a:r>
+              <a:rPr b="1" sz="1050" i="0" u="none">
+                <a:solidFill>
+                  <a:srgbClr val="334155"/>
+                </a:solidFill>
+                <a:latin typeface="Plus Jakarta Sans"/>
+              </a:rPr>
+              <a:t>Impact:</a:t>
+            </a:r>
+            <a:r>
+              <a:rPr b="0" sz="1050" i="0" u="none">
+                <a:solidFill>
+                  <a:srgbClr val="334155"/>
+                </a:solidFill>
+                <a:latin typeface="Plus Jakarta Sans"/>
+              </a:rPr>
+              <a:t> Engineers wait minutes for feedback that should arrive in milliseconds.</a:t>
+            </a:r>
+          </a:p>
+        </p:txBody>
+      </p:sp>
+      <p:sp>
+        <p:nvSpPr>
+          <p:cNvPr id="15" name="TextBox 14"/>
+          <p:cNvSpPr txBox="1"/>
+          <p:nvPr/>
+        </p:nvSpPr>
+        <p:spPr>
+          <a:xfrm>
+            <a:off x="10058400" y="6005512"/>
+            <a:ext cx="1428750" cy="161925"/>
+          </a:xfrm>
+          <a:prstGeom prst="rect">
+            <a:avLst/>
+          </a:prstGeom>
+          <a:noFill/>
+        </p:spPr>
+        <p:txBody>
+          <a:bodyPr wrap="none" lIns="0" rIns="0" tIns="0" bIns="0" anchor="t">
+            <a:spAutoFit/>
+          </a:bodyPr>
+          <a:lstStyle/>
+          <a:p>
+            <a:pPr algn="l"/>
+            <a:r>
+              <a:rPr b="0" sz="975" i="0" u="none">
+                <a:solidFill>
+                  <a:srgbClr val="64748B"/>
+                </a:solidFill>
+                <a:latin typeface="JetBrains Mono"/>
+              </a:rPr>
+              <a:t>02 | CHALLENGES</a:t>
+            </a:r>
+          </a:p>
+        </p:txBody>
+      </p:sp>
+      <p:sp>
+        <p:nvSpPr>
+          <p:cNvPr id="16" name="TextBox 15"/>
+          <p:cNvSpPr txBox="1"/>
+          <p:nvPr/>
+        </p:nvSpPr>
+        <p:spPr>
+          <a:xfrm>
+            <a:off x="1085850" y="3259931"/>
+            <a:ext cx="3667059" cy="238125"/>
+          </a:xfrm>
+          <a:prstGeom prst="rect">
+            <a:avLst/>
+          </a:prstGeom>
+          <a:noFill/>
+        </p:spPr>
+        <p:txBody>
+          <a:bodyPr wrap="none" lIns="0" rIns="0" tIns="0" bIns="0" anchor="t">
+            <a:spAutoFit/>
+          </a:bodyPr>
+          <a:lstStyle/>
+          <a:p>
+            <a:pPr algn="l"/>
+            <a:r>
+              <a:rPr b="1" sz="1500" i="0" u="none">
+                <a:solidFill>
+                  <a:srgbClr val="0F172A"/>
+                </a:solidFill>
+                <a:latin typeface="Plus Jakarta Sans"/>
+              </a:rPr>
+              <a:t>Cloud Review Latency</a:t>
+            </a:r>
+          </a:p>
+        </p:txBody>
+      </p:sp>
+      <p:sp>
+        <p:nvSpPr>
+          <p:cNvPr id="17" name="TextBox 16"/>
+          <p:cNvSpPr txBox="1"/>
+          <p:nvPr/>
+        </p:nvSpPr>
+        <p:spPr>
+          <a:xfrm>
+            <a:off x="1085850" y="3612356"/>
+            <a:ext cx="2889200" cy="642937"/>
+          </a:xfrm>
+          <a:prstGeom prst="rect">
+            <a:avLst/>
+          </a:prstGeom>
+          <a:noFill/>
+        </p:spPr>
+        <p:txBody>
+          <a:bodyPr wrap="square" lIns="0" rIns="0" tIns="0" bIns="0" anchor="t">
+            <a:spAutoFit/>
+          </a:bodyPr>
+          <a:lstStyle/>
+          <a:p>
+            <a:pPr algn="l">
+              <a:lnSpc>
+                <a:spcPts val="1687"/>
+              </a:lnSpc>
             </a:pPr>
             <a:r>
-              <a:t>SNAPDRAGON LOCAL REVIEW</a:t>
-            </a:r>
-          </a:p>
-        </p:txBody>
-      </p:sp>
-      <p:sp>
-        <p:nvSpPr>
-          <p:cNvPr id="3" name="TextBox 2"/>
-          <p:cNvSpPr txBox="1"/>
-          <p:nvPr/>
-        </p:nvSpPr>
-        <p:spPr>
-          <a:xfrm>
-            <a:off x="640080" y="960120"/>
-            <a:ext cx="10789920" cy="731520"/>
-          </a:xfrm>
-          <a:prstGeom prst="rect">
-            <a:avLst/>
-          </a:prstGeom>
-          <a:noFill/>
-        </p:spPr>
-        <p:txBody>
-          <a:bodyPr wrap="none">
-            <a:spAutoFit/>
-          </a:bodyPr>
-          <a:lstStyle/>
-          <a:p>
-            <a:pPr>
-              <a:defRPr sz="3400" b="1">
-                <a:solidFill>
-                  <a:srgbClr val="14203C"/>
-                </a:solidFill>
-              </a:defRPr>
+              <a:rPr b="0" sz="1125" i="0" u="none">
+                <a:solidFill>
+                  <a:srgbClr val="475569"/>
+                </a:solidFill>
+                <a:latin typeface="Plus Jakarta Sans"/>
+              </a:rPr>
+              <a:t>Round-trip CI stalls development and exposes proprietary source code to offsite servers.</a:t>
+            </a:r>
+          </a:p>
+        </p:txBody>
+      </p:sp>
+      <p:sp>
+        <p:nvSpPr>
+          <p:cNvPr id="18" name="TextBox 17"/>
+          <p:cNvSpPr txBox="1"/>
+          <p:nvPr/>
+        </p:nvSpPr>
+        <p:spPr>
+          <a:xfrm>
+            <a:off x="4718000" y="3259931"/>
+            <a:ext cx="3667059" cy="238125"/>
+          </a:xfrm>
+          <a:prstGeom prst="rect">
+            <a:avLst/>
+          </a:prstGeom>
+          <a:noFill/>
+        </p:spPr>
+        <p:txBody>
+          <a:bodyPr wrap="none" lIns="0" rIns="0" tIns="0" bIns="0" anchor="t">
+            <a:spAutoFit/>
+          </a:bodyPr>
+          <a:lstStyle/>
+          <a:p>
+            <a:pPr algn="l"/>
+            <a:r>
+              <a:rPr b="1" sz="1500" i="0" u="none">
+                <a:solidFill>
+                  <a:srgbClr val="0F172A"/>
+                </a:solidFill>
+                <a:latin typeface="Plus Jakarta Sans"/>
+              </a:rPr>
+              <a:t>Silent Config Leaks</a:t>
+            </a:r>
+          </a:p>
+        </p:txBody>
+      </p:sp>
+      <p:sp>
+        <p:nvSpPr>
+          <p:cNvPr id="19" name="TextBox 18"/>
+          <p:cNvSpPr txBox="1"/>
+          <p:nvPr/>
+        </p:nvSpPr>
+        <p:spPr>
+          <a:xfrm>
+            <a:off x="4718000" y="3612356"/>
+            <a:ext cx="2889200" cy="642937"/>
+          </a:xfrm>
+          <a:prstGeom prst="rect">
+            <a:avLst/>
+          </a:prstGeom>
+          <a:noFill/>
+        </p:spPr>
+        <p:txBody>
+          <a:bodyPr wrap="square" lIns="0" rIns="0" tIns="0" bIns="0" anchor="t">
+            <a:spAutoFit/>
+          </a:bodyPr>
+          <a:lstStyle/>
+          <a:p>
+            <a:pPr algn="l">
+              <a:lnSpc>
+                <a:spcPts val="1687"/>
+              </a:lnSpc>
             </a:pPr>
             <a:r>
-              <a:t>The problem</a:t>
-            </a:r>
-          </a:p>
-        </p:txBody>
-      </p:sp>
-      <p:sp>
-        <p:nvSpPr>
-          <p:cNvPr id="4" name="TextBox 3"/>
-          <p:cNvSpPr txBox="1"/>
-          <p:nvPr/>
-        </p:nvSpPr>
-        <p:spPr>
-          <a:xfrm>
-            <a:off x="914400" y="1965960"/>
-            <a:ext cx="10332720" cy="502920"/>
-          </a:xfrm>
-          <a:prstGeom prst="rect">
-            <a:avLst/>
-          </a:prstGeom>
-          <a:noFill/>
-        </p:spPr>
-        <p:txBody>
-          <a:bodyPr wrap="none">
-            <a:spAutoFit/>
-          </a:bodyPr>
-          <a:lstStyle/>
-          <a:p>
-            <a:pPr>
-              <a:defRPr sz="2200" b="0">
-                <a:solidFill>
-                  <a:srgbClr val="2D374B"/>
-                </a:solidFill>
-              </a:defRPr>
+              <a:rPr b="0" sz="1125" i="0" u="none">
+                <a:solidFill>
+                  <a:srgbClr val="475569"/>
+                </a:solidFill>
+                <a:latin typeface="Plus Jakarta Sans"/>
+              </a:rPr>
+              <a:t>Manual checks consistently miss leaked tokens, broken rewrites, and bad Vercel headers.</a:t>
+            </a:r>
+          </a:p>
+        </p:txBody>
+      </p:sp>
+      <p:sp>
+        <p:nvSpPr>
+          <p:cNvPr id="20" name="TextBox 19"/>
+          <p:cNvSpPr txBox="1"/>
+          <p:nvPr/>
+        </p:nvSpPr>
+        <p:spPr>
+          <a:xfrm>
+            <a:off x="8350150" y="3259931"/>
+            <a:ext cx="3667059" cy="238125"/>
+          </a:xfrm>
+          <a:prstGeom prst="rect">
+            <a:avLst/>
+          </a:prstGeom>
+          <a:noFill/>
+        </p:spPr>
+        <p:txBody>
+          <a:bodyPr wrap="none" lIns="0" rIns="0" tIns="0" bIns="0" anchor="t">
+            <a:spAutoFit/>
+          </a:bodyPr>
+          <a:lstStyle/>
+          <a:p>
+            <a:pPr algn="l"/>
+            <a:r>
+              <a:rPr b="1" sz="1500" i="0" u="none">
+                <a:solidFill>
+                  <a:srgbClr val="0F172A"/>
+                </a:solidFill>
+                <a:latin typeface="Plus Jakarta Sans"/>
+              </a:rPr>
+              <a:t>CPU Resource Contention</a:t>
+            </a:r>
+          </a:p>
+        </p:txBody>
+      </p:sp>
+      <p:sp>
+        <p:nvSpPr>
+          <p:cNvPr id="21" name="TextBox 20"/>
+          <p:cNvSpPr txBox="1"/>
+          <p:nvPr/>
+        </p:nvSpPr>
+        <p:spPr>
+          <a:xfrm>
+            <a:off x="8350150" y="3612356"/>
+            <a:ext cx="2889200" cy="642937"/>
+          </a:xfrm>
+          <a:prstGeom prst="rect">
+            <a:avLst/>
+          </a:prstGeom>
+          <a:noFill/>
+        </p:spPr>
+        <p:txBody>
+          <a:bodyPr wrap="square" lIns="0" rIns="0" tIns="0" bIns="0" anchor="t">
+            <a:spAutoFit/>
+          </a:bodyPr>
+          <a:lstStyle/>
+          <a:p>
+            <a:pPr algn="l">
+              <a:lnSpc>
+                <a:spcPts val="1687"/>
+              </a:lnSpc>
             </a:pPr>
             <a:r>
-              <a:t>• Cloud code review creates latency and data-governance risk</a:t>
-            </a:r>
-          </a:p>
-        </p:txBody>
-      </p:sp>
-      <p:sp>
-        <p:nvSpPr>
-          <p:cNvPr id="5" name="TextBox 4"/>
-          <p:cNvSpPr txBox="1"/>
-          <p:nvPr/>
-        </p:nvSpPr>
-        <p:spPr>
-          <a:xfrm>
-            <a:off x="914400" y="2651760"/>
-            <a:ext cx="10332720" cy="502920"/>
-          </a:xfrm>
-          <a:prstGeom prst="rect">
-            <a:avLst/>
-          </a:prstGeom>
-          <a:noFill/>
-        </p:spPr>
-        <p:txBody>
-          <a:bodyPr wrap="none">
-            <a:spAutoFit/>
-          </a:bodyPr>
-          <a:lstStyle/>
-          <a:p>
-            <a:pPr>
-              <a:defRPr sz="2200" b="0">
-                <a:solidFill>
-                  <a:srgbClr val="2D374B"/>
-                </a:solidFill>
-              </a:defRPr>
-            </a:pPr>
-            <a:r>
-              <a:t>• Manual pre-deployment checks miss secrets and configuration errors</a:t>
-            </a:r>
-          </a:p>
-        </p:txBody>
-      </p:sp>
-      <p:sp>
-        <p:nvSpPr>
-          <p:cNvPr id="6" name="TextBox 5"/>
-          <p:cNvSpPr txBox="1"/>
-          <p:nvPr/>
-        </p:nvSpPr>
-        <p:spPr>
-          <a:xfrm>
-            <a:off x="914400" y="3337560"/>
-            <a:ext cx="10332720" cy="502920"/>
-          </a:xfrm>
-          <a:prstGeom prst="rect">
-            <a:avLst/>
-          </a:prstGeom>
-          <a:noFill/>
-        </p:spPr>
-        <p:txBody>
-          <a:bodyPr wrap="none">
-            <a:spAutoFit/>
-          </a:bodyPr>
-          <a:lstStyle/>
-          <a:p>
-            <a:pPr>
-              <a:defRPr sz="2200" b="0">
-                <a:solidFill>
-                  <a:srgbClr val="2D374B"/>
-                </a:solidFill>
-              </a:defRPr>
-            </a:pPr>
-            <a:r>
-              <a:t>• Local builds already consume the CPU developers need for feedback</a:t>
-            </a:r>
-          </a:p>
-        </p:txBody>
-      </p:sp>
-      <p:sp>
-        <p:nvSpPr>
-          <p:cNvPr id="7" name="TextBox 6"/>
-          <p:cNvSpPr txBox="1"/>
-          <p:nvPr/>
-        </p:nvSpPr>
-        <p:spPr>
-          <a:xfrm>
-            <a:off x="11155680" y="6172200"/>
-            <a:ext cx="457200" cy="274320"/>
-          </a:xfrm>
-          <a:prstGeom prst="rect">
-            <a:avLst/>
-          </a:prstGeom>
-          <a:noFill/>
-        </p:spPr>
-        <p:txBody>
-          <a:bodyPr wrap="none">
-            <a:spAutoFit/>
-          </a:bodyPr>
-          <a:lstStyle/>
-          <a:p>
-            <a:pPr>
-              <a:defRPr sz="1200" b="1">
-                <a:solidFill>
-                  <a:srgbClr val="646E82"/>
-                </a:solidFill>
-              </a:defRPr>
-            </a:pPr>
-            <a:r>
-              <a:t>02</a:t>
+              <a:rPr b="0" sz="1125" i="0" u="none">
+                <a:solidFill>
+                  <a:srgbClr val="475569"/>
+                </a:solidFill>
+                <a:latin typeface="Plus Jakarta Sans"/>
+              </a:rPr>
+              <a:t>Local linters and LLMs monopolize CPU cycles required for compilers and dev servers.</a:t>
             </a:r>
           </a:p>
         </p:txBody>
@@ -3529,7 +4563,7 @@
     <p:bg>
       <p:bgPr>
         <a:solidFill>
-          <a:srgbClr val="F6F8FC"/>
+          <a:srgbClr val="FFFFFF"/>
         </a:solidFill>
         <a:effectLst/>
       </p:bgPr>
@@ -3543,245 +4577,1029 @@
       <p:grpSpPr/>
       <p:sp>
         <p:nvSpPr>
-          <p:cNvPr id="2" name="TextBox 1"/>
-          <p:cNvSpPr txBox="1"/>
-          <p:nvPr/>
-        </p:nvSpPr>
-        <p:spPr>
-          <a:xfrm>
-            <a:off x="640080" y="411480"/>
-            <a:ext cx="6400800" cy="274320"/>
-          </a:xfrm>
-          <a:prstGeom prst="rect">
-            <a:avLst/>
-          </a:prstGeom>
-          <a:noFill/>
-        </p:spPr>
-        <p:txBody>
-          <a:bodyPr wrap="none">
-            <a:spAutoFit/>
-          </a:bodyPr>
-          <a:lstStyle/>
-          <a:p>
-            <a:pPr>
-              <a:defRPr sz="1200" b="1">
-                <a:solidFill>
-                  <a:srgbClr val="1E6ED2"/>
-                </a:solidFill>
-              </a:defRPr>
+          <p:cNvPr id="2" name="Rectangle 1"/>
+          <p:cNvSpPr/>
+          <p:nvPr/>
+        </p:nvSpPr>
+        <p:spPr>
+          <a:xfrm>
+            <a:off x="762000" y="6000750"/>
+            <a:ext cx="10668000" cy="323850"/>
+          </a:xfrm>
+          <a:prstGeom prst="rect">
+            <a:avLst/>
+          </a:prstGeom>
+          <a:noFill/>
+          <a:ln>
+            <a:noFill/>
+          </a:ln>
+          <a:effectLst/>
+        </p:spPr>
+        <p:style>
+          <a:lnRef idx="1">
+            <a:schemeClr val="accent1"/>
+          </a:lnRef>
+          <a:fillRef idx="3">
+            <a:schemeClr val="accent1"/>
+          </a:fillRef>
+          <a:effectRef idx="2">
+            <a:schemeClr val="accent1"/>
+          </a:effectRef>
+          <a:fontRef idx="minor">
+            <a:schemeClr val="lt1"/>
+          </a:fontRef>
+        </p:style>
+        <p:txBody>
+          <a:bodyPr rtlCol="0" anchor="ctr"/>
+          <a:lstStyle/>
+          <a:p>
+            <a:pPr algn="ctr"/>
+          </a:p>
+        </p:txBody>
+      </p:sp>
+      <p:sp>
+        <p:nvSpPr>
+          <p:cNvPr id="3" name="Rounded Rectangle 2"/>
+          <p:cNvSpPr/>
+          <p:nvPr/>
+        </p:nvSpPr>
+        <p:spPr>
+          <a:xfrm>
+            <a:off x="762000" y="2209800"/>
+            <a:ext cx="5771257" cy="2790825"/>
+          </a:xfrm>
+          <a:prstGeom prst="roundRect">
+            <a:avLst>
+              <a:gd name="adj" fmla="val 4778"/>
+            </a:avLst>
+          </a:prstGeom>
+          <a:solidFill>
+            <a:srgbClr val="0F172A"/>
+          </a:solidFill>
+          <a:ln>
+            <a:noFill/>
+          </a:ln>
+          <a:effectLst/>
+        </p:spPr>
+        <p:style>
+          <a:lnRef idx="1">
+            <a:schemeClr val="accent1"/>
+          </a:lnRef>
+          <a:fillRef idx="3">
+            <a:schemeClr val="accent1"/>
+          </a:fillRef>
+          <a:effectRef idx="2">
+            <a:schemeClr val="accent1"/>
+          </a:effectRef>
+          <a:fontRef idx="minor">
+            <a:schemeClr val="lt1"/>
+          </a:fontRef>
+        </p:style>
+        <p:txBody>
+          <a:bodyPr rtlCol="0" anchor="ctr"/>
+          <a:lstStyle/>
+          <a:p>
+            <a:pPr algn="ctr"/>
+          </a:p>
+        </p:txBody>
+      </p:sp>
+      <p:sp>
+        <p:nvSpPr>
+          <p:cNvPr id="4" name="Rectangle 3"/>
+          <p:cNvSpPr/>
+          <p:nvPr/>
+        </p:nvSpPr>
+        <p:spPr>
+          <a:xfrm>
+            <a:off x="762000" y="6000750"/>
+            <a:ext cx="10668000" cy="9525"/>
+          </a:xfrm>
+          <a:prstGeom prst="rect">
+            <a:avLst/>
+          </a:prstGeom>
+          <a:solidFill>
+            <a:srgbClr val="E2E8F0"/>
+          </a:solidFill>
+          <a:ln>
+            <a:noFill/>
+          </a:ln>
+          <a:effectLst/>
+        </p:spPr>
+        <p:style>
+          <a:lnRef idx="1">
+            <a:schemeClr val="accent1"/>
+          </a:lnRef>
+          <a:fillRef idx="3">
+            <a:schemeClr val="accent1"/>
+          </a:fillRef>
+          <a:effectRef idx="2">
+            <a:schemeClr val="accent1"/>
+          </a:effectRef>
+          <a:fontRef idx="minor">
+            <a:schemeClr val="lt1"/>
+          </a:fontRef>
+        </p:style>
+        <p:txBody>
+          <a:bodyPr rtlCol="0" anchor="ctr"/>
+          <a:lstStyle/>
+          <a:p>
+            <a:pPr algn="ctr"/>
+          </a:p>
+        </p:txBody>
+      </p:sp>
+      <p:sp>
+        <p:nvSpPr>
+          <p:cNvPr id="5" name="Rounded Rectangle 4"/>
+          <p:cNvSpPr/>
+          <p:nvPr/>
+        </p:nvSpPr>
+        <p:spPr>
+          <a:xfrm>
+            <a:off x="1143000" y="2600325"/>
+            <a:ext cx="1240184" cy="219075"/>
+          </a:xfrm>
+          <a:prstGeom prst="roundRect">
+            <a:avLst>
+              <a:gd name="adj" fmla="val 17391"/>
+            </a:avLst>
+          </a:prstGeom>
+          <a:solidFill>
+            <a:srgbClr val="E4002B"/>
+          </a:solidFill>
+          <a:ln>
+            <a:noFill/>
+          </a:ln>
+          <a:effectLst/>
+        </p:spPr>
+        <p:style>
+          <a:lnRef idx="1">
+            <a:schemeClr val="accent1"/>
+          </a:lnRef>
+          <a:fillRef idx="3">
+            <a:schemeClr val="accent1"/>
+          </a:fillRef>
+          <a:effectRef idx="2">
+            <a:schemeClr val="accent1"/>
+          </a:effectRef>
+          <a:fontRef idx="minor">
+            <a:schemeClr val="lt1"/>
+          </a:fontRef>
+        </p:style>
+        <p:txBody>
+          <a:bodyPr rtlCol="0" anchor="ctr"/>
+          <a:lstStyle/>
+          <a:p>
+            <a:pPr algn="ctr"/>
+          </a:p>
+        </p:txBody>
+      </p:sp>
+      <p:sp>
+        <p:nvSpPr>
+          <p:cNvPr id="6" name="Rounded Rectangle 5"/>
+          <p:cNvSpPr/>
+          <p:nvPr/>
+        </p:nvSpPr>
+        <p:spPr>
+          <a:xfrm>
+            <a:off x="6876157" y="1924050"/>
+            <a:ext cx="4553842" cy="1019175"/>
+          </a:xfrm>
+          <a:prstGeom prst="roundRect">
+            <a:avLst>
+              <a:gd name="adj" fmla="val 9345"/>
+            </a:avLst>
+          </a:prstGeom>
+          <a:solidFill>
+            <a:srgbClr val="F8FAFC"/>
+          </a:solidFill>
+          <a:ln>
+            <a:noFill/>
+          </a:ln>
+          <a:effectLst/>
+        </p:spPr>
+        <p:style>
+          <a:lnRef idx="1">
+            <a:schemeClr val="accent1"/>
+          </a:lnRef>
+          <a:fillRef idx="3">
+            <a:schemeClr val="accent1"/>
+          </a:fillRef>
+          <a:effectRef idx="2">
+            <a:schemeClr val="accent1"/>
+          </a:effectRef>
+          <a:fontRef idx="minor">
+            <a:schemeClr val="lt1"/>
+          </a:fontRef>
+        </p:style>
+        <p:txBody>
+          <a:bodyPr rtlCol="0" anchor="ctr"/>
+          <a:lstStyle/>
+          <a:p>
+            <a:pPr algn="ctr"/>
+          </a:p>
+        </p:txBody>
+      </p:sp>
+      <p:sp>
+        <p:nvSpPr>
+          <p:cNvPr id="7" name="Rounded Rectangle 6"/>
+          <p:cNvSpPr/>
+          <p:nvPr/>
+        </p:nvSpPr>
+        <p:spPr>
+          <a:xfrm>
+            <a:off x="6876157" y="3095625"/>
+            <a:ext cx="4553842" cy="1019175"/>
+          </a:xfrm>
+          <a:prstGeom prst="roundRect">
+            <a:avLst>
+              <a:gd name="adj" fmla="val 9345"/>
+            </a:avLst>
+          </a:prstGeom>
+          <a:solidFill>
+            <a:srgbClr val="F8FAFC"/>
+          </a:solidFill>
+          <a:ln>
+            <a:noFill/>
+          </a:ln>
+          <a:effectLst/>
+        </p:spPr>
+        <p:style>
+          <a:lnRef idx="1">
+            <a:schemeClr val="accent1"/>
+          </a:lnRef>
+          <a:fillRef idx="3">
+            <a:schemeClr val="accent1"/>
+          </a:fillRef>
+          <a:effectRef idx="2">
+            <a:schemeClr val="accent1"/>
+          </a:effectRef>
+          <a:fontRef idx="minor">
+            <a:schemeClr val="lt1"/>
+          </a:fontRef>
+        </p:style>
+        <p:txBody>
+          <a:bodyPr rtlCol="0" anchor="ctr"/>
+          <a:lstStyle/>
+          <a:p>
+            <a:pPr algn="ctr"/>
+          </a:p>
+        </p:txBody>
+      </p:sp>
+      <p:sp>
+        <p:nvSpPr>
+          <p:cNvPr id="8" name="Rounded Rectangle 7"/>
+          <p:cNvSpPr/>
+          <p:nvPr/>
+        </p:nvSpPr>
+        <p:spPr>
+          <a:xfrm>
+            <a:off x="6876157" y="4267200"/>
+            <a:ext cx="4553842" cy="1019175"/>
+          </a:xfrm>
+          <a:prstGeom prst="roundRect">
+            <a:avLst>
+              <a:gd name="adj" fmla="val 9345"/>
+            </a:avLst>
+          </a:prstGeom>
+          <a:solidFill>
+            <a:srgbClr val="F8FAFC"/>
+          </a:solidFill>
+          <a:ln>
+            <a:noFill/>
+          </a:ln>
+          <a:effectLst/>
+        </p:spPr>
+        <p:style>
+          <a:lnRef idx="1">
+            <a:schemeClr val="accent1"/>
+          </a:lnRef>
+          <a:fillRef idx="3">
+            <a:schemeClr val="accent1"/>
+          </a:fillRef>
+          <a:effectRef idx="2">
+            <a:schemeClr val="accent1"/>
+          </a:effectRef>
+          <a:fontRef idx="minor">
+            <a:schemeClr val="lt1"/>
+          </a:fontRef>
+        </p:style>
+        <p:txBody>
+          <a:bodyPr rtlCol="0" anchor="ctr"/>
+          <a:lstStyle/>
+          <a:p>
+            <a:pPr algn="ctr"/>
+          </a:p>
+        </p:txBody>
+      </p:sp>
+      <p:sp>
+        <p:nvSpPr>
+          <p:cNvPr id="9" name="Rectangle 8"/>
+          <p:cNvSpPr/>
+          <p:nvPr/>
+        </p:nvSpPr>
+        <p:spPr>
+          <a:xfrm>
+            <a:off x="6876157" y="1924050"/>
+            <a:ext cx="38100" cy="1019175"/>
+          </a:xfrm>
+          <a:prstGeom prst="rect">
+            <a:avLst/>
+          </a:prstGeom>
+          <a:solidFill>
+            <a:srgbClr val="E4002B"/>
+          </a:solidFill>
+          <a:ln>
+            <a:noFill/>
+          </a:ln>
+          <a:effectLst/>
+        </p:spPr>
+        <p:style>
+          <a:lnRef idx="1">
+            <a:schemeClr val="accent1"/>
+          </a:lnRef>
+          <a:fillRef idx="3">
+            <a:schemeClr val="accent1"/>
+          </a:fillRef>
+          <a:effectRef idx="2">
+            <a:schemeClr val="accent1"/>
+          </a:effectRef>
+          <a:fontRef idx="minor">
+            <a:schemeClr val="lt1"/>
+          </a:fontRef>
+        </p:style>
+        <p:txBody>
+          <a:bodyPr rtlCol="0" anchor="ctr"/>
+          <a:lstStyle/>
+          <a:p>
+            <a:pPr algn="ctr"/>
+          </a:p>
+        </p:txBody>
+      </p:sp>
+      <p:sp>
+        <p:nvSpPr>
+          <p:cNvPr id="10" name="Rectangle 9"/>
+          <p:cNvSpPr/>
+          <p:nvPr/>
+        </p:nvSpPr>
+        <p:spPr>
+          <a:xfrm>
+            <a:off x="6876157" y="3095625"/>
+            <a:ext cx="38100" cy="1019175"/>
+          </a:xfrm>
+          <a:prstGeom prst="rect">
+            <a:avLst/>
+          </a:prstGeom>
+          <a:solidFill>
+            <a:srgbClr val="0F172A"/>
+          </a:solidFill>
+          <a:ln>
+            <a:noFill/>
+          </a:ln>
+          <a:effectLst/>
+        </p:spPr>
+        <p:style>
+          <a:lnRef idx="1">
+            <a:schemeClr val="accent1"/>
+          </a:lnRef>
+          <a:fillRef idx="3">
+            <a:schemeClr val="accent1"/>
+          </a:fillRef>
+          <a:effectRef idx="2">
+            <a:schemeClr val="accent1"/>
+          </a:effectRef>
+          <a:fontRef idx="minor">
+            <a:schemeClr val="lt1"/>
+          </a:fontRef>
+        </p:style>
+        <p:txBody>
+          <a:bodyPr rtlCol="0" anchor="ctr"/>
+          <a:lstStyle/>
+          <a:p>
+            <a:pPr algn="ctr"/>
+          </a:p>
+        </p:txBody>
+      </p:sp>
+      <p:sp>
+        <p:nvSpPr>
+          <p:cNvPr id="11" name="Rectangle 10"/>
+          <p:cNvSpPr/>
+          <p:nvPr/>
+        </p:nvSpPr>
+        <p:spPr>
+          <a:xfrm>
+            <a:off x="6876157" y="4267200"/>
+            <a:ext cx="38100" cy="1019175"/>
+          </a:xfrm>
+          <a:prstGeom prst="rect">
+            <a:avLst/>
+          </a:prstGeom>
+          <a:solidFill>
+            <a:srgbClr val="64748B"/>
+          </a:solidFill>
+          <a:ln>
+            <a:noFill/>
+          </a:ln>
+          <a:effectLst/>
+        </p:spPr>
+        <p:style>
+          <a:lnRef idx="1">
+            <a:schemeClr val="accent1"/>
+          </a:lnRef>
+          <a:fillRef idx="3">
+            <a:schemeClr val="accent1"/>
+          </a:fillRef>
+          <a:effectRef idx="2">
+            <a:schemeClr val="accent1"/>
+          </a:effectRef>
+          <a:fontRef idx="minor">
+            <a:schemeClr val="lt1"/>
+          </a:fontRef>
+        </p:style>
+        <p:txBody>
+          <a:bodyPr rtlCol="0" anchor="ctr"/>
+          <a:lstStyle/>
+          <a:p>
+            <a:pPr algn="ctr"/>
+          </a:p>
+        </p:txBody>
+      </p:sp>
+      <p:pic>
+        <p:nvPicPr>
+          <p:cNvPr id="12" name="Picture 11" descr="image.png"/>
+          <p:cNvPicPr>
+            <a:picLocks noChangeAspect="1"/>
+          </p:cNvPicPr>
+          <p:nvPr/>
+        </p:nvPicPr>
+        <p:blipFill>
+          <a:blip r:embed="rId2"/>
+          <a:stretch>
+            <a:fillRect/>
+          </a:stretch>
+        </p:blipFill>
+        <p:spPr>
+          <a:xfrm>
+            <a:off x="1143000" y="4467225"/>
+            <a:ext cx="114300" cy="133350"/>
+          </a:xfrm>
+          <a:prstGeom prst="rect">
+            <a:avLst/>
+          </a:prstGeom>
+        </p:spPr>
+      </p:pic>
+      <p:pic>
+        <p:nvPicPr>
+          <p:cNvPr id="13" name="Picture 12" descr="image.png"/>
+          <p:cNvPicPr>
+            <a:picLocks noChangeAspect="1"/>
+          </p:cNvPicPr>
+          <p:nvPr/>
+        </p:nvPicPr>
+        <p:blipFill>
+          <a:blip r:embed="rId3"/>
+          <a:stretch>
+            <a:fillRect/>
+          </a:stretch>
+        </p:blipFill>
+        <p:spPr>
+          <a:xfrm>
+            <a:off x="2295525" y="4467225"/>
+            <a:ext cx="133350" cy="133350"/>
+          </a:xfrm>
+          <a:prstGeom prst="rect">
+            <a:avLst/>
+          </a:prstGeom>
+        </p:spPr>
+      </p:pic>
+      <p:sp>
+        <p:nvSpPr>
+          <p:cNvPr id="14" name="TextBox 13"/>
+          <p:cNvSpPr txBox="1"/>
+          <p:nvPr/>
+        </p:nvSpPr>
+        <p:spPr>
+          <a:xfrm>
+            <a:off x="762000" y="533400"/>
+            <a:ext cx="11430000" cy="171450"/>
+          </a:xfrm>
+          <a:prstGeom prst="rect">
+            <a:avLst/>
+          </a:prstGeom>
+          <a:noFill/>
+        </p:spPr>
+        <p:txBody>
+          <a:bodyPr wrap="none" lIns="0" rIns="0" tIns="0" bIns="0" anchor="t">
+            <a:spAutoFit/>
+          </a:bodyPr>
+          <a:lstStyle/>
+          <a:p>
+            <a:pPr algn="l"/>
+            <a:r>
+              <a:rPr b="1" sz="1050" i="0" u="none">
+                <a:solidFill>
+                  <a:srgbClr val="E4002B"/>
+                </a:solidFill>
+                <a:latin typeface="Plus Jakarta Sans"/>
+              </a:rPr>
+              <a:t>ARCHITECTURAL ANSWER</a:t>
+            </a:r>
+          </a:p>
+        </p:txBody>
+      </p:sp>
+      <p:sp>
+        <p:nvSpPr>
+          <p:cNvPr id="15" name="TextBox 14"/>
+          <p:cNvSpPr txBox="1"/>
+          <p:nvPr/>
+        </p:nvSpPr>
+        <p:spPr>
+          <a:xfrm>
+            <a:off x="762000" y="781050"/>
+            <a:ext cx="11430000" cy="428625"/>
+          </a:xfrm>
+          <a:prstGeom prst="rect">
+            <a:avLst/>
+          </a:prstGeom>
+          <a:noFill/>
+        </p:spPr>
+        <p:txBody>
+          <a:bodyPr wrap="none" lIns="0" rIns="0" tIns="0" bIns="0" anchor="t">
+            <a:spAutoFit/>
+          </a:bodyPr>
+          <a:lstStyle/>
+          <a:p>
+            <a:pPr algn="l"/>
+            <a:r>
+              <a:rPr b="1" sz="2700" i="0" u="none">
+                <a:solidFill>
+                  <a:srgbClr val="0F172A"/>
+                </a:solidFill>
+                <a:latin typeface="Plus Jakarta Sans"/>
+              </a:rPr>
+              <a:t>Instant Local Preflight</a:t>
+            </a:r>
+          </a:p>
+        </p:txBody>
+      </p:sp>
+      <p:sp>
+        <p:nvSpPr>
+          <p:cNvPr id="16" name="TextBox 15"/>
+          <p:cNvSpPr txBox="1"/>
+          <p:nvPr/>
+        </p:nvSpPr>
+        <p:spPr>
+          <a:xfrm>
+            <a:off x="762000" y="6167437"/>
+            <a:ext cx="5405437" cy="152400"/>
+          </a:xfrm>
+          <a:prstGeom prst="rect">
+            <a:avLst/>
+          </a:prstGeom>
+          <a:noFill/>
+        </p:spPr>
+        <p:txBody>
+          <a:bodyPr wrap="none" lIns="0" rIns="0" tIns="0" bIns="0" anchor="t">
+            <a:spAutoFit/>
+          </a:bodyPr>
+          <a:lstStyle/>
+          <a:p>
+            <a:pPr algn="l"/>
+            <a:r>
+              <a:rPr b="0" sz="975" i="0" u="none">
+                <a:solidFill>
+                  <a:srgbClr val="64748B"/>
+                </a:solidFill>
+                <a:latin typeface="Plus Jakarta Sans"/>
+              </a:rPr>
+              <a:t>Delivers sub-100ms rule evaluation alongside isolated local LLM inference.</a:t>
+            </a:r>
+          </a:p>
+        </p:txBody>
+      </p:sp>
+      <p:sp>
+        <p:nvSpPr>
+          <p:cNvPr id="17" name="TextBox 16"/>
+          <p:cNvSpPr txBox="1"/>
+          <p:nvPr/>
+        </p:nvSpPr>
+        <p:spPr>
+          <a:xfrm>
+            <a:off x="10439400" y="6162675"/>
+            <a:ext cx="1276350" cy="161925"/>
+          </a:xfrm>
+          <a:prstGeom prst="rect">
+            <a:avLst/>
+          </a:prstGeom>
+          <a:noFill/>
+        </p:spPr>
+        <p:txBody>
+          <a:bodyPr wrap="none" lIns="0" rIns="0" tIns="0" bIns="0" anchor="t">
+            <a:spAutoFit/>
+          </a:bodyPr>
+          <a:lstStyle/>
+          <a:p>
+            <a:pPr algn="l"/>
+            <a:r>
+              <a:rPr b="0" sz="975" i="0" u="none">
+                <a:solidFill>
+                  <a:srgbClr val="0F172A"/>
+                </a:solidFill>
+                <a:latin typeface="JetBrains Mono"/>
+              </a:rPr>
+              <a:t>03 | SOLUTION</a:t>
+            </a:r>
+          </a:p>
+        </p:txBody>
+      </p:sp>
+      <p:sp>
+        <p:nvSpPr>
+          <p:cNvPr id="18" name="TextBox 17"/>
+          <p:cNvSpPr txBox="1"/>
+          <p:nvPr/>
+        </p:nvSpPr>
+        <p:spPr>
+          <a:xfrm>
+            <a:off x="1238250" y="2638425"/>
+            <a:ext cx="1144934" cy="142875"/>
+          </a:xfrm>
+          <a:prstGeom prst="rect">
+            <a:avLst/>
+          </a:prstGeom>
+          <a:noFill/>
+        </p:spPr>
+        <p:txBody>
+          <a:bodyPr wrap="square" lIns="0" rIns="0" tIns="0" bIns="0" anchor="t">
+            <a:spAutoFit/>
+          </a:bodyPr>
+          <a:lstStyle/>
+          <a:p>
+            <a:pPr algn="l"/>
+            <a:r>
+              <a:rPr b="1" sz="900" i="0" u="none">
+                <a:solidFill>
+                  <a:srgbClr val="FFFFFF"/>
+                </a:solidFill>
+                <a:latin typeface="Plus Jakarta Sans"/>
+              </a:rPr>
+              <a:t>CORE PRINCIPLE</a:t>
+            </a:r>
+          </a:p>
+        </p:txBody>
+      </p:sp>
+      <p:sp>
+        <p:nvSpPr>
+          <p:cNvPr id="19" name="TextBox 18"/>
+          <p:cNvSpPr txBox="1"/>
+          <p:nvPr/>
+        </p:nvSpPr>
+        <p:spPr>
+          <a:xfrm>
+            <a:off x="1143000" y="2990850"/>
+            <a:ext cx="5359732" cy="619125"/>
+          </a:xfrm>
+          <a:prstGeom prst="rect">
+            <a:avLst/>
+          </a:prstGeom>
+          <a:noFill/>
+        </p:spPr>
+        <p:txBody>
+          <a:bodyPr wrap="square" lIns="0" rIns="0" tIns="0" bIns="0" anchor="t">
+            <a:spAutoFit/>
+          </a:bodyPr>
+          <a:lstStyle/>
+          <a:p>
+            <a:pPr algn="l">
+              <a:lnSpc>
+                <a:spcPts val="2437"/>
+              </a:lnSpc>
             </a:pPr>
             <a:r>
-              <a:t>SNAPDRAGON LOCAL REVIEW</a:t>
-            </a:r>
-          </a:p>
-        </p:txBody>
-      </p:sp>
-      <p:sp>
-        <p:nvSpPr>
-          <p:cNvPr id="3" name="TextBox 2"/>
-          <p:cNvSpPr txBox="1"/>
-          <p:nvPr/>
-        </p:nvSpPr>
-        <p:spPr>
-          <a:xfrm>
-            <a:off x="640080" y="960120"/>
-            <a:ext cx="10789920" cy="731520"/>
-          </a:xfrm>
-          <a:prstGeom prst="rect">
-            <a:avLst/>
-          </a:prstGeom>
-          <a:noFill/>
-        </p:spPr>
-        <p:txBody>
-          <a:bodyPr wrap="none">
-            <a:spAutoFit/>
-          </a:bodyPr>
-          <a:lstStyle/>
-          <a:p>
-            <a:pPr>
-              <a:defRPr sz="3400" b="1">
-                <a:solidFill>
-                  <a:srgbClr val="14203C"/>
-                </a:solidFill>
-              </a:defRPr>
+              <a:rPr b="1" sz="1950" i="0" u="none">
+                <a:solidFill>
+                  <a:srgbClr val="FFFFFF"/>
+                </a:solidFill>
+                <a:latin typeface="Plus Jakarta Sans"/>
+              </a:rPr>
+              <a:t>One CLI command before commit or deployment.</a:t>
+            </a:r>
+          </a:p>
+        </p:txBody>
+      </p:sp>
+      <p:sp>
+        <p:nvSpPr>
+          <p:cNvPr id="20" name="TextBox 19"/>
+          <p:cNvSpPr txBox="1"/>
+          <p:nvPr/>
+        </p:nvSpPr>
+        <p:spPr>
+          <a:xfrm>
+            <a:off x="1143000" y="3762375"/>
+            <a:ext cx="5104507" cy="457200"/>
+          </a:xfrm>
+          <a:prstGeom prst="rect">
+            <a:avLst/>
+          </a:prstGeom>
+          <a:noFill/>
+        </p:spPr>
+        <p:txBody>
+          <a:bodyPr wrap="square" lIns="0" rIns="0" tIns="0" bIns="0" anchor="t">
+            <a:spAutoFit/>
+          </a:bodyPr>
+          <a:lstStyle/>
+          <a:p>
+            <a:pPr algn="l">
+              <a:lnSpc>
+                <a:spcPts val="1800"/>
+              </a:lnSpc>
             </a:pPr>
             <a:r>
-              <a:t>The solution</a:t>
-            </a:r>
-          </a:p>
-        </p:txBody>
-      </p:sp>
-      <p:sp>
-        <p:nvSpPr>
-          <p:cNvPr id="4" name="TextBox 3"/>
-          <p:cNvSpPr txBox="1"/>
-          <p:nvPr/>
-        </p:nvSpPr>
-        <p:spPr>
-          <a:xfrm>
-            <a:off x="914400" y="1965960"/>
-            <a:ext cx="10332720" cy="502920"/>
-          </a:xfrm>
-          <a:prstGeom prst="rect">
-            <a:avLst/>
-          </a:prstGeom>
-          <a:noFill/>
-        </p:spPr>
-        <p:txBody>
-          <a:bodyPr wrap="none">
-            <a:spAutoFit/>
-          </a:bodyPr>
-          <a:lstStyle/>
-          <a:p>
-            <a:pPr>
-              <a:defRPr sz="2200" b="0">
-                <a:solidFill>
-                  <a:srgbClr val="2D374B"/>
-                </a:solidFill>
-              </a:defRPr>
-            </a:pPr>
-            <a:r>
-              <a:t>• A single local CLI before commit or deployment</a:t>
-            </a:r>
-          </a:p>
-        </p:txBody>
-      </p:sp>
-      <p:sp>
-        <p:nvSpPr>
-          <p:cNvPr id="5" name="TextBox 4"/>
-          <p:cNvSpPr txBox="1"/>
-          <p:nvPr/>
-        </p:nvSpPr>
-        <p:spPr>
-          <a:xfrm>
-            <a:off x="914400" y="2651760"/>
-            <a:ext cx="10332720" cy="502920"/>
-          </a:xfrm>
-          <a:prstGeom prst="rect">
-            <a:avLst/>
-          </a:prstGeom>
-          <a:noFill/>
-        </p:spPr>
-        <p:txBody>
-          <a:bodyPr wrap="none">
-            <a:spAutoFit/>
-          </a:bodyPr>
-          <a:lstStyle/>
-          <a:p>
-            <a:pPr>
-              <a:defRPr sz="2200" b="0">
-                <a:solidFill>
-                  <a:srgbClr val="2D374B"/>
-                </a:solidFill>
-              </a:defRPr>
-            </a:pPr>
-            <a:r>
-              <a:t>• Deterministic checks catch actionable issues immediately</a:t>
-            </a:r>
-          </a:p>
-        </p:txBody>
-      </p:sp>
-      <p:sp>
-        <p:nvSpPr>
-          <p:cNvPr id="6" name="TextBox 5"/>
-          <p:cNvSpPr txBox="1"/>
-          <p:nvPr/>
-        </p:nvSpPr>
-        <p:spPr>
-          <a:xfrm>
-            <a:off x="914400" y="3337560"/>
-            <a:ext cx="10332720" cy="502920"/>
-          </a:xfrm>
-          <a:prstGeom prst="rect">
-            <a:avLst/>
-          </a:prstGeom>
-          <a:noFill/>
-        </p:spPr>
-        <p:txBody>
-          <a:bodyPr wrap="none">
-            <a:spAutoFit/>
-          </a:bodyPr>
-          <a:lstStyle/>
-          <a:p>
-            <a:pPr>
-              <a:defRPr sz="2200" b="0">
-                <a:solidFill>
-                  <a:srgbClr val="2D374B"/>
-                </a:solidFill>
-              </a:defRPr>
-            </a:pPr>
-            <a:r>
-              <a:t>• An optional local coding model explains and remediates findings</a:t>
-            </a:r>
-          </a:p>
-        </p:txBody>
-      </p:sp>
-      <p:sp>
-        <p:nvSpPr>
-          <p:cNvPr id="7" name="TextBox 6"/>
-          <p:cNvSpPr txBox="1"/>
-          <p:nvPr/>
-        </p:nvSpPr>
-        <p:spPr>
-          <a:xfrm>
-            <a:off x="914400" y="4023360"/>
-            <a:ext cx="10332720" cy="502920"/>
-          </a:xfrm>
-          <a:prstGeom prst="rect">
-            <a:avLst/>
-          </a:prstGeom>
-          <a:noFill/>
-        </p:spPr>
-        <p:txBody>
-          <a:bodyPr wrap="none">
-            <a:spAutoFit/>
-          </a:bodyPr>
-          <a:lstStyle/>
-          <a:p>
-            <a:pPr>
-              <a:defRPr sz="2200" b="0">
-                <a:solidFill>
-                  <a:srgbClr val="2D374B"/>
-                </a:solidFill>
-              </a:defRPr>
-            </a:pPr>
-            <a:r>
-              <a:t>• No API keys, no source upload, no cloud fallback</a:t>
-            </a:r>
-          </a:p>
-        </p:txBody>
-      </p:sp>
-      <p:sp>
-        <p:nvSpPr>
-          <p:cNvPr id="8" name="TextBox 7"/>
-          <p:cNvSpPr txBox="1"/>
-          <p:nvPr/>
-        </p:nvSpPr>
-        <p:spPr>
-          <a:xfrm>
-            <a:off x="11155680" y="6172200"/>
-            <a:ext cx="457200" cy="274320"/>
-          </a:xfrm>
-          <a:prstGeom prst="rect">
-            <a:avLst/>
-          </a:prstGeom>
-          <a:noFill/>
-        </p:spPr>
-        <p:txBody>
-          <a:bodyPr wrap="none">
-            <a:spAutoFit/>
-          </a:bodyPr>
-          <a:lstStyle/>
-          <a:p>
-            <a:pPr>
-              <a:defRPr sz="1200" b="1">
-                <a:solidFill>
-                  <a:srgbClr val="646E82"/>
-                </a:solidFill>
-              </a:defRPr>
-            </a:pPr>
-            <a:r>
-              <a:t>03</a:t>
+              <a:rPr b="0" sz="1200" i="0" u="none">
+                <a:solidFill>
+                  <a:srgbClr val="94A3B8"/>
+                </a:solidFill>
+                <a:latin typeface="Plus Jakarta Sans"/>
+              </a:rPr>
+              <a:t>Deterministic security rules flag blockers instantly, while an on-device model delivers remediation without internet access.</a:t>
+            </a:r>
+          </a:p>
+        </p:txBody>
+      </p:sp>
+      <p:sp>
+        <p:nvSpPr>
+          <p:cNvPr id="21" name="TextBox 20"/>
+          <p:cNvSpPr txBox="1"/>
+          <p:nvPr/>
+        </p:nvSpPr>
+        <p:spPr>
+          <a:xfrm>
+            <a:off x="7142857" y="2133600"/>
+            <a:ext cx="5049142" cy="200025"/>
+          </a:xfrm>
+          <a:prstGeom prst="rect">
+            <a:avLst/>
+          </a:prstGeom>
+          <a:noFill/>
+        </p:spPr>
+        <p:txBody>
+          <a:bodyPr wrap="none" lIns="0" rIns="0" tIns="0" bIns="0" anchor="t">
+            <a:spAutoFit/>
+          </a:bodyPr>
+          <a:lstStyle/>
+          <a:p>
+            <a:pPr algn="l"/>
+            <a:r>
+              <a:rPr b="1" sz="1200" i="0" u="none">
+                <a:solidFill>
+                  <a:srgbClr val="0F172A"/>
+                </a:solidFill>
+                <a:latin typeface="Plus Jakarta Sans"/>
+              </a:rPr>
+              <a:t>Deterministic Engine</a:t>
+            </a:r>
+          </a:p>
+        </p:txBody>
+      </p:sp>
+      <p:sp>
+        <p:nvSpPr>
+          <p:cNvPr id="22" name="TextBox 21"/>
+          <p:cNvSpPr txBox="1"/>
+          <p:nvPr/>
+        </p:nvSpPr>
+        <p:spPr>
+          <a:xfrm>
+            <a:off x="7142857" y="2390775"/>
+            <a:ext cx="4153792" cy="342900"/>
+          </a:xfrm>
+          <a:prstGeom prst="rect">
+            <a:avLst/>
+          </a:prstGeom>
+          <a:noFill/>
+        </p:spPr>
+        <p:txBody>
+          <a:bodyPr wrap="square" lIns="0" rIns="0" tIns="0" bIns="0" anchor="t">
+            <a:spAutoFit/>
+          </a:bodyPr>
+          <a:lstStyle/>
+          <a:p>
+            <a:pPr algn="l"/>
+            <a:r>
+              <a:rPr b="0" sz="1050" i="0" u="none">
+                <a:solidFill>
+                  <a:srgbClr val="64748B"/>
+                </a:solidFill>
+                <a:latin typeface="Plus Jakarta Sans"/>
+              </a:rPr>
+              <a:t>Immediate regex, AST, and schema validation catches syntax and token leaks.</a:t>
+            </a:r>
+          </a:p>
+        </p:txBody>
+      </p:sp>
+      <p:sp>
+        <p:nvSpPr>
+          <p:cNvPr id="23" name="TextBox 22"/>
+          <p:cNvSpPr txBox="1"/>
+          <p:nvPr/>
+        </p:nvSpPr>
+        <p:spPr>
+          <a:xfrm>
+            <a:off x="7142857" y="3305175"/>
+            <a:ext cx="5049142" cy="200025"/>
+          </a:xfrm>
+          <a:prstGeom prst="rect">
+            <a:avLst/>
+          </a:prstGeom>
+          <a:noFill/>
+        </p:spPr>
+        <p:txBody>
+          <a:bodyPr wrap="none" lIns="0" rIns="0" tIns="0" bIns="0" anchor="t">
+            <a:spAutoFit/>
+          </a:bodyPr>
+          <a:lstStyle/>
+          <a:p>
+            <a:pPr algn="l"/>
+            <a:r>
+              <a:rPr b="1" sz="1200" i="0" u="none">
+                <a:solidFill>
+                  <a:srgbClr val="0F172A"/>
+                </a:solidFill>
+                <a:latin typeface="Plus Jakarta Sans"/>
+              </a:rPr>
+              <a:t>NPU Code Intelligence</a:t>
+            </a:r>
+          </a:p>
+        </p:txBody>
+      </p:sp>
+      <p:sp>
+        <p:nvSpPr>
+          <p:cNvPr id="24" name="TextBox 23"/>
+          <p:cNvSpPr txBox="1"/>
+          <p:nvPr/>
+        </p:nvSpPr>
+        <p:spPr>
+          <a:xfrm>
+            <a:off x="7142857" y="3562350"/>
+            <a:ext cx="4153792" cy="342900"/>
+          </a:xfrm>
+          <a:prstGeom prst="rect">
+            <a:avLst/>
+          </a:prstGeom>
+          <a:noFill/>
+        </p:spPr>
+        <p:txBody>
+          <a:bodyPr wrap="square" lIns="0" rIns="0" tIns="0" bIns="0" anchor="t">
+            <a:spAutoFit/>
+          </a:bodyPr>
+          <a:lstStyle/>
+          <a:p>
+            <a:pPr algn="l"/>
+            <a:r>
+              <a:rPr b="0" sz="1050" i="0" u="none">
+                <a:solidFill>
+                  <a:srgbClr val="64748B"/>
+                </a:solidFill>
+                <a:latin typeface="Plus Jakarta Sans"/>
+              </a:rPr>
+              <a:t>Synthesizes root causes and produces copy-paste fixes directly on the Hexagon NPU.</a:t>
+            </a:r>
+          </a:p>
+        </p:txBody>
+      </p:sp>
+      <p:sp>
+        <p:nvSpPr>
+          <p:cNvPr id="25" name="TextBox 24"/>
+          <p:cNvSpPr txBox="1"/>
+          <p:nvPr/>
+        </p:nvSpPr>
+        <p:spPr>
+          <a:xfrm>
+            <a:off x="7142857" y="4476750"/>
+            <a:ext cx="5049142" cy="200025"/>
+          </a:xfrm>
+          <a:prstGeom prst="rect">
+            <a:avLst/>
+          </a:prstGeom>
+          <a:noFill/>
+        </p:spPr>
+        <p:txBody>
+          <a:bodyPr wrap="none" lIns="0" rIns="0" tIns="0" bIns="0" anchor="t">
+            <a:spAutoFit/>
+          </a:bodyPr>
+          <a:lstStyle/>
+          <a:p>
+            <a:pPr algn="l"/>
+            <a:r>
+              <a:rPr b="1" sz="1200" i="0" u="none">
+                <a:solidFill>
+                  <a:srgbClr val="0F172A"/>
+                </a:solidFill>
+                <a:latin typeface="Plus Jakarta Sans"/>
+              </a:rPr>
+              <a:t>Offline Self-Sufficiency</a:t>
+            </a:r>
+          </a:p>
+        </p:txBody>
+      </p:sp>
+      <p:sp>
+        <p:nvSpPr>
+          <p:cNvPr id="26" name="TextBox 25"/>
+          <p:cNvSpPr txBox="1"/>
+          <p:nvPr/>
+        </p:nvSpPr>
+        <p:spPr>
+          <a:xfrm>
+            <a:off x="7142857" y="4733925"/>
+            <a:ext cx="4153792" cy="342900"/>
+          </a:xfrm>
+          <a:prstGeom prst="rect">
+            <a:avLst/>
+          </a:prstGeom>
+          <a:noFill/>
+        </p:spPr>
+        <p:txBody>
+          <a:bodyPr wrap="square" lIns="0" rIns="0" tIns="0" bIns="0" anchor="t">
+            <a:spAutoFit/>
+          </a:bodyPr>
+          <a:lstStyle/>
+          <a:p>
+            <a:pPr algn="l"/>
+            <a:r>
+              <a:rPr b="0" sz="1050" i="0" u="none">
+                <a:solidFill>
+                  <a:srgbClr val="64748B"/>
+                </a:solidFill>
+                <a:latin typeface="Plus Jakarta Sans"/>
+              </a:rPr>
+              <a:t>No cloud fallback required. Functions on flights, air-gapped labs, and VPNs.</a:t>
+            </a:r>
+          </a:p>
+        </p:txBody>
+      </p:sp>
+      <p:sp>
+        <p:nvSpPr>
+          <p:cNvPr id="27" name="TextBox 26"/>
+          <p:cNvSpPr txBox="1"/>
+          <p:nvPr/>
+        </p:nvSpPr>
+        <p:spPr>
+          <a:xfrm>
+            <a:off x="1352550" y="4448175"/>
+            <a:ext cx="1038225" cy="171450"/>
+          </a:xfrm>
+          <a:prstGeom prst="rect">
+            <a:avLst/>
+          </a:prstGeom>
+          <a:noFill/>
+        </p:spPr>
+        <p:txBody>
+          <a:bodyPr wrap="none" lIns="0" rIns="0" tIns="0" bIns="0" anchor="t">
+            <a:spAutoFit/>
+          </a:bodyPr>
+          <a:lstStyle/>
+          <a:p>
+            <a:pPr algn="l"/>
+            <a:r>
+              <a:rPr b="1" sz="1050" i="0" u="none">
+                <a:solidFill>
+                  <a:srgbClr val="E2E8F0"/>
+                </a:solidFill>
+                <a:latin typeface="Plus Jakarta Sans"/>
+              </a:rPr>
+              <a:t>No API Keys</a:t>
+            </a:r>
+          </a:p>
+        </p:txBody>
+      </p:sp>
+      <p:sp>
+        <p:nvSpPr>
+          <p:cNvPr id="28" name="TextBox 27"/>
+          <p:cNvSpPr txBox="1"/>
+          <p:nvPr/>
+        </p:nvSpPr>
+        <p:spPr>
+          <a:xfrm>
+            <a:off x="2524125" y="4448175"/>
+            <a:ext cx="1123950" cy="171450"/>
+          </a:xfrm>
+          <a:prstGeom prst="rect">
+            <a:avLst/>
+          </a:prstGeom>
+          <a:noFill/>
+        </p:spPr>
+        <p:txBody>
+          <a:bodyPr wrap="none" lIns="0" rIns="0" tIns="0" bIns="0" anchor="t">
+            <a:spAutoFit/>
+          </a:bodyPr>
+          <a:lstStyle/>
+          <a:p>
+            <a:pPr algn="l"/>
+            <a:r>
+              <a:rPr b="1" sz="1050" i="0" u="none">
+                <a:solidFill>
+                  <a:srgbClr val="E2E8F0"/>
+                </a:solidFill>
+                <a:latin typeface="Plus Jakarta Sans"/>
+              </a:rPr>
+              <a:t>Zero Uploads</a:t>
             </a:r>
           </a:p>
         </p:txBody>
@@ -3800,7 +5618,7 @@
     <p:bg>
       <p:bgPr>
         <a:solidFill>
-          <a:srgbClr val="F6F8FC"/>
+          <a:srgbClr val="F8FAFC"/>
         </a:solidFill>
         <a:effectLst/>
       </p:bgPr>
@@ -3814,245 +5632,1035 @@
       <p:grpSpPr/>
       <p:sp>
         <p:nvSpPr>
-          <p:cNvPr id="2" name="TextBox 1"/>
-          <p:cNvSpPr txBox="1"/>
-          <p:nvPr/>
-        </p:nvSpPr>
-        <p:spPr>
-          <a:xfrm>
-            <a:off x="640080" y="411480"/>
-            <a:ext cx="6400800" cy="274320"/>
-          </a:xfrm>
-          <a:prstGeom prst="rect">
-            <a:avLst/>
-          </a:prstGeom>
-          <a:noFill/>
-        </p:spPr>
-        <p:txBody>
-          <a:bodyPr wrap="none">
-            <a:spAutoFit/>
-          </a:bodyPr>
-          <a:lstStyle/>
-          <a:p>
-            <a:pPr>
-              <a:defRPr sz="1200" b="1">
-                <a:solidFill>
-                  <a:srgbClr val="1E6ED2"/>
-                </a:solidFill>
-              </a:defRPr>
-            </a:pPr>
-            <a:r>
-              <a:t>SNAPDRAGON LOCAL REVIEW</a:t>
-            </a:r>
-          </a:p>
-        </p:txBody>
-      </p:sp>
-      <p:sp>
-        <p:nvSpPr>
-          <p:cNvPr id="3" name="TextBox 2"/>
-          <p:cNvSpPr txBox="1"/>
-          <p:nvPr/>
-        </p:nvSpPr>
-        <p:spPr>
-          <a:xfrm>
-            <a:off x="640080" y="960120"/>
-            <a:ext cx="10789920" cy="731520"/>
-          </a:xfrm>
-          <a:prstGeom prst="rect">
-            <a:avLst/>
-          </a:prstGeom>
-          <a:noFill/>
-        </p:spPr>
-        <p:txBody>
-          <a:bodyPr wrap="none">
-            <a:spAutoFit/>
-          </a:bodyPr>
-          <a:lstStyle/>
-          <a:p>
-            <a:pPr>
-              <a:defRPr sz="3400" b="1">
-                <a:solidFill>
-                  <a:srgbClr val="14203C"/>
-                </a:solidFill>
-              </a:defRPr>
-            </a:pPr>
-            <a:r>
-              <a:t>Technical architecture</a:t>
-            </a:r>
-          </a:p>
-        </p:txBody>
-      </p:sp>
-      <p:sp>
-        <p:nvSpPr>
-          <p:cNvPr id="4" name="TextBox 3"/>
-          <p:cNvSpPr txBox="1"/>
-          <p:nvPr/>
-        </p:nvSpPr>
-        <p:spPr>
-          <a:xfrm>
-            <a:off x="914400" y="1965960"/>
-            <a:ext cx="10332720" cy="502920"/>
-          </a:xfrm>
-          <a:prstGeom prst="rect">
-            <a:avLst/>
-          </a:prstGeom>
-          <a:noFill/>
-        </p:spPr>
-        <p:txBody>
-          <a:bodyPr wrap="none">
-            <a:spAutoFit/>
-          </a:bodyPr>
-          <a:lstStyle/>
-          <a:p>
-            <a:pPr>
-              <a:defRPr sz="2200" b="0">
-                <a:solidFill>
-                  <a:srgbClr val="2D374B"/>
-                </a:solidFill>
-              </a:defRPr>
-            </a:pPr>
-            <a:r>
-              <a:t>• Repository → CLI → deterministic rules</a:t>
-            </a:r>
-          </a:p>
-        </p:txBody>
-      </p:sp>
-      <p:sp>
-        <p:nvSpPr>
-          <p:cNvPr id="5" name="TextBox 4"/>
-          <p:cNvSpPr txBox="1"/>
-          <p:nvPr/>
-        </p:nvSpPr>
-        <p:spPr>
-          <a:xfrm>
-            <a:off x="914400" y="2651760"/>
-            <a:ext cx="10332720" cy="502920"/>
-          </a:xfrm>
-          <a:prstGeom prst="rect">
-            <a:avLst/>
-          </a:prstGeom>
-          <a:noFill/>
-        </p:spPr>
-        <p:txBody>
-          <a:bodyPr wrap="none">
-            <a:spAutoFit/>
-          </a:bodyPr>
-          <a:lstStyle/>
-          <a:p>
-            <a:pPr>
-              <a:defRPr sz="2200" b="0">
-                <a:solidFill>
-                  <a:srgbClr val="2D374B"/>
-                </a:solidFill>
-              </a:defRPr>
-            </a:pPr>
-            <a:r>
-              <a:t>• Optional adapter → tokenizer → ONNX Runtime</a:t>
-            </a:r>
-          </a:p>
-        </p:txBody>
-      </p:sp>
-      <p:sp>
-        <p:nvSpPr>
-          <p:cNvPr id="6" name="TextBox 5"/>
-          <p:cNvSpPr txBox="1"/>
-          <p:nvPr/>
-        </p:nvSpPr>
-        <p:spPr>
-          <a:xfrm>
-            <a:off x="914400" y="3337560"/>
-            <a:ext cx="10332720" cy="502920"/>
-          </a:xfrm>
-          <a:prstGeom prst="rect">
-            <a:avLst/>
-          </a:prstGeom>
-          <a:noFill/>
-        </p:spPr>
-        <p:txBody>
-          <a:bodyPr wrap="none">
-            <a:spAutoFit/>
-          </a:bodyPr>
-          <a:lstStyle/>
-          <a:p>
-            <a:pPr>
-              <a:defRPr sz="2200" b="0">
-                <a:solidFill>
-                  <a:srgbClr val="2D374B"/>
-                </a:solidFill>
-              </a:defRPr>
-            </a:pPr>
-            <a:r>
-              <a:t>• QNN Execution Provider → Hexagon NPU / HTP</a:t>
-            </a:r>
-          </a:p>
-        </p:txBody>
-      </p:sp>
-      <p:sp>
-        <p:nvSpPr>
-          <p:cNvPr id="7" name="TextBox 6"/>
-          <p:cNvSpPr txBox="1"/>
-          <p:nvPr/>
-        </p:nvSpPr>
-        <p:spPr>
-          <a:xfrm>
-            <a:off x="914400" y="4023360"/>
-            <a:ext cx="10332720" cy="502920"/>
-          </a:xfrm>
-          <a:prstGeom prst="rect">
-            <a:avLst/>
-          </a:prstGeom>
-          <a:noFill/>
-        </p:spPr>
-        <p:txBody>
-          <a:bodyPr wrap="none">
-            <a:spAutoFit/>
-          </a:bodyPr>
-          <a:lstStyle/>
-          <a:p>
-            <a:pPr>
-              <a:defRPr sz="2200" b="0">
-                <a:solidFill>
-                  <a:srgbClr val="2D374B"/>
-                </a:solidFill>
-              </a:defRPr>
-            </a:pPr>
-            <a:r>
-              <a:t>• CPU remains available for compilers, Docker, tests, and local servers</a:t>
-            </a:r>
-          </a:p>
-        </p:txBody>
-      </p:sp>
-      <p:sp>
-        <p:nvSpPr>
-          <p:cNvPr id="8" name="TextBox 7"/>
-          <p:cNvSpPr txBox="1"/>
-          <p:nvPr/>
-        </p:nvSpPr>
-        <p:spPr>
-          <a:xfrm>
-            <a:off x="11155680" y="6172200"/>
-            <a:ext cx="457200" cy="274320"/>
-          </a:xfrm>
-          <a:prstGeom prst="rect">
-            <a:avLst/>
-          </a:prstGeom>
-          <a:noFill/>
-        </p:spPr>
-        <p:txBody>
-          <a:bodyPr wrap="none">
-            <a:spAutoFit/>
-          </a:bodyPr>
-          <a:lstStyle/>
-          <a:p>
-            <a:pPr>
-              <a:defRPr sz="1200" b="1">
-                <a:solidFill>
-                  <a:srgbClr val="646E82"/>
-                </a:solidFill>
-              </a:defRPr>
-            </a:pPr>
-            <a:r>
-              <a:t>04</a:t>
+          <p:cNvPr id="2" name="Rounded Rectangle 1"/>
+          <p:cNvSpPr/>
+          <p:nvPr/>
+        </p:nvSpPr>
+        <p:spPr>
+          <a:xfrm>
+            <a:off x="762000" y="5600700"/>
+            <a:ext cx="10668000" cy="723900"/>
+          </a:xfrm>
+          <a:prstGeom prst="roundRect">
+            <a:avLst>
+              <a:gd name="adj" fmla="val 13157"/>
+            </a:avLst>
+          </a:prstGeom>
+          <a:solidFill>
+            <a:srgbClr val="FFFFFF"/>
+          </a:solidFill>
+          <a:ln>
+            <a:noFill/>
+          </a:ln>
+          <a:effectLst/>
+        </p:spPr>
+        <p:style>
+          <a:lnRef idx="1">
+            <a:schemeClr val="accent1"/>
+          </a:lnRef>
+          <a:fillRef idx="3">
+            <a:schemeClr val="accent1"/>
+          </a:fillRef>
+          <a:effectRef idx="2">
+            <a:schemeClr val="accent1"/>
+          </a:effectRef>
+          <a:fontRef idx="minor">
+            <a:schemeClr val="lt1"/>
+          </a:fontRef>
+        </p:style>
+        <p:txBody>
+          <a:bodyPr rtlCol="0" anchor="ctr"/>
+          <a:lstStyle/>
+          <a:p>
+            <a:pPr algn="ctr"/>
+          </a:p>
+        </p:txBody>
+      </p:sp>
+      <p:sp>
+        <p:nvSpPr>
+          <p:cNvPr id="3" name="Rounded Rectangle 2"/>
+          <p:cNvSpPr/>
+          <p:nvPr/>
+        </p:nvSpPr>
+        <p:spPr>
+          <a:xfrm>
+            <a:off x="762000" y="2657475"/>
+            <a:ext cx="2236142" cy="1495425"/>
+          </a:xfrm>
+          <a:prstGeom prst="roundRect">
+            <a:avLst>
+              <a:gd name="adj" fmla="val 7643"/>
+            </a:avLst>
+          </a:prstGeom>
+          <a:solidFill>
+            <a:srgbClr val="FFFFFF"/>
+          </a:solidFill>
+          <a:ln>
+            <a:noFill/>
+          </a:ln>
+          <a:effectLst/>
+        </p:spPr>
+        <p:style>
+          <a:lnRef idx="1">
+            <a:schemeClr val="accent1"/>
+          </a:lnRef>
+          <a:fillRef idx="3">
+            <a:schemeClr val="accent1"/>
+          </a:fillRef>
+          <a:effectRef idx="2">
+            <a:schemeClr val="accent1"/>
+          </a:effectRef>
+          <a:fontRef idx="minor">
+            <a:schemeClr val="lt1"/>
+          </a:fontRef>
+        </p:style>
+        <p:txBody>
+          <a:bodyPr rtlCol="0" anchor="ctr"/>
+          <a:lstStyle/>
+          <a:p>
+            <a:pPr algn="ctr"/>
+          </a:p>
+        </p:txBody>
+      </p:sp>
+      <p:sp>
+        <p:nvSpPr>
+          <p:cNvPr id="4" name="Rounded Rectangle 3"/>
+          <p:cNvSpPr/>
+          <p:nvPr/>
+        </p:nvSpPr>
+        <p:spPr>
+          <a:xfrm>
+            <a:off x="3436292" y="2733675"/>
+            <a:ext cx="2236142" cy="1343025"/>
+          </a:xfrm>
+          <a:prstGeom prst="roundRect">
+            <a:avLst>
+              <a:gd name="adj" fmla="val 8510"/>
+            </a:avLst>
+          </a:prstGeom>
+          <a:solidFill>
+            <a:srgbClr val="FFFFFF"/>
+          </a:solidFill>
+          <a:ln>
+            <a:noFill/>
+          </a:ln>
+          <a:effectLst/>
+        </p:spPr>
+        <p:style>
+          <a:lnRef idx="1">
+            <a:schemeClr val="accent1"/>
+          </a:lnRef>
+          <a:fillRef idx="3">
+            <a:schemeClr val="accent1"/>
+          </a:fillRef>
+          <a:effectRef idx="2">
+            <a:schemeClr val="accent1"/>
+          </a:effectRef>
+          <a:fontRef idx="minor">
+            <a:schemeClr val="lt1"/>
+          </a:fontRef>
+        </p:style>
+        <p:txBody>
+          <a:bodyPr rtlCol="0" anchor="ctr"/>
+          <a:lstStyle/>
+          <a:p>
+            <a:pPr algn="ctr"/>
+          </a:p>
+        </p:txBody>
+      </p:sp>
+      <p:sp>
+        <p:nvSpPr>
+          <p:cNvPr id="5" name="Rounded Rectangle 4"/>
+          <p:cNvSpPr/>
+          <p:nvPr/>
+        </p:nvSpPr>
+        <p:spPr>
+          <a:xfrm>
+            <a:off x="6110585" y="2657475"/>
+            <a:ext cx="2236142" cy="1495425"/>
+          </a:xfrm>
+          <a:prstGeom prst="roundRect">
+            <a:avLst>
+              <a:gd name="adj" fmla="val 7643"/>
+            </a:avLst>
+          </a:prstGeom>
+          <a:solidFill>
+            <a:srgbClr val="FFFFFF"/>
+          </a:solidFill>
+          <a:ln>
+            <a:noFill/>
+          </a:ln>
+          <a:effectLst/>
+        </p:spPr>
+        <p:style>
+          <a:lnRef idx="1">
+            <a:schemeClr val="accent1"/>
+          </a:lnRef>
+          <a:fillRef idx="3">
+            <a:schemeClr val="accent1"/>
+          </a:fillRef>
+          <a:effectRef idx="2">
+            <a:schemeClr val="accent1"/>
+          </a:effectRef>
+          <a:fontRef idx="minor">
+            <a:schemeClr val="lt1"/>
+          </a:fontRef>
+        </p:style>
+        <p:txBody>
+          <a:bodyPr rtlCol="0" anchor="ctr"/>
+          <a:lstStyle/>
+          <a:p>
+            <a:pPr algn="ctr"/>
+          </a:p>
+        </p:txBody>
+      </p:sp>
+      <p:sp>
+        <p:nvSpPr>
+          <p:cNvPr id="6" name="Rounded Rectangle 5"/>
+          <p:cNvSpPr/>
+          <p:nvPr/>
+        </p:nvSpPr>
+        <p:spPr>
+          <a:xfrm>
+            <a:off x="8784877" y="2719387"/>
+            <a:ext cx="2645271" cy="1371600"/>
+          </a:xfrm>
+          <a:prstGeom prst="roundRect">
+            <a:avLst>
+              <a:gd name="adj" fmla="val 8333"/>
+            </a:avLst>
+          </a:prstGeom>
+          <a:solidFill>
+            <a:srgbClr val="FFFFFF"/>
+          </a:solidFill>
+          <a:ln w="19050">
+            <a:solidFill>
+              <a:srgbClr val="E4002B"/>
+            </a:solidFill>
+          </a:ln>
+          <a:effectLst/>
+        </p:spPr>
+        <p:style>
+          <a:lnRef idx="1">
+            <a:schemeClr val="accent1"/>
+          </a:lnRef>
+          <a:fillRef idx="3">
+            <a:schemeClr val="accent1"/>
+          </a:fillRef>
+          <a:effectRef idx="2">
+            <a:schemeClr val="accent1"/>
+          </a:effectRef>
+          <a:fontRef idx="minor">
+            <a:schemeClr val="lt1"/>
+          </a:fontRef>
+        </p:style>
+        <p:txBody>
+          <a:bodyPr rtlCol="0" anchor="ctr"/>
+          <a:lstStyle/>
+          <a:p>
+            <a:pPr algn="ctr"/>
+          </a:p>
+        </p:txBody>
+      </p:sp>
+      <p:sp>
+        <p:nvSpPr>
+          <p:cNvPr id="7" name="Rectangle 6"/>
+          <p:cNvSpPr/>
+          <p:nvPr/>
+        </p:nvSpPr>
+        <p:spPr>
+          <a:xfrm>
+            <a:off x="762000" y="2657475"/>
+            <a:ext cx="2236142" cy="38100"/>
+          </a:xfrm>
+          <a:prstGeom prst="rect">
+            <a:avLst/>
+          </a:prstGeom>
+          <a:solidFill>
+            <a:srgbClr val="0F172A"/>
+          </a:solidFill>
+          <a:ln>
+            <a:noFill/>
+          </a:ln>
+          <a:effectLst/>
+        </p:spPr>
+        <p:style>
+          <a:lnRef idx="1">
+            <a:schemeClr val="accent1"/>
+          </a:lnRef>
+          <a:fillRef idx="3">
+            <a:schemeClr val="accent1"/>
+          </a:fillRef>
+          <a:effectRef idx="2">
+            <a:schemeClr val="accent1"/>
+          </a:effectRef>
+          <a:fontRef idx="minor">
+            <a:schemeClr val="lt1"/>
+          </a:fontRef>
+        </p:style>
+        <p:txBody>
+          <a:bodyPr rtlCol="0" anchor="ctr"/>
+          <a:lstStyle/>
+          <a:p>
+            <a:pPr algn="ctr"/>
+          </a:p>
+        </p:txBody>
+      </p:sp>
+      <p:sp>
+        <p:nvSpPr>
+          <p:cNvPr id="8" name="Rectangle 7"/>
+          <p:cNvSpPr/>
+          <p:nvPr/>
+        </p:nvSpPr>
+        <p:spPr>
+          <a:xfrm>
+            <a:off x="3436292" y="2733675"/>
+            <a:ext cx="2236142" cy="38100"/>
+          </a:xfrm>
+          <a:prstGeom prst="rect">
+            <a:avLst/>
+          </a:prstGeom>
+          <a:solidFill>
+            <a:srgbClr val="0F172A"/>
+          </a:solidFill>
+          <a:ln>
+            <a:noFill/>
+          </a:ln>
+          <a:effectLst/>
+        </p:spPr>
+        <p:style>
+          <a:lnRef idx="1">
+            <a:schemeClr val="accent1"/>
+          </a:lnRef>
+          <a:fillRef idx="3">
+            <a:schemeClr val="accent1"/>
+          </a:fillRef>
+          <a:effectRef idx="2">
+            <a:schemeClr val="accent1"/>
+          </a:effectRef>
+          <a:fontRef idx="minor">
+            <a:schemeClr val="lt1"/>
+          </a:fontRef>
+        </p:style>
+        <p:txBody>
+          <a:bodyPr rtlCol="0" anchor="ctr"/>
+          <a:lstStyle/>
+          <a:p>
+            <a:pPr algn="ctr"/>
+          </a:p>
+        </p:txBody>
+      </p:sp>
+      <p:sp>
+        <p:nvSpPr>
+          <p:cNvPr id="9" name="Rectangle 8"/>
+          <p:cNvSpPr/>
+          <p:nvPr/>
+        </p:nvSpPr>
+        <p:spPr>
+          <a:xfrm>
+            <a:off x="6110585" y="2657475"/>
+            <a:ext cx="2236142" cy="38100"/>
+          </a:xfrm>
+          <a:prstGeom prst="rect">
+            <a:avLst/>
+          </a:prstGeom>
+          <a:solidFill>
+            <a:srgbClr val="0F172A"/>
+          </a:solidFill>
+          <a:ln>
+            <a:noFill/>
+          </a:ln>
+          <a:effectLst/>
+        </p:spPr>
+        <p:style>
+          <a:lnRef idx="1">
+            <a:schemeClr val="accent1"/>
+          </a:lnRef>
+          <a:fillRef idx="3">
+            <a:schemeClr val="accent1"/>
+          </a:fillRef>
+          <a:effectRef idx="2">
+            <a:schemeClr val="accent1"/>
+          </a:effectRef>
+          <a:fontRef idx="minor">
+            <a:schemeClr val="lt1"/>
+          </a:fontRef>
+        </p:style>
+        <p:txBody>
+          <a:bodyPr rtlCol="0" anchor="ctr"/>
+          <a:lstStyle/>
+          <a:p>
+            <a:pPr algn="ctr"/>
+          </a:p>
+        </p:txBody>
+      </p:sp>
+      <p:pic>
+        <p:nvPicPr>
+          <p:cNvPr id="10" name="Picture 9" descr="image.png"/>
+          <p:cNvPicPr>
+            <a:picLocks noChangeAspect="1"/>
+          </p:cNvPicPr>
+          <p:nvPr/>
+        </p:nvPicPr>
+        <p:blipFill>
+          <a:blip r:embed="rId2"/>
+          <a:stretch>
+            <a:fillRect/>
+          </a:stretch>
+        </p:blipFill>
+        <p:spPr>
+          <a:xfrm>
+            <a:off x="3150542" y="3328987"/>
+            <a:ext cx="133350" cy="152400"/>
+          </a:xfrm>
+          <a:prstGeom prst="rect">
+            <a:avLst/>
+          </a:prstGeom>
+        </p:spPr>
+      </p:pic>
+      <p:pic>
+        <p:nvPicPr>
+          <p:cNvPr id="11" name="Picture 10" descr="image.png"/>
+          <p:cNvPicPr>
+            <a:picLocks noChangeAspect="1"/>
+          </p:cNvPicPr>
+          <p:nvPr/>
+        </p:nvPicPr>
+        <p:blipFill>
+          <a:blip r:embed="rId2"/>
+          <a:stretch>
+            <a:fillRect/>
+          </a:stretch>
+        </p:blipFill>
+        <p:spPr>
+          <a:xfrm>
+            <a:off x="5824835" y="3328987"/>
+            <a:ext cx="133350" cy="152400"/>
+          </a:xfrm>
+          <a:prstGeom prst="rect">
+            <a:avLst/>
+          </a:prstGeom>
+        </p:spPr>
+      </p:pic>
+      <p:pic>
+        <p:nvPicPr>
+          <p:cNvPr id="12" name="Picture 11" descr="image.png"/>
+          <p:cNvPicPr>
+            <a:picLocks noChangeAspect="1"/>
+          </p:cNvPicPr>
+          <p:nvPr/>
+        </p:nvPicPr>
+        <p:blipFill>
+          <a:blip r:embed="rId3"/>
+          <a:stretch>
+            <a:fillRect/>
+          </a:stretch>
+        </p:blipFill>
+        <p:spPr>
+          <a:xfrm>
+            <a:off x="8499127" y="3328987"/>
+            <a:ext cx="133350" cy="152400"/>
+          </a:xfrm>
+          <a:prstGeom prst="rect">
+            <a:avLst/>
+          </a:prstGeom>
+        </p:spPr>
+      </p:pic>
+      <p:pic>
+        <p:nvPicPr>
+          <p:cNvPr id="13" name="Picture 12" descr="image.png"/>
+          <p:cNvPicPr>
+            <a:picLocks noChangeAspect="1"/>
+          </p:cNvPicPr>
+          <p:nvPr/>
+        </p:nvPicPr>
+        <p:blipFill>
+          <a:blip r:embed="rId4"/>
+          <a:stretch>
+            <a:fillRect/>
+          </a:stretch>
+        </p:blipFill>
+        <p:spPr>
+          <a:xfrm>
+            <a:off x="1779984" y="2962275"/>
+            <a:ext cx="200025" cy="228600"/>
+          </a:xfrm>
+          <a:prstGeom prst="rect">
+            <a:avLst/>
+          </a:prstGeom>
+        </p:spPr>
+      </p:pic>
+      <p:pic>
+        <p:nvPicPr>
+          <p:cNvPr id="14" name="Picture 13" descr="image.png"/>
+          <p:cNvPicPr>
+            <a:picLocks noChangeAspect="1"/>
+          </p:cNvPicPr>
+          <p:nvPr/>
+        </p:nvPicPr>
+        <p:blipFill>
+          <a:blip r:embed="rId5"/>
+          <a:stretch>
+            <a:fillRect/>
+          </a:stretch>
+        </p:blipFill>
+        <p:spPr>
+          <a:xfrm>
+            <a:off x="4425701" y="3038475"/>
+            <a:ext cx="257175" cy="228600"/>
+          </a:xfrm>
+          <a:prstGeom prst="rect">
+            <a:avLst/>
+          </a:prstGeom>
+        </p:spPr>
+      </p:pic>
+      <p:pic>
+        <p:nvPicPr>
+          <p:cNvPr id="15" name="Picture 14" descr="image.png"/>
+          <p:cNvPicPr>
+            <a:picLocks noChangeAspect="1"/>
+          </p:cNvPicPr>
+          <p:nvPr/>
+        </p:nvPicPr>
+        <p:blipFill>
+          <a:blip r:embed="rId6"/>
+          <a:stretch>
+            <a:fillRect/>
+          </a:stretch>
+        </p:blipFill>
+        <p:spPr>
+          <a:xfrm>
+            <a:off x="7099994" y="2962275"/>
+            <a:ext cx="257175" cy="228600"/>
+          </a:xfrm>
+          <a:prstGeom prst="rect">
+            <a:avLst/>
+          </a:prstGeom>
+        </p:spPr>
+      </p:pic>
+      <p:pic>
+        <p:nvPicPr>
+          <p:cNvPr id="16" name="Picture 15" descr="image.png"/>
+          <p:cNvPicPr>
+            <a:picLocks noChangeAspect="1"/>
+          </p:cNvPicPr>
+          <p:nvPr/>
+        </p:nvPicPr>
+        <p:blipFill>
+          <a:blip r:embed="rId7"/>
+          <a:stretch>
+            <a:fillRect/>
+          </a:stretch>
+        </p:blipFill>
+        <p:spPr>
+          <a:xfrm>
+            <a:off x="9997975" y="3005137"/>
+            <a:ext cx="219075" cy="247650"/>
+          </a:xfrm>
+          <a:prstGeom prst="rect">
+            <a:avLst/>
+          </a:prstGeom>
+        </p:spPr>
+      </p:pic>
+      <p:pic>
+        <p:nvPicPr>
+          <p:cNvPr id="17" name="Picture 16" descr="image.png"/>
+          <p:cNvPicPr>
+            <a:picLocks noChangeAspect="1"/>
+          </p:cNvPicPr>
+          <p:nvPr/>
+        </p:nvPicPr>
+        <p:blipFill>
+          <a:blip r:embed="rId8"/>
+          <a:stretch>
+            <a:fillRect/>
+          </a:stretch>
+        </p:blipFill>
+        <p:spPr>
+          <a:xfrm>
+            <a:off x="1028700" y="5791200"/>
+            <a:ext cx="342900" cy="342900"/>
+          </a:xfrm>
+          <a:prstGeom prst="rect">
+            <a:avLst/>
+          </a:prstGeom>
+        </p:spPr>
+      </p:pic>
+      <p:pic>
+        <p:nvPicPr>
+          <p:cNvPr id="18" name="Picture 17" descr="image.png"/>
+          <p:cNvPicPr>
+            <a:picLocks noChangeAspect="1"/>
+          </p:cNvPicPr>
+          <p:nvPr/>
+        </p:nvPicPr>
+        <p:blipFill>
+          <a:blip r:embed="rId9"/>
+          <a:stretch>
+            <a:fillRect/>
+          </a:stretch>
+        </p:blipFill>
+        <p:spPr>
+          <a:xfrm>
+            <a:off x="1133475" y="5886450"/>
+            <a:ext cx="133350" cy="152400"/>
+          </a:xfrm>
+          <a:prstGeom prst="rect">
+            <a:avLst/>
+          </a:prstGeom>
+        </p:spPr>
+      </p:pic>
+      <p:sp>
+        <p:nvSpPr>
+          <p:cNvPr id="19" name="TextBox 18"/>
+          <p:cNvSpPr txBox="1"/>
+          <p:nvPr/>
+        </p:nvSpPr>
+        <p:spPr>
+          <a:xfrm>
+            <a:off x="762000" y="533400"/>
+            <a:ext cx="11430000" cy="171450"/>
+          </a:xfrm>
+          <a:prstGeom prst="rect">
+            <a:avLst/>
+          </a:prstGeom>
+          <a:noFill/>
+        </p:spPr>
+        <p:txBody>
+          <a:bodyPr wrap="none" lIns="0" rIns="0" tIns="0" bIns="0" anchor="t">
+            <a:spAutoFit/>
+          </a:bodyPr>
+          <a:lstStyle/>
+          <a:p>
+            <a:pPr algn="l"/>
+            <a:r>
+              <a:rPr b="1" sz="1050" i="0" u="none">
+                <a:solidFill>
+                  <a:srgbClr val="E4002B"/>
+                </a:solidFill>
+                <a:latin typeface="Plus Jakarta Sans"/>
+              </a:rPr>
+              <a:t>SYSTEM DESIGN</a:t>
+            </a:r>
+          </a:p>
+        </p:txBody>
+      </p:sp>
+      <p:sp>
+        <p:nvSpPr>
+          <p:cNvPr id="20" name="TextBox 19"/>
+          <p:cNvSpPr txBox="1"/>
+          <p:nvPr/>
+        </p:nvSpPr>
+        <p:spPr>
+          <a:xfrm>
+            <a:off x="762000" y="781050"/>
+            <a:ext cx="11430000" cy="428625"/>
+          </a:xfrm>
+          <a:prstGeom prst="rect">
+            <a:avLst/>
+          </a:prstGeom>
+          <a:noFill/>
+        </p:spPr>
+        <p:txBody>
+          <a:bodyPr wrap="none" lIns="0" rIns="0" tIns="0" bIns="0" anchor="t">
+            <a:spAutoFit/>
+          </a:bodyPr>
+          <a:lstStyle/>
+          <a:p>
+            <a:pPr algn="l"/>
+            <a:r>
+              <a:rPr b="1" sz="2700" i="0" u="none">
+                <a:solidFill>
+                  <a:srgbClr val="0F172A"/>
+                </a:solidFill>
+                <a:latin typeface="Plus Jakarta Sans"/>
+              </a:rPr>
+              <a:t>Technical Architecture &amp; Pipeline</a:t>
+            </a:r>
+          </a:p>
+        </p:txBody>
+      </p:sp>
+      <p:sp>
+        <p:nvSpPr>
+          <p:cNvPr id="21" name="TextBox 20"/>
+          <p:cNvSpPr txBox="1"/>
+          <p:nvPr/>
+        </p:nvSpPr>
+        <p:spPr>
+          <a:xfrm>
+            <a:off x="9867900" y="5881687"/>
+            <a:ext cx="1619250" cy="161925"/>
+          </a:xfrm>
+          <a:prstGeom prst="rect">
+            <a:avLst/>
+          </a:prstGeom>
+          <a:noFill/>
+        </p:spPr>
+        <p:txBody>
+          <a:bodyPr wrap="none" lIns="0" rIns="0" tIns="0" bIns="0" anchor="t">
+            <a:spAutoFit/>
+          </a:bodyPr>
+          <a:lstStyle/>
+          <a:p>
+            <a:pPr algn="l"/>
+            <a:r>
+              <a:rPr b="0" sz="975" i="0" u="none">
+                <a:solidFill>
+                  <a:srgbClr val="0F172A"/>
+                </a:solidFill>
+                <a:latin typeface="JetBrains Mono"/>
+              </a:rPr>
+              <a:t>04 | ARCHITECTURE</a:t>
+            </a:r>
+          </a:p>
+        </p:txBody>
+      </p:sp>
+      <p:sp>
+        <p:nvSpPr>
+          <p:cNvPr id="22" name="TextBox 21"/>
+          <p:cNvSpPr txBox="1"/>
+          <p:nvPr/>
+        </p:nvSpPr>
+        <p:spPr>
+          <a:xfrm>
+            <a:off x="662633" y="3324225"/>
+            <a:ext cx="2434874" cy="200025"/>
+          </a:xfrm>
+          <a:prstGeom prst="rect">
+            <a:avLst/>
+          </a:prstGeom>
+          <a:noFill/>
+        </p:spPr>
+        <p:txBody>
+          <a:bodyPr wrap="none" lIns="0" rIns="0" tIns="0" bIns="0" anchor="t">
+            <a:spAutoFit/>
+          </a:bodyPr>
+          <a:lstStyle/>
+          <a:p>
+            <a:pPr algn="ctr"/>
+            <a:r>
+              <a:rPr b="1" sz="1200" i="0" u="none">
+                <a:solidFill>
+                  <a:srgbClr val="0F172A"/>
+                </a:solidFill>
+                <a:latin typeface="Plus Jakarta Sans"/>
+              </a:rPr>
+              <a:t>Source Repo</a:t>
+            </a:r>
+          </a:p>
+        </p:txBody>
+      </p:sp>
+      <p:sp>
+        <p:nvSpPr>
+          <p:cNvPr id="23" name="TextBox 22"/>
+          <p:cNvSpPr txBox="1"/>
+          <p:nvPr/>
+        </p:nvSpPr>
+        <p:spPr>
+          <a:xfrm>
+            <a:off x="720607" y="3581400"/>
+            <a:ext cx="2318928" cy="304800"/>
+          </a:xfrm>
+          <a:prstGeom prst="rect">
+            <a:avLst/>
+          </a:prstGeom>
+          <a:noFill/>
+        </p:spPr>
+        <p:txBody>
+          <a:bodyPr wrap="square" lIns="0" rIns="0" tIns="0" bIns="0" anchor="t">
+            <a:spAutoFit/>
+          </a:bodyPr>
+          <a:lstStyle/>
+          <a:p>
+            <a:pPr algn="ctr"/>
+            <a:r>
+              <a:rPr b="0" sz="975" i="0" u="none">
+                <a:solidFill>
+                  <a:srgbClr val="64748B"/>
+                </a:solidFill>
+                <a:latin typeface="Plus Jakarta Sans"/>
+              </a:rPr>
+              <a:t>Local Git working tree &amp; modified staging</a:t>
+            </a:r>
+          </a:p>
+        </p:txBody>
+      </p:sp>
+      <p:sp>
+        <p:nvSpPr>
+          <p:cNvPr id="24" name="TextBox 23"/>
+          <p:cNvSpPr txBox="1"/>
+          <p:nvPr/>
+        </p:nvSpPr>
+        <p:spPr>
+          <a:xfrm>
+            <a:off x="3336926" y="3400425"/>
+            <a:ext cx="2434874" cy="200025"/>
+          </a:xfrm>
+          <a:prstGeom prst="rect">
+            <a:avLst/>
+          </a:prstGeom>
+          <a:noFill/>
+        </p:spPr>
+        <p:txBody>
+          <a:bodyPr wrap="none" lIns="0" rIns="0" tIns="0" bIns="0" anchor="t">
+            <a:spAutoFit/>
+          </a:bodyPr>
+          <a:lstStyle/>
+          <a:p>
+            <a:pPr algn="ctr"/>
+            <a:r>
+              <a:rPr b="1" sz="1200" i="0" u="none">
+                <a:solidFill>
+                  <a:srgbClr val="0F172A"/>
+                </a:solidFill>
+                <a:latin typeface="Plus Jakarta Sans"/>
+              </a:rPr>
+              <a:t>Local CLI</a:t>
+            </a:r>
+          </a:p>
+        </p:txBody>
+      </p:sp>
+      <p:sp>
+        <p:nvSpPr>
+          <p:cNvPr id="25" name="TextBox 24"/>
+          <p:cNvSpPr txBox="1"/>
+          <p:nvPr/>
+        </p:nvSpPr>
+        <p:spPr>
+          <a:xfrm>
+            <a:off x="3394899" y="3657600"/>
+            <a:ext cx="2318928" cy="152400"/>
+          </a:xfrm>
+          <a:prstGeom prst="rect">
+            <a:avLst/>
+          </a:prstGeom>
+          <a:noFill/>
+        </p:spPr>
+        <p:txBody>
+          <a:bodyPr wrap="none" lIns="0" rIns="0" tIns="0" bIns="0" anchor="t">
+            <a:spAutoFit/>
+          </a:bodyPr>
+          <a:lstStyle/>
+          <a:p>
+            <a:pPr algn="ctr"/>
+            <a:r>
+              <a:rPr b="0" sz="975" i="0" u="none">
+                <a:solidFill>
+                  <a:srgbClr val="64748B"/>
+                </a:solidFill>
+                <a:latin typeface="Plus Jakarta Sans"/>
+              </a:rPr>
+              <a:t>Fast deterministic rules engine</a:t>
+            </a:r>
+          </a:p>
+        </p:txBody>
+      </p:sp>
+      <p:sp>
+        <p:nvSpPr>
+          <p:cNvPr id="26" name="TextBox 25"/>
+          <p:cNvSpPr txBox="1"/>
+          <p:nvPr/>
+        </p:nvSpPr>
+        <p:spPr>
+          <a:xfrm>
+            <a:off x="6011219" y="3324225"/>
+            <a:ext cx="2434874" cy="200025"/>
+          </a:xfrm>
+          <a:prstGeom prst="rect">
+            <a:avLst/>
+          </a:prstGeom>
+          <a:noFill/>
+        </p:spPr>
+        <p:txBody>
+          <a:bodyPr wrap="none" lIns="0" rIns="0" tIns="0" bIns="0" anchor="t">
+            <a:spAutoFit/>
+          </a:bodyPr>
+          <a:lstStyle/>
+          <a:p>
+            <a:pPr algn="ctr"/>
+            <a:r>
+              <a:rPr b="1" sz="1200" i="0" u="none">
+                <a:solidFill>
+                  <a:srgbClr val="0F172A"/>
+                </a:solidFill>
+                <a:latin typeface="Plus Jakarta Sans"/>
+              </a:rPr>
+              <a:t>ONNX Runtime</a:t>
+            </a:r>
+          </a:p>
+        </p:txBody>
+      </p:sp>
+      <p:sp>
+        <p:nvSpPr>
+          <p:cNvPr id="27" name="TextBox 26"/>
+          <p:cNvSpPr txBox="1"/>
+          <p:nvPr/>
+        </p:nvSpPr>
+        <p:spPr>
+          <a:xfrm>
+            <a:off x="6069192" y="3581400"/>
+            <a:ext cx="2318928" cy="304800"/>
+          </a:xfrm>
+          <a:prstGeom prst="rect">
+            <a:avLst/>
+          </a:prstGeom>
+          <a:noFill/>
+        </p:spPr>
+        <p:txBody>
+          <a:bodyPr wrap="square" lIns="0" rIns="0" tIns="0" bIns="0" anchor="t">
+            <a:spAutoFit/>
+          </a:bodyPr>
+          <a:lstStyle/>
+          <a:p>
+            <a:pPr algn="ctr"/>
+            <a:r>
+              <a:rPr b="0" sz="975" i="0" u="none">
+                <a:solidFill>
+                  <a:srgbClr val="64748B"/>
+                </a:solidFill>
+                <a:latin typeface="Plus Jakarta Sans"/>
+              </a:rPr>
+              <a:t>Tokenizer &amp; QNN Execution Provider</a:t>
+            </a:r>
+          </a:p>
+        </p:txBody>
+      </p:sp>
+      <p:sp>
+        <p:nvSpPr>
+          <p:cNvPr id="28" name="TextBox 27"/>
+          <p:cNvSpPr txBox="1"/>
+          <p:nvPr/>
+        </p:nvSpPr>
+        <p:spPr>
+          <a:xfrm>
+            <a:off x="8646588" y="3386137"/>
+            <a:ext cx="2921849" cy="209550"/>
+          </a:xfrm>
+          <a:prstGeom prst="rect">
+            <a:avLst/>
+          </a:prstGeom>
+          <a:noFill/>
+        </p:spPr>
+        <p:txBody>
+          <a:bodyPr wrap="none" lIns="0" rIns="0" tIns="0" bIns="0" anchor="t">
+            <a:spAutoFit/>
+          </a:bodyPr>
+          <a:lstStyle/>
+          <a:p>
+            <a:pPr algn="ctr"/>
+            <a:r>
+              <a:rPr b="1" sz="1275" i="0" u="none">
+                <a:solidFill>
+                  <a:srgbClr val="E4002B"/>
+                </a:solidFill>
+                <a:latin typeface="Plus Jakarta Sans"/>
+              </a:rPr>
+              <a:t>Hexagon NPU</a:t>
+            </a:r>
+          </a:p>
+        </p:txBody>
+      </p:sp>
+      <p:sp>
+        <p:nvSpPr>
+          <p:cNvPr id="29" name="TextBox 28"/>
+          <p:cNvSpPr txBox="1"/>
+          <p:nvPr/>
+        </p:nvSpPr>
+        <p:spPr>
+          <a:xfrm>
+            <a:off x="8716156" y="3652837"/>
+            <a:ext cx="2782713" cy="152400"/>
+          </a:xfrm>
+          <a:prstGeom prst="rect">
+            <a:avLst/>
+          </a:prstGeom>
+          <a:noFill/>
+        </p:spPr>
+        <p:txBody>
+          <a:bodyPr wrap="none" lIns="0" rIns="0" tIns="0" bIns="0" anchor="t">
+            <a:spAutoFit/>
+          </a:bodyPr>
+          <a:lstStyle/>
+          <a:p>
+            <a:pPr algn="ctr"/>
+            <a:r>
+              <a:rPr b="0" sz="975" i="0" u="none">
+                <a:solidFill>
+                  <a:srgbClr val="0F172A"/>
+                </a:solidFill>
+                <a:latin typeface="Plus Jakarta Sans"/>
+              </a:rPr>
+              <a:t>HTP tensor engine handles inference</a:t>
+            </a:r>
+          </a:p>
+        </p:txBody>
+      </p:sp>
+      <p:sp>
+        <p:nvSpPr>
+          <p:cNvPr id="30" name="TextBox 29"/>
+          <p:cNvSpPr txBox="1"/>
+          <p:nvPr/>
+        </p:nvSpPr>
+        <p:spPr>
+          <a:xfrm>
+            <a:off x="1524000" y="5795962"/>
+            <a:ext cx="7441406" cy="180975"/>
+          </a:xfrm>
+          <a:prstGeom prst="rect">
+            <a:avLst/>
+          </a:prstGeom>
+          <a:noFill/>
+        </p:spPr>
+        <p:txBody>
+          <a:bodyPr wrap="none" lIns="0" rIns="0" tIns="0" bIns="0" anchor="t">
+            <a:spAutoFit/>
+          </a:bodyPr>
+          <a:lstStyle/>
+          <a:p>
+            <a:pPr algn="l"/>
+            <a:r>
+              <a:rPr b="1" sz="1125" i="0" u="none">
+                <a:solidFill>
+                  <a:srgbClr val="0F172A"/>
+                </a:solidFill>
+                <a:latin typeface="Plus Jakarta Sans"/>
+              </a:rPr>
+              <a:t>100% Host CPU Preservation</a:t>
+            </a:r>
+          </a:p>
+        </p:txBody>
+      </p:sp>
+      <p:sp>
+        <p:nvSpPr>
+          <p:cNvPr id="31" name="TextBox 30"/>
+          <p:cNvSpPr txBox="1"/>
+          <p:nvPr/>
+        </p:nvSpPr>
+        <p:spPr>
+          <a:xfrm>
+            <a:off x="1524000" y="5976937"/>
+            <a:ext cx="7441406" cy="152400"/>
+          </a:xfrm>
+          <a:prstGeom prst="rect">
+            <a:avLst/>
+          </a:prstGeom>
+          <a:noFill/>
+        </p:spPr>
+        <p:txBody>
+          <a:bodyPr wrap="none" lIns="0" rIns="0" tIns="0" bIns="0" anchor="t">
+            <a:spAutoFit/>
+          </a:bodyPr>
+          <a:lstStyle/>
+          <a:p>
+            <a:pPr algn="l"/>
+            <a:r>
+              <a:rPr b="0" sz="975" i="0" u="none">
+                <a:solidFill>
+                  <a:srgbClr val="64748B"/>
+                </a:solidFill>
+                <a:latin typeface="Plus Jakarta Sans"/>
+              </a:rPr>
+              <a:t>Oryon CPU cores remain completely free for compilers, Next.js bundlers, tests, and Docker containers.</a:t>
             </a:r>
           </a:p>
         </p:txBody>
@@ -4071,7 +6679,7 @@
     <p:bg>
       <p:bgPr>
         <a:solidFill>
-          <a:srgbClr val="F6F8FC"/>
+          <a:srgbClr val="FFFFFF"/>
         </a:solidFill>
         <a:effectLst/>
       </p:bgPr>
@@ -4085,245 +6693,854 @@
       <p:grpSpPr/>
       <p:sp>
         <p:nvSpPr>
-          <p:cNvPr id="2" name="TextBox 1"/>
-          <p:cNvSpPr txBox="1"/>
-          <p:nvPr/>
-        </p:nvSpPr>
-        <p:spPr>
-          <a:xfrm>
-            <a:off x="640080" y="411480"/>
-            <a:ext cx="6400800" cy="274320"/>
-          </a:xfrm>
-          <a:prstGeom prst="rect">
-            <a:avLst/>
-          </a:prstGeom>
-          <a:noFill/>
-        </p:spPr>
-        <p:txBody>
-          <a:bodyPr wrap="none">
-            <a:spAutoFit/>
-          </a:bodyPr>
-          <a:lstStyle/>
-          <a:p>
-            <a:pPr>
-              <a:defRPr sz="1200" b="1">
-                <a:solidFill>
-                  <a:srgbClr val="1E6ED2"/>
-                </a:solidFill>
-              </a:defRPr>
+          <p:cNvPr id="2" name="Rectangle 1"/>
+          <p:cNvSpPr/>
+          <p:nvPr/>
+        </p:nvSpPr>
+        <p:spPr>
+          <a:xfrm>
+            <a:off x="762000" y="5991225"/>
+            <a:ext cx="10668000" cy="333375"/>
+          </a:xfrm>
+          <a:prstGeom prst="rect">
+            <a:avLst/>
+          </a:prstGeom>
+          <a:noFill/>
+          <a:ln>
+            <a:noFill/>
+          </a:ln>
+          <a:effectLst/>
+        </p:spPr>
+        <p:style>
+          <a:lnRef idx="1">
+            <a:schemeClr val="accent1"/>
+          </a:lnRef>
+          <a:fillRef idx="3">
+            <a:schemeClr val="accent1"/>
+          </a:fillRef>
+          <a:effectRef idx="2">
+            <a:schemeClr val="accent1"/>
+          </a:effectRef>
+          <a:fontRef idx="minor">
+            <a:schemeClr val="lt1"/>
+          </a:fontRef>
+        </p:style>
+        <p:txBody>
+          <a:bodyPr rtlCol="0" anchor="ctr"/>
+          <a:lstStyle/>
+          <a:p>
+            <a:pPr algn="ctr"/>
+          </a:p>
+        </p:txBody>
+      </p:sp>
+      <p:sp>
+        <p:nvSpPr>
+          <p:cNvPr id="3" name="Rounded Rectangle 2"/>
+          <p:cNvSpPr/>
+          <p:nvPr/>
+        </p:nvSpPr>
+        <p:spPr>
+          <a:xfrm>
+            <a:off x="762000" y="2690812"/>
+            <a:ext cx="2524125" cy="1819275"/>
+          </a:xfrm>
+          <a:prstGeom prst="roundRect">
+            <a:avLst>
+              <a:gd name="adj" fmla="val 6282"/>
+            </a:avLst>
+          </a:prstGeom>
+          <a:solidFill>
+            <a:srgbClr val="F8FAFC"/>
+          </a:solidFill>
+          <a:ln w="9525">
+            <a:solidFill>
+              <a:srgbClr val="E2E8F0"/>
+            </a:solidFill>
+          </a:ln>
+          <a:effectLst/>
+        </p:spPr>
+        <p:style>
+          <a:lnRef idx="1">
+            <a:schemeClr val="accent1"/>
+          </a:lnRef>
+          <a:fillRef idx="3">
+            <a:schemeClr val="accent1"/>
+          </a:fillRef>
+          <a:effectRef idx="2">
+            <a:schemeClr val="accent1"/>
+          </a:effectRef>
+          <a:fontRef idx="minor">
+            <a:schemeClr val="lt1"/>
+          </a:fontRef>
+        </p:style>
+        <p:txBody>
+          <a:bodyPr rtlCol="0" anchor="ctr"/>
+          <a:lstStyle/>
+          <a:p>
+            <a:pPr algn="ctr"/>
+          </a:p>
+        </p:txBody>
+      </p:sp>
+      <p:sp>
+        <p:nvSpPr>
+          <p:cNvPr id="4" name="Rounded Rectangle 3"/>
+          <p:cNvSpPr/>
+          <p:nvPr/>
+        </p:nvSpPr>
+        <p:spPr>
+          <a:xfrm>
+            <a:off x="3476625" y="2690812"/>
+            <a:ext cx="2524125" cy="1819275"/>
+          </a:xfrm>
+          <a:prstGeom prst="roundRect">
+            <a:avLst>
+              <a:gd name="adj" fmla="val 6282"/>
+            </a:avLst>
+          </a:prstGeom>
+          <a:solidFill>
+            <a:srgbClr val="F8FAFC"/>
+          </a:solidFill>
+          <a:ln w="9525">
+            <a:solidFill>
+              <a:srgbClr val="E2E8F0"/>
+            </a:solidFill>
+          </a:ln>
+          <a:effectLst/>
+        </p:spPr>
+        <p:style>
+          <a:lnRef idx="1">
+            <a:schemeClr val="accent1"/>
+          </a:lnRef>
+          <a:fillRef idx="3">
+            <a:schemeClr val="accent1"/>
+          </a:fillRef>
+          <a:effectRef idx="2">
+            <a:schemeClr val="accent1"/>
+          </a:effectRef>
+          <a:fontRef idx="minor">
+            <a:schemeClr val="lt1"/>
+          </a:fontRef>
+        </p:style>
+        <p:txBody>
+          <a:bodyPr rtlCol="0" anchor="ctr"/>
+          <a:lstStyle/>
+          <a:p>
+            <a:pPr algn="ctr"/>
+          </a:p>
+        </p:txBody>
+      </p:sp>
+      <p:sp>
+        <p:nvSpPr>
+          <p:cNvPr id="5" name="Rounded Rectangle 4"/>
+          <p:cNvSpPr/>
+          <p:nvPr/>
+        </p:nvSpPr>
+        <p:spPr>
+          <a:xfrm>
+            <a:off x="6191250" y="2690812"/>
+            <a:ext cx="2524125" cy="1819275"/>
+          </a:xfrm>
+          <a:prstGeom prst="roundRect">
+            <a:avLst>
+              <a:gd name="adj" fmla="val 6282"/>
+            </a:avLst>
+          </a:prstGeom>
+          <a:solidFill>
+            <a:srgbClr val="F8FAFC"/>
+          </a:solidFill>
+          <a:ln w="9525">
+            <a:solidFill>
+              <a:srgbClr val="E2E8F0"/>
+            </a:solidFill>
+          </a:ln>
+          <a:effectLst/>
+        </p:spPr>
+        <p:style>
+          <a:lnRef idx="1">
+            <a:schemeClr val="accent1"/>
+          </a:lnRef>
+          <a:fillRef idx="3">
+            <a:schemeClr val="accent1"/>
+          </a:fillRef>
+          <a:effectRef idx="2">
+            <a:schemeClr val="accent1"/>
+          </a:effectRef>
+          <a:fontRef idx="minor">
+            <a:schemeClr val="lt1"/>
+          </a:fontRef>
+        </p:style>
+        <p:txBody>
+          <a:bodyPr rtlCol="0" anchor="ctr"/>
+          <a:lstStyle/>
+          <a:p>
+            <a:pPr algn="ctr"/>
+          </a:p>
+        </p:txBody>
+      </p:sp>
+      <p:sp>
+        <p:nvSpPr>
+          <p:cNvPr id="6" name="Rounded Rectangle 5"/>
+          <p:cNvSpPr/>
+          <p:nvPr/>
+        </p:nvSpPr>
+        <p:spPr>
+          <a:xfrm>
+            <a:off x="8905875" y="2690812"/>
+            <a:ext cx="2524125" cy="1819275"/>
+          </a:xfrm>
+          <a:prstGeom prst="roundRect">
+            <a:avLst>
+              <a:gd name="adj" fmla="val 6282"/>
+            </a:avLst>
+          </a:prstGeom>
+          <a:solidFill>
+            <a:srgbClr val="F8FAFC"/>
+          </a:solidFill>
+          <a:ln w="9525">
+            <a:solidFill>
+              <a:srgbClr val="E2E8F0"/>
+            </a:solidFill>
+          </a:ln>
+          <a:effectLst/>
+        </p:spPr>
+        <p:style>
+          <a:lnRef idx="1">
+            <a:schemeClr val="accent1"/>
+          </a:lnRef>
+          <a:fillRef idx="3">
+            <a:schemeClr val="accent1"/>
+          </a:fillRef>
+          <a:effectRef idx="2">
+            <a:schemeClr val="accent1"/>
+          </a:effectRef>
+          <a:fontRef idx="minor">
+            <a:schemeClr val="lt1"/>
+          </a:fontRef>
+        </p:style>
+        <p:txBody>
+          <a:bodyPr rtlCol="0" anchor="ctr"/>
+          <a:lstStyle/>
+          <a:p>
+            <a:pPr algn="ctr"/>
+          </a:p>
+        </p:txBody>
+      </p:sp>
+      <p:sp>
+        <p:nvSpPr>
+          <p:cNvPr id="7" name="Rectangle 6"/>
+          <p:cNvSpPr/>
+          <p:nvPr/>
+        </p:nvSpPr>
+        <p:spPr>
+          <a:xfrm>
+            <a:off x="762000" y="5991225"/>
+            <a:ext cx="10668000" cy="9525"/>
+          </a:xfrm>
+          <a:prstGeom prst="rect">
+            <a:avLst/>
+          </a:prstGeom>
+          <a:solidFill>
+            <a:srgbClr val="F1F5F9"/>
+          </a:solidFill>
+          <a:ln>
+            <a:noFill/>
+          </a:ln>
+          <a:effectLst/>
+        </p:spPr>
+        <p:style>
+          <a:lnRef idx="1">
+            <a:schemeClr val="accent1"/>
+          </a:lnRef>
+          <a:fillRef idx="3">
+            <a:schemeClr val="accent1"/>
+          </a:fillRef>
+          <a:effectRef idx="2">
+            <a:schemeClr val="accent1"/>
+          </a:effectRef>
+          <a:fontRef idx="minor">
+            <a:schemeClr val="lt1"/>
+          </a:fontRef>
+        </p:style>
+        <p:txBody>
+          <a:bodyPr rtlCol="0" anchor="ctr"/>
+          <a:lstStyle/>
+          <a:p>
+            <a:pPr algn="ctr"/>
+          </a:p>
+        </p:txBody>
+      </p:sp>
+      <p:sp>
+        <p:nvSpPr>
+          <p:cNvPr id="8" name="TextBox 7"/>
+          <p:cNvSpPr txBox="1"/>
+          <p:nvPr/>
+        </p:nvSpPr>
+        <p:spPr>
+          <a:xfrm>
+            <a:off x="762000" y="533400"/>
+            <a:ext cx="11430000" cy="171450"/>
+          </a:xfrm>
+          <a:prstGeom prst="rect">
+            <a:avLst/>
+          </a:prstGeom>
+          <a:noFill/>
+        </p:spPr>
+        <p:txBody>
+          <a:bodyPr wrap="none" lIns="0" rIns="0" tIns="0" bIns="0" anchor="t">
+            <a:spAutoFit/>
+          </a:bodyPr>
+          <a:lstStyle/>
+          <a:p>
+            <a:pPr algn="l"/>
+            <a:r>
+              <a:rPr b="1" sz="1050" i="0" u="none">
+                <a:solidFill>
+                  <a:srgbClr val="E4002B"/>
+                </a:solidFill>
+                <a:latin typeface="Plus Jakarta Sans"/>
+              </a:rPr>
+              <a:t>HARDWARE SYNERGIES</a:t>
+            </a:r>
+          </a:p>
+        </p:txBody>
+      </p:sp>
+      <p:sp>
+        <p:nvSpPr>
+          <p:cNvPr id="9" name="TextBox 8"/>
+          <p:cNvSpPr txBox="1"/>
+          <p:nvPr/>
+        </p:nvSpPr>
+        <p:spPr>
+          <a:xfrm>
+            <a:off x="762000" y="781050"/>
+            <a:ext cx="11430000" cy="428625"/>
+          </a:xfrm>
+          <a:prstGeom prst="rect">
+            <a:avLst/>
+          </a:prstGeom>
+          <a:noFill/>
+        </p:spPr>
+        <p:txBody>
+          <a:bodyPr wrap="none" lIns="0" rIns="0" tIns="0" bIns="0" anchor="t">
+            <a:spAutoFit/>
+          </a:bodyPr>
+          <a:lstStyle/>
+          <a:p>
+            <a:pPr algn="l"/>
+            <a:r>
+              <a:rPr b="1" sz="2700" i="0" u="none">
+                <a:solidFill>
+                  <a:srgbClr val="0F172A"/>
+                </a:solidFill>
+                <a:latin typeface="Plus Jakarta Sans"/>
+              </a:rPr>
+              <a:t>Why Snapdragon PCs</a:t>
+            </a:r>
+          </a:p>
+        </p:txBody>
+      </p:sp>
+      <p:sp>
+        <p:nvSpPr>
+          <p:cNvPr id="10" name="TextBox 9"/>
+          <p:cNvSpPr txBox="1"/>
+          <p:nvPr/>
+        </p:nvSpPr>
+        <p:spPr>
+          <a:xfrm>
+            <a:off x="762000" y="6153150"/>
+            <a:ext cx="6096000" cy="171450"/>
+          </a:xfrm>
+          <a:prstGeom prst="rect">
+            <a:avLst/>
+          </a:prstGeom>
+          <a:noFill/>
+        </p:spPr>
+        <p:txBody>
+          <a:bodyPr wrap="none" lIns="0" rIns="0" tIns="0" bIns="0" anchor="t">
+            <a:spAutoFit/>
+          </a:bodyPr>
+          <a:lstStyle/>
+          <a:p>
+            <a:pPr algn="l"/>
+            <a:r>
+              <a:rPr b="1" sz="1050" i="0" u="none">
+                <a:solidFill>
+                  <a:srgbClr val="0F172A"/>
+                </a:solidFill>
+                <a:latin typeface="Plus Jakarta Sans"/>
+              </a:rPr>
+              <a:t>Optimized specifically for Qualcomm Snapdragon X Elite and X Plus platforms.</a:t>
+            </a:r>
+          </a:p>
+        </p:txBody>
+      </p:sp>
+      <p:sp>
+        <p:nvSpPr>
+          <p:cNvPr id="11" name="TextBox 10"/>
+          <p:cNvSpPr txBox="1"/>
+          <p:nvPr/>
+        </p:nvSpPr>
+        <p:spPr>
+          <a:xfrm>
+            <a:off x="10668000" y="6157912"/>
+            <a:ext cx="1047750" cy="161925"/>
+          </a:xfrm>
+          <a:prstGeom prst="rect">
+            <a:avLst/>
+          </a:prstGeom>
+          <a:noFill/>
+        </p:spPr>
+        <p:txBody>
+          <a:bodyPr wrap="none" lIns="0" rIns="0" tIns="0" bIns="0" anchor="t">
+            <a:spAutoFit/>
+          </a:bodyPr>
+          <a:lstStyle/>
+          <a:p>
+            <a:pPr algn="l"/>
+            <a:r>
+              <a:rPr b="0" sz="975" i="0" u="none">
+                <a:solidFill>
+                  <a:srgbClr val="0F172A"/>
+                </a:solidFill>
+                <a:latin typeface="JetBrains Mono"/>
+              </a:rPr>
+              <a:t>05 | VALUE</a:t>
+            </a:r>
+          </a:p>
+        </p:txBody>
+      </p:sp>
+      <p:sp>
+        <p:nvSpPr>
+          <p:cNvPr id="12" name="TextBox 11"/>
+          <p:cNvSpPr txBox="1"/>
+          <p:nvPr/>
+        </p:nvSpPr>
+        <p:spPr>
+          <a:xfrm>
+            <a:off x="1000125" y="3005137"/>
+            <a:ext cx="2559843" cy="161925"/>
+          </a:xfrm>
+          <a:prstGeom prst="rect">
+            <a:avLst/>
+          </a:prstGeom>
+          <a:noFill/>
+        </p:spPr>
+        <p:txBody>
+          <a:bodyPr wrap="none" lIns="0" rIns="0" tIns="0" bIns="0" anchor="t">
+            <a:spAutoFit/>
+          </a:bodyPr>
+          <a:lstStyle/>
+          <a:p>
+            <a:pPr algn="l"/>
+            <a:r>
+              <a:rPr b="1" sz="975" i="0" u="none">
+                <a:solidFill>
+                  <a:srgbClr val="E4002B"/>
+                </a:solidFill>
+                <a:latin typeface="JetBrains Mono"/>
+              </a:rPr>
+              <a:t>01 // ISOLATION</a:t>
+            </a:r>
+          </a:p>
+        </p:txBody>
+      </p:sp>
+      <p:sp>
+        <p:nvSpPr>
+          <p:cNvPr id="13" name="TextBox 12"/>
+          <p:cNvSpPr txBox="1"/>
+          <p:nvPr/>
+        </p:nvSpPr>
+        <p:spPr>
+          <a:xfrm>
+            <a:off x="1000125" y="3281362"/>
+            <a:ext cx="2687835" cy="219075"/>
+          </a:xfrm>
+          <a:prstGeom prst="rect">
+            <a:avLst/>
+          </a:prstGeom>
+          <a:noFill/>
+        </p:spPr>
+        <p:txBody>
+          <a:bodyPr wrap="none" lIns="0" rIns="0" tIns="0" bIns="0" anchor="t">
+            <a:spAutoFit/>
+          </a:bodyPr>
+          <a:lstStyle/>
+          <a:p>
+            <a:pPr algn="l"/>
+            <a:r>
+              <a:rPr b="1" sz="1350" i="0" u="none">
+                <a:solidFill>
+                  <a:srgbClr val="0F172A"/>
+                </a:solidFill>
+                <a:latin typeface="Plus Jakarta Sans"/>
+              </a:rPr>
+              <a:t>Absolute Privacy</a:t>
+            </a:r>
+          </a:p>
+        </p:txBody>
+      </p:sp>
+      <p:sp>
+        <p:nvSpPr>
+          <p:cNvPr id="14" name="TextBox 13"/>
+          <p:cNvSpPr txBox="1"/>
+          <p:nvPr/>
+        </p:nvSpPr>
+        <p:spPr>
+          <a:xfrm>
+            <a:off x="1000125" y="3595687"/>
+            <a:ext cx="2143125" cy="600075"/>
+          </a:xfrm>
+          <a:prstGeom prst="rect">
+            <a:avLst/>
+          </a:prstGeom>
+          <a:noFill/>
+        </p:spPr>
+        <p:txBody>
+          <a:bodyPr wrap="square" lIns="0" rIns="0" tIns="0" bIns="0" anchor="t">
+            <a:spAutoFit/>
+          </a:bodyPr>
+          <a:lstStyle/>
+          <a:p>
+            <a:pPr algn="l">
+              <a:lnSpc>
+                <a:spcPts val="1575"/>
+              </a:lnSpc>
             </a:pPr>
             <a:r>
-              <a:t>SNAPDRAGON LOCAL REVIEW</a:t>
-            </a:r>
-          </a:p>
-        </p:txBody>
-      </p:sp>
-      <p:sp>
-        <p:nvSpPr>
-          <p:cNvPr id="3" name="TextBox 2"/>
-          <p:cNvSpPr txBox="1"/>
-          <p:nvPr/>
-        </p:nvSpPr>
-        <p:spPr>
-          <a:xfrm>
-            <a:off x="640080" y="960120"/>
-            <a:ext cx="10789920" cy="731520"/>
-          </a:xfrm>
-          <a:prstGeom prst="rect">
-            <a:avLst/>
-          </a:prstGeom>
-          <a:noFill/>
-        </p:spPr>
-        <p:txBody>
-          <a:bodyPr wrap="none">
-            <a:spAutoFit/>
-          </a:bodyPr>
-          <a:lstStyle/>
-          <a:p>
-            <a:pPr>
-              <a:defRPr sz="3400" b="1">
-                <a:solidFill>
-                  <a:srgbClr val="14203C"/>
-                </a:solidFill>
-              </a:defRPr>
+              <a:rPr b="0" sz="1050" i="0" u="none">
+                <a:solidFill>
+                  <a:srgbClr val="64748B"/>
+                </a:solidFill>
+                <a:latin typeface="Plus Jakarta Sans"/>
+              </a:rPr>
+              <a:t>Code never leaves device silicon. Immune to cloud outage or data retention leaks.</a:t>
+            </a:r>
+          </a:p>
+        </p:txBody>
+      </p:sp>
+      <p:sp>
+        <p:nvSpPr>
+          <p:cNvPr id="15" name="TextBox 14"/>
+          <p:cNvSpPr txBox="1"/>
+          <p:nvPr/>
+        </p:nvSpPr>
+        <p:spPr>
+          <a:xfrm>
+            <a:off x="3714750" y="3005137"/>
+            <a:ext cx="2559843" cy="161925"/>
+          </a:xfrm>
+          <a:prstGeom prst="rect">
+            <a:avLst/>
+          </a:prstGeom>
+          <a:noFill/>
+        </p:spPr>
+        <p:txBody>
+          <a:bodyPr wrap="none" lIns="0" rIns="0" tIns="0" bIns="0" anchor="t">
+            <a:spAutoFit/>
+          </a:bodyPr>
+          <a:lstStyle/>
+          <a:p>
+            <a:pPr algn="l"/>
+            <a:r>
+              <a:rPr b="1" sz="975" i="0" u="none">
+                <a:solidFill>
+                  <a:srgbClr val="E4002B"/>
+                </a:solidFill>
+                <a:latin typeface="JetBrains Mono"/>
+              </a:rPr>
+              <a:t>02 // EFFICIENCY</a:t>
+            </a:r>
+          </a:p>
+        </p:txBody>
+      </p:sp>
+      <p:sp>
+        <p:nvSpPr>
+          <p:cNvPr id="16" name="TextBox 15"/>
+          <p:cNvSpPr txBox="1"/>
+          <p:nvPr/>
+        </p:nvSpPr>
+        <p:spPr>
+          <a:xfrm>
+            <a:off x="3714750" y="3281362"/>
+            <a:ext cx="2687835" cy="219075"/>
+          </a:xfrm>
+          <a:prstGeom prst="rect">
+            <a:avLst/>
+          </a:prstGeom>
+          <a:noFill/>
+        </p:spPr>
+        <p:txBody>
+          <a:bodyPr wrap="none" lIns="0" rIns="0" tIns="0" bIns="0" anchor="t">
+            <a:spAutoFit/>
+          </a:bodyPr>
+          <a:lstStyle/>
+          <a:p>
+            <a:pPr algn="l"/>
+            <a:r>
+              <a:rPr b="1" sz="1350" i="0" u="none">
+                <a:solidFill>
+                  <a:srgbClr val="0F172A"/>
+                </a:solidFill>
+                <a:latin typeface="Plus Jakarta Sans"/>
+              </a:rPr>
+              <a:t>Zero Lag</a:t>
+            </a:r>
+          </a:p>
+        </p:txBody>
+      </p:sp>
+      <p:sp>
+        <p:nvSpPr>
+          <p:cNvPr id="17" name="TextBox 16"/>
+          <p:cNvSpPr txBox="1"/>
+          <p:nvPr/>
+        </p:nvSpPr>
+        <p:spPr>
+          <a:xfrm>
+            <a:off x="3714750" y="3595687"/>
+            <a:ext cx="2143125" cy="600075"/>
+          </a:xfrm>
+          <a:prstGeom prst="rect">
+            <a:avLst/>
+          </a:prstGeom>
+          <a:noFill/>
+        </p:spPr>
+        <p:txBody>
+          <a:bodyPr wrap="square" lIns="0" rIns="0" tIns="0" bIns="0" anchor="t">
+            <a:spAutoFit/>
+          </a:bodyPr>
+          <a:lstStyle/>
+          <a:p>
+            <a:pPr algn="l">
+              <a:lnSpc>
+                <a:spcPts val="1575"/>
+              </a:lnSpc>
             </a:pPr>
             <a:r>
-              <a:t>Why Snapdragon</a:t>
-            </a:r>
-          </a:p>
-        </p:txBody>
-      </p:sp>
-      <p:sp>
-        <p:nvSpPr>
-          <p:cNvPr id="4" name="TextBox 3"/>
-          <p:cNvSpPr txBox="1"/>
-          <p:nvPr/>
-        </p:nvSpPr>
-        <p:spPr>
-          <a:xfrm>
-            <a:off x="914400" y="1965960"/>
-            <a:ext cx="10332720" cy="502920"/>
-          </a:xfrm>
-          <a:prstGeom prst="rect">
-            <a:avLst/>
-          </a:prstGeom>
-          <a:noFill/>
-        </p:spPr>
-        <p:txBody>
-          <a:bodyPr wrap="none">
-            <a:spAutoFit/>
-          </a:bodyPr>
-          <a:lstStyle/>
-          <a:p>
-            <a:pPr>
-              <a:defRPr sz="2200" b="0">
-                <a:solidFill>
-                  <a:srgbClr val="2D374B"/>
-                </a:solidFill>
-              </a:defRPr>
+              <a:rPr b="0" sz="1050" i="0" u="none">
+                <a:solidFill>
+                  <a:srgbClr val="64748B"/>
+                </a:solidFill>
+                <a:latin typeface="Plus Jakarta Sans"/>
+              </a:rPr>
+              <a:t>Dedicated NPU computes inferences at micro-watt levels without thermal throttling.</a:t>
+            </a:r>
+          </a:p>
+        </p:txBody>
+      </p:sp>
+      <p:sp>
+        <p:nvSpPr>
+          <p:cNvPr id="18" name="TextBox 17"/>
+          <p:cNvSpPr txBox="1"/>
+          <p:nvPr/>
+        </p:nvSpPr>
+        <p:spPr>
+          <a:xfrm>
+            <a:off x="6429375" y="3005137"/>
+            <a:ext cx="2559843" cy="161925"/>
+          </a:xfrm>
+          <a:prstGeom prst="rect">
+            <a:avLst/>
+          </a:prstGeom>
+          <a:noFill/>
+        </p:spPr>
+        <p:txBody>
+          <a:bodyPr wrap="none" lIns="0" rIns="0" tIns="0" bIns="0" anchor="t">
+            <a:spAutoFit/>
+          </a:bodyPr>
+          <a:lstStyle/>
+          <a:p>
+            <a:pPr algn="l"/>
+            <a:r>
+              <a:rPr b="1" sz="975" i="0" u="none">
+                <a:solidFill>
+                  <a:srgbClr val="E4002B"/>
+                </a:solidFill>
+                <a:latin typeface="JetBrains Mono"/>
+              </a:rPr>
+              <a:t>03 // MOBILITY</a:t>
+            </a:r>
+          </a:p>
+        </p:txBody>
+      </p:sp>
+      <p:sp>
+        <p:nvSpPr>
+          <p:cNvPr id="19" name="TextBox 18"/>
+          <p:cNvSpPr txBox="1"/>
+          <p:nvPr/>
+        </p:nvSpPr>
+        <p:spPr>
+          <a:xfrm>
+            <a:off x="6429375" y="3281362"/>
+            <a:ext cx="2687835" cy="219075"/>
+          </a:xfrm>
+          <a:prstGeom prst="rect">
+            <a:avLst/>
+          </a:prstGeom>
+          <a:noFill/>
+        </p:spPr>
+        <p:txBody>
+          <a:bodyPr wrap="none" lIns="0" rIns="0" tIns="0" bIns="0" anchor="t">
+            <a:spAutoFit/>
+          </a:bodyPr>
+          <a:lstStyle/>
+          <a:p>
+            <a:pPr algn="l"/>
+            <a:r>
+              <a:rPr b="1" sz="1350" i="0" u="none">
+                <a:solidFill>
+                  <a:srgbClr val="0F172A"/>
+                </a:solidFill>
+                <a:latin typeface="Plus Jakarta Sans"/>
+              </a:rPr>
+              <a:t>100% Offline</a:t>
+            </a:r>
+          </a:p>
+        </p:txBody>
+      </p:sp>
+      <p:sp>
+        <p:nvSpPr>
+          <p:cNvPr id="20" name="TextBox 19"/>
+          <p:cNvSpPr txBox="1"/>
+          <p:nvPr/>
+        </p:nvSpPr>
+        <p:spPr>
+          <a:xfrm>
+            <a:off x="6429375" y="3595687"/>
+            <a:ext cx="2143125" cy="600075"/>
+          </a:xfrm>
+          <a:prstGeom prst="rect">
+            <a:avLst/>
+          </a:prstGeom>
+          <a:noFill/>
+        </p:spPr>
+        <p:txBody>
+          <a:bodyPr wrap="square" lIns="0" rIns="0" tIns="0" bIns="0" anchor="t">
+            <a:spAutoFit/>
+          </a:bodyPr>
+          <a:lstStyle/>
+          <a:p>
+            <a:pPr algn="l">
+              <a:lnSpc>
+                <a:spcPts val="1575"/>
+              </a:lnSpc>
             </a:pPr>
             <a:r>
-              <a:t>• Privacy: proprietary code remains on-device</a:t>
-            </a:r>
-          </a:p>
-        </p:txBody>
-      </p:sp>
-      <p:sp>
-        <p:nvSpPr>
-          <p:cNvPr id="5" name="TextBox 4"/>
-          <p:cNvSpPr txBox="1"/>
-          <p:nvPr/>
-        </p:nvSpPr>
-        <p:spPr>
-          <a:xfrm>
-            <a:off x="914400" y="2651760"/>
-            <a:ext cx="10332720" cy="502920"/>
-          </a:xfrm>
-          <a:prstGeom prst="rect">
-            <a:avLst/>
-          </a:prstGeom>
-          <a:noFill/>
-        </p:spPr>
-        <p:txBody>
-          <a:bodyPr wrap="none">
-            <a:spAutoFit/>
-          </a:bodyPr>
-          <a:lstStyle/>
-          <a:p>
-            <a:pPr>
-              <a:defRPr sz="2200" b="0">
-                <a:solidFill>
-                  <a:srgbClr val="2D374B"/>
-                </a:solidFill>
-              </a:defRPr>
+              <a:rPr b="0" sz="1050" i="0" u="none">
+                <a:solidFill>
+                  <a:srgbClr val="64748B"/>
+                </a:solidFill>
+                <a:latin typeface="Plus Jakarta Sans"/>
+              </a:rPr>
+              <a:t>Consistent performance during air travel, high-security zones, and limited networks.</a:t>
+            </a:r>
+          </a:p>
+        </p:txBody>
+      </p:sp>
+      <p:sp>
+        <p:nvSpPr>
+          <p:cNvPr id="21" name="TextBox 20"/>
+          <p:cNvSpPr txBox="1"/>
+          <p:nvPr/>
+        </p:nvSpPr>
+        <p:spPr>
+          <a:xfrm>
+            <a:off x="9144000" y="3005137"/>
+            <a:ext cx="2559843" cy="161925"/>
+          </a:xfrm>
+          <a:prstGeom prst="rect">
+            <a:avLst/>
+          </a:prstGeom>
+          <a:noFill/>
+        </p:spPr>
+        <p:txBody>
+          <a:bodyPr wrap="none" lIns="0" rIns="0" tIns="0" bIns="0" anchor="t">
+            <a:spAutoFit/>
+          </a:bodyPr>
+          <a:lstStyle/>
+          <a:p>
+            <a:pPr algn="l"/>
+            <a:r>
+              <a:rPr b="1" sz="975" i="0" u="none">
+                <a:solidFill>
+                  <a:srgbClr val="E4002B"/>
+                </a:solidFill>
+                <a:latin typeface="JetBrains Mono"/>
+              </a:rPr>
+              <a:t>04 // GOVERNANCE</a:t>
+            </a:r>
+          </a:p>
+        </p:txBody>
+      </p:sp>
+      <p:sp>
+        <p:nvSpPr>
+          <p:cNvPr id="22" name="TextBox 21"/>
+          <p:cNvSpPr txBox="1"/>
+          <p:nvPr/>
+        </p:nvSpPr>
+        <p:spPr>
+          <a:xfrm>
+            <a:off x="9144000" y="3281362"/>
+            <a:ext cx="2687835" cy="219075"/>
+          </a:xfrm>
+          <a:prstGeom prst="rect">
+            <a:avLst/>
+          </a:prstGeom>
+          <a:noFill/>
+        </p:spPr>
+        <p:txBody>
+          <a:bodyPr wrap="none" lIns="0" rIns="0" tIns="0" bIns="0" anchor="t">
+            <a:spAutoFit/>
+          </a:bodyPr>
+          <a:lstStyle/>
+          <a:p>
+            <a:pPr algn="l"/>
+            <a:r>
+              <a:rPr b="1" sz="1350" i="0" u="none">
+                <a:solidFill>
+                  <a:srgbClr val="0F172A"/>
+                </a:solidFill>
+                <a:latin typeface="Plus Jakarta Sans"/>
+              </a:rPr>
+              <a:t>Enterprise Fit</a:t>
+            </a:r>
+          </a:p>
+        </p:txBody>
+      </p:sp>
+      <p:sp>
+        <p:nvSpPr>
+          <p:cNvPr id="23" name="TextBox 22"/>
+          <p:cNvSpPr txBox="1"/>
+          <p:nvPr/>
+        </p:nvSpPr>
+        <p:spPr>
+          <a:xfrm>
+            <a:off x="9144000" y="3595687"/>
+            <a:ext cx="2143125" cy="600075"/>
+          </a:xfrm>
+          <a:prstGeom prst="rect">
+            <a:avLst/>
+          </a:prstGeom>
+          <a:noFill/>
+        </p:spPr>
+        <p:txBody>
+          <a:bodyPr wrap="square" lIns="0" rIns="0" tIns="0" bIns="0" anchor="t">
+            <a:spAutoFit/>
+          </a:bodyPr>
+          <a:lstStyle/>
+          <a:p>
+            <a:pPr algn="l">
+              <a:lnSpc>
+                <a:spcPts val="1575"/>
+              </a:lnSpc>
             </a:pPr>
             <a:r>
-              <a:t>• Responsiveness: inference is offloaded from the CPU</a:t>
-            </a:r>
-          </a:p>
-        </p:txBody>
-      </p:sp>
-      <p:sp>
-        <p:nvSpPr>
-          <p:cNvPr id="6" name="TextBox 5"/>
-          <p:cNvSpPr txBox="1"/>
-          <p:nvPr/>
-        </p:nvSpPr>
-        <p:spPr>
-          <a:xfrm>
-            <a:off x="914400" y="3337560"/>
-            <a:ext cx="10332720" cy="502920"/>
-          </a:xfrm>
-          <a:prstGeom prst="rect">
-            <a:avLst/>
-          </a:prstGeom>
-          <a:noFill/>
-        </p:spPr>
-        <p:txBody>
-          <a:bodyPr wrap="none">
-            <a:spAutoFit/>
-          </a:bodyPr>
-          <a:lstStyle/>
-          <a:p>
-            <a:pPr>
-              <a:defRPr sz="2200" b="0">
-                <a:solidFill>
-                  <a:srgbClr val="2D374B"/>
-                </a:solidFill>
-              </a:defRPr>
-            </a:pPr>
-            <a:r>
-              <a:t>• Offline operation: useful on flights and restricted networks</a:t>
-            </a:r>
-          </a:p>
-        </p:txBody>
-      </p:sp>
-      <p:sp>
-        <p:nvSpPr>
-          <p:cNvPr id="7" name="TextBox 6"/>
-          <p:cNvSpPr txBox="1"/>
-          <p:nvPr/>
-        </p:nvSpPr>
-        <p:spPr>
-          <a:xfrm>
-            <a:off x="914400" y="4023360"/>
-            <a:ext cx="10332720" cy="502920"/>
-          </a:xfrm>
-          <a:prstGeom prst="rect">
-            <a:avLst/>
-          </a:prstGeom>
-          <a:noFill/>
-        </p:spPr>
-        <p:txBody>
-          <a:bodyPr wrap="none">
-            <a:spAutoFit/>
-          </a:bodyPr>
-          <a:lstStyle/>
-          <a:p>
-            <a:pPr>
-              <a:defRPr sz="2200" b="0">
-                <a:solidFill>
-                  <a:srgbClr val="2D374B"/>
-                </a:solidFill>
-              </a:defRPr>
-            </a:pPr>
-            <a:r>
-              <a:t>• Enterprise fit: local governance and predictable data boundaries</a:t>
-            </a:r>
-          </a:p>
-        </p:txBody>
-      </p:sp>
-      <p:sp>
-        <p:nvSpPr>
-          <p:cNvPr id="8" name="TextBox 7"/>
-          <p:cNvSpPr txBox="1"/>
-          <p:nvPr/>
-        </p:nvSpPr>
-        <p:spPr>
-          <a:xfrm>
-            <a:off x="11155680" y="6172200"/>
-            <a:ext cx="457200" cy="274320"/>
-          </a:xfrm>
-          <a:prstGeom prst="rect">
-            <a:avLst/>
-          </a:prstGeom>
-          <a:noFill/>
-        </p:spPr>
-        <p:txBody>
-          <a:bodyPr wrap="none">
-            <a:spAutoFit/>
-          </a:bodyPr>
-          <a:lstStyle/>
-          <a:p>
-            <a:pPr>
-              <a:defRPr sz="1200" b="1">
-                <a:solidFill>
-                  <a:srgbClr val="646E82"/>
-                </a:solidFill>
-              </a:defRPr>
-            </a:pPr>
-            <a:r>
-              <a:t>05</a:t>
+              <a:rPr b="0" sz="1050" i="0" u="none">
+                <a:solidFill>
+                  <a:srgbClr val="64748B"/>
+                </a:solidFill>
+                <a:latin typeface="Plus Jakarta Sans"/>
+              </a:rPr>
+              <a:t>Meets rigid compliance boundaries with transparent local evaluation policies.</a:t>
             </a:r>
           </a:p>
         </p:txBody>
@@ -4342,7 +7559,7 @@
     <p:bg>
       <p:bgPr>
         <a:solidFill>
-          <a:srgbClr val="F6F8FC"/>
+          <a:srgbClr val="F8FAFC"/>
         </a:solidFill>
         <a:effectLst/>
       </p:bgPr>
@@ -4356,245 +7573,966 @@
       <p:grpSpPr/>
       <p:sp>
         <p:nvSpPr>
-          <p:cNvPr id="2" name="TextBox 1"/>
-          <p:cNvSpPr txBox="1"/>
-          <p:nvPr/>
-        </p:nvSpPr>
-        <p:spPr>
-          <a:xfrm>
-            <a:off x="640080" y="411480"/>
-            <a:ext cx="6400800" cy="274320"/>
-          </a:xfrm>
-          <a:prstGeom prst="rect">
-            <a:avLst/>
-          </a:prstGeom>
-          <a:noFill/>
-        </p:spPr>
-        <p:txBody>
-          <a:bodyPr wrap="none">
-            <a:spAutoFit/>
-          </a:bodyPr>
-          <a:lstStyle/>
-          <a:p>
-            <a:pPr>
-              <a:defRPr sz="1200" b="1">
-                <a:solidFill>
-                  <a:srgbClr val="1E6ED2"/>
-                </a:solidFill>
-              </a:defRPr>
+          <p:cNvPr id="2" name="Rectangle 1"/>
+          <p:cNvSpPr/>
+          <p:nvPr/>
+        </p:nvSpPr>
+        <p:spPr>
+          <a:xfrm>
+            <a:off x="762000" y="6000601"/>
+            <a:ext cx="10668000" cy="323850"/>
+          </a:xfrm>
+          <a:prstGeom prst="rect">
+            <a:avLst/>
+          </a:prstGeom>
+          <a:noFill/>
+          <a:ln>
+            <a:noFill/>
+          </a:ln>
+          <a:effectLst/>
+        </p:spPr>
+        <p:style>
+          <a:lnRef idx="1">
+            <a:schemeClr val="accent1"/>
+          </a:lnRef>
+          <a:fillRef idx="3">
+            <a:schemeClr val="accent1"/>
+          </a:fillRef>
+          <a:effectRef idx="2">
+            <a:schemeClr val="accent1"/>
+          </a:effectRef>
+          <a:fontRef idx="minor">
+            <a:schemeClr val="lt1"/>
+          </a:fontRef>
+        </p:style>
+        <p:txBody>
+          <a:bodyPr rtlCol="0" anchor="ctr"/>
+          <a:lstStyle/>
+          <a:p>
+            <a:pPr algn="ctr"/>
+          </a:p>
+        </p:txBody>
+      </p:sp>
+      <p:sp>
+        <p:nvSpPr>
+          <p:cNvPr id="3" name="Rounded Rectangle 2"/>
+          <p:cNvSpPr/>
+          <p:nvPr/>
+        </p:nvSpPr>
+        <p:spPr>
+          <a:xfrm>
+            <a:off x="762000" y="2581275"/>
+            <a:ext cx="5631805" cy="2047726"/>
+          </a:xfrm>
+          <a:prstGeom prst="roundRect">
+            <a:avLst>
+              <a:gd name="adj" fmla="val 5581"/>
+            </a:avLst>
+          </a:prstGeom>
+          <a:solidFill>
+            <a:srgbClr val="0B0F19"/>
+          </a:solidFill>
+          <a:ln>
+            <a:noFill/>
+          </a:ln>
+          <a:effectLst/>
+        </p:spPr>
+        <p:style>
+          <a:lnRef idx="1">
+            <a:schemeClr val="accent1"/>
+          </a:lnRef>
+          <a:fillRef idx="3">
+            <a:schemeClr val="accent1"/>
+          </a:fillRef>
+          <a:effectRef idx="2">
+            <a:schemeClr val="accent1"/>
+          </a:effectRef>
+          <a:fontRef idx="minor">
+            <a:schemeClr val="lt1"/>
+          </a:fontRef>
+        </p:style>
+        <p:txBody>
+          <a:bodyPr rtlCol="0" anchor="ctr"/>
+          <a:lstStyle/>
+          <a:p>
+            <a:pPr algn="ctr"/>
+          </a:p>
+        </p:txBody>
+      </p:sp>
+      <p:sp>
+        <p:nvSpPr>
+          <p:cNvPr id="4" name="Rectangle 3"/>
+          <p:cNvSpPr/>
+          <p:nvPr/>
+        </p:nvSpPr>
+        <p:spPr>
+          <a:xfrm>
+            <a:off x="762000" y="6000601"/>
+            <a:ext cx="10668000" cy="9525"/>
+          </a:xfrm>
+          <a:prstGeom prst="rect">
+            <a:avLst/>
+          </a:prstGeom>
+          <a:solidFill>
+            <a:srgbClr val="E2E8F0"/>
+          </a:solidFill>
+          <a:ln>
+            <a:noFill/>
+          </a:ln>
+          <a:effectLst/>
+        </p:spPr>
+        <p:style>
+          <a:lnRef idx="1">
+            <a:schemeClr val="accent1"/>
+          </a:lnRef>
+          <a:fillRef idx="3">
+            <a:schemeClr val="accent1"/>
+          </a:fillRef>
+          <a:effectRef idx="2">
+            <a:schemeClr val="accent1"/>
+          </a:effectRef>
+          <a:fontRef idx="minor">
+            <a:schemeClr val="lt1"/>
+          </a:fontRef>
+        </p:style>
+        <p:txBody>
+          <a:bodyPr rtlCol="0" anchor="ctr"/>
+          <a:lstStyle/>
+          <a:p>
+            <a:pPr algn="ctr"/>
+          </a:p>
+        </p:txBody>
+      </p:sp>
+      <p:sp>
+        <p:nvSpPr>
+          <p:cNvPr id="5" name="Rectangle 4"/>
+          <p:cNvSpPr/>
+          <p:nvPr/>
+        </p:nvSpPr>
+        <p:spPr>
+          <a:xfrm>
+            <a:off x="762000" y="2581275"/>
+            <a:ext cx="5631805" cy="381000"/>
+          </a:xfrm>
+          <a:prstGeom prst="rect">
+            <a:avLst/>
+          </a:prstGeom>
+          <a:solidFill>
+            <a:srgbClr val="1E293B"/>
+          </a:solidFill>
+          <a:ln>
+            <a:noFill/>
+          </a:ln>
+          <a:effectLst/>
+        </p:spPr>
+        <p:style>
+          <a:lnRef idx="1">
+            <a:schemeClr val="accent1"/>
+          </a:lnRef>
+          <a:fillRef idx="3">
+            <a:schemeClr val="accent1"/>
+          </a:fillRef>
+          <a:effectRef idx="2">
+            <a:schemeClr val="accent1"/>
+          </a:effectRef>
+          <a:fontRef idx="minor">
+            <a:schemeClr val="lt1"/>
+          </a:fontRef>
+        </p:style>
+        <p:txBody>
+          <a:bodyPr rtlCol="0" anchor="ctr"/>
+          <a:lstStyle/>
+          <a:p>
+            <a:pPr algn="ctr"/>
+          </a:p>
+        </p:txBody>
+      </p:sp>
+      <p:sp>
+        <p:nvSpPr>
+          <p:cNvPr id="6" name="Rounded Rectangle 5"/>
+          <p:cNvSpPr/>
+          <p:nvPr/>
+        </p:nvSpPr>
+        <p:spPr>
+          <a:xfrm>
+            <a:off x="933450" y="2724150"/>
+            <a:ext cx="95250" cy="95250"/>
+          </a:xfrm>
+          <a:prstGeom prst="roundRect">
+            <a:avLst>
+              <a:gd name="adj" fmla="val 50000"/>
+            </a:avLst>
+          </a:prstGeom>
+          <a:solidFill>
+            <a:srgbClr val="EF4444"/>
+          </a:solidFill>
+          <a:ln>
+            <a:noFill/>
+          </a:ln>
+          <a:effectLst/>
+        </p:spPr>
+        <p:style>
+          <a:lnRef idx="1">
+            <a:schemeClr val="accent1"/>
+          </a:lnRef>
+          <a:fillRef idx="3">
+            <a:schemeClr val="accent1"/>
+          </a:fillRef>
+          <a:effectRef idx="2">
+            <a:schemeClr val="accent1"/>
+          </a:effectRef>
+          <a:fontRef idx="minor">
+            <a:schemeClr val="lt1"/>
+          </a:fontRef>
+        </p:style>
+        <p:txBody>
+          <a:bodyPr rtlCol="0" anchor="ctr"/>
+          <a:lstStyle/>
+          <a:p>
+            <a:pPr algn="ctr"/>
+          </a:p>
+        </p:txBody>
+      </p:sp>
+      <p:sp>
+        <p:nvSpPr>
+          <p:cNvPr id="7" name="Rounded Rectangle 6"/>
+          <p:cNvSpPr/>
+          <p:nvPr/>
+        </p:nvSpPr>
+        <p:spPr>
+          <a:xfrm>
+            <a:off x="1104900" y="2724150"/>
+            <a:ext cx="95250" cy="95250"/>
+          </a:xfrm>
+          <a:prstGeom prst="roundRect">
+            <a:avLst>
+              <a:gd name="adj" fmla="val 50000"/>
+            </a:avLst>
+          </a:prstGeom>
+          <a:solidFill>
+            <a:srgbClr val="F59E0B"/>
+          </a:solidFill>
+          <a:ln>
+            <a:noFill/>
+          </a:ln>
+          <a:effectLst/>
+        </p:spPr>
+        <p:style>
+          <a:lnRef idx="1">
+            <a:schemeClr val="accent1"/>
+          </a:lnRef>
+          <a:fillRef idx="3">
+            <a:schemeClr val="accent1"/>
+          </a:fillRef>
+          <a:effectRef idx="2">
+            <a:schemeClr val="accent1"/>
+          </a:effectRef>
+          <a:fontRef idx="minor">
+            <a:schemeClr val="lt1"/>
+          </a:fontRef>
+        </p:style>
+        <p:txBody>
+          <a:bodyPr rtlCol="0" anchor="ctr"/>
+          <a:lstStyle/>
+          <a:p>
+            <a:pPr algn="ctr"/>
+          </a:p>
+        </p:txBody>
+      </p:sp>
+      <p:sp>
+        <p:nvSpPr>
+          <p:cNvPr id="8" name="Rounded Rectangle 7"/>
+          <p:cNvSpPr/>
+          <p:nvPr/>
+        </p:nvSpPr>
+        <p:spPr>
+          <a:xfrm>
+            <a:off x="1276350" y="2724150"/>
+            <a:ext cx="95250" cy="95250"/>
+          </a:xfrm>
+          <a:prstGeom prst="roundRect">
+            <a:avLst>
+              <a:gd name="adj" fmla="val 50000"/>
+            </a:avLst>
+          </a:prstGeom>
+          <a:solidFill>
+            <a:srgbClr val="10B981"/>
+          </a:solidFill>
+          <a:ln>
+            <a:noFill/>
+          </a:ln>
+          <a:effectLst/>
+        </p:spPr>
+        <p:style>
+          <a:lnRef idx="1">
+            <a:schemeClr val="accent1"/>
+          </a:lnRef>
+          <a:fillRef idx="3">
+            <a:schemeClr val="accent1"/>
+          </a:fillRef>
+          <a:effectRef idx="2">
+            <a:schemeClr val="accent1"/>
+          </a:effectRef>
+          <a:fontRef idx="minor">
+            <a:schemeClr val="lt1"/>
+          </a:fontRef>
+        </p:style>
+        <p:txBody>
+          <a:bodyPr rtlCol="0" anchor="ctr"/>
+          <a:lstStyle/>
+          <a:p>
+            <a:pPr algn="ctr"/>
+          </a:p>
+        </p:txBody>
+      </p:sp>
+      <p:pic>
+        <p:nvPicPr>
+          <p:cNvPr id="9" name="Picture 8" descr="image.png"/>
+          <p:cNvPicPr>
+            <a:picLocks noChangeAspect="1"/>
+          </p:cNvPicPr>
+          <p:nvPr/>
+        </p:nvPicPr>
+        <p:blipFill>
+          <a:blip r:embed="rId2"/>
+          <a:stretch>
+            <a:fillRect/>
+          </a:stretch>
+        </p:blipFill>
+        <p:spPr>
+          <a:xfrm>
+            <a:off x="6736705" y="2666851"/>
+            <a:ext cx="219075" cy="171450"/>
+          </a:xfrm>
+          <a:prstGeom prst="rect">
+            <a:avLst/>
+          </a:prstGeom>
+        </p:spPr>
+      </p:pic>
+      <p:pic>
+        <p:nvPicPr>
+          <p:cNvPr id="10" name="Picture 9" descr="image.png"/>
+          <p:cNvPicPr>
+            <a:picLocks noChangeAspect="1"/>
+          </p:cNvPicPr>
+          <p:nvPr/>
+        </p:nvPicPr>
+        <p:blipFill>
+          <a:blip r:embed="rId3"/>
+          <a:stretch>
+            <a:fillRect/>
+          </a:stretch>
+        </p:blipFill>
+        <p:spPr>
+          <a:xfrm>
+            <a:off x="6736705" y="3419326"/>
+            <a:ext cx="171450" cy="171450"/>
+          </a:xfrm>
+          <a:prstGeom prst="rect">
+            <a:avLst/>
+          </a:prstGeom>
+        </p:spPr>
+      </p:pic>
+      <p:pic>
+        <p:nvPicPr>
+          <p:cNvPr id="11" name="Picture 10" descr="image.png"/>
+          <p:cNvPicPr>
+            <a:picLocks noChangeAspect="1"/>
+          </p:cNvPicPr>
+          <p:nvPr/>
+        </p:nvPicPr>
+        <p:blipFill>
+          <a:blip r:embed="rId4"/>
+          <a:stretch>
+            <a:fillRect/>
+          </a:stretch>
+        </p:blipFill>
+        <p:spPr>
+          <a:xfrm>
+            <a:off x="6736705" y="4000351"/>
+            <a:ext cx="171450" cy="171450"/>
+          </a:xfrm>
+          <a:prstGeom prst="rect">
+            <a:avLst/>
+          </a:prstGeom>
+        </p:spPr>
+      </p:pic>
+      <p:sp>
+        <p:nvSpPr>
+          <p:cNvPr id="12" name="TextBox 11"/>
+          <p:cNvSpPr txBox="1"/>
+          <p:nvPr/>
+        </p:nvSpPr>
+        <p:spPr>
+          <a:xfrm>
+            <a:off x="762000" y="533400"/>
+            <a:ext cx="11430000" cy="171450"/>
+          </a:xfrm>
+          <a:prstGeom prst="rect">
+            <a:avLst/>
+          </a:prstGeom>
+          <a:noFill/>
+        </p:spPr>
+        <p:txBody>
+          <a:bodyPr wrap="none" lIns="0" rIns="0" tIns="0" bIns="0" anchor="t">
+            <a:spAutoFit/>
+          </a:bodyPr>
+          <a:lstStyle/>
+          <a:p>
+            <a:pPr algn="l"/>
+            <a:r>
+              <a:rPr b="1" sz="1050" i="0" u="none">
+                <a:solidFill>
+                  <a:srgbClr val="E4002B"/>
+                </a:solidFill>
+                <a:latin typeface="Plus Jakarta Sans"/>
+              </a:rPr>
+              <a:t>FRICTIONLESS EXPERIENCE</a:t>
+            </a:r>
+          </a:p>
+        </p:txBody>
+      </p:sp>
+      <p:sp>
+        <p:nvSpPr>
+          <p:cNvPr id="13" name="TextBox 12"/>
+          <p:cNvSpPr txBox="1"/>
+          <p:nvPr/>
+        </p:nvSpPr>
+        <p:spPr>
+          <a:xfrm>
+            <a:off x="762000" y="781050"/>
+            <a:ext cx="11430000" cy="428625"/>
+          </a:xfrm>
+          <a:prstGeom prst="rect">
+            <a:avLst/>
+          </a:prstGeom>
+          <a:noFill/>
+        </p:spPr>
+        <p:txBody>
+          <a:bodyPr wrap="none" lIns="0" rIns="0" tIns="0" bIns="0" anchor="t">
+            <a:spAutoFit/>
+          </a:bodyPr>
+          <a:lstStyle/>
+          <a:p>
+            <a:pPr algn="l"/>
+            <a:r>
+              <a:rPr b="1" sz="2700" i="0" u="none">
+                <a:solidFill>
+                  <a:srgbClr val="0F172A"/>
+                </a:solidFill>
+                <a:latin typeface="Plus Jakarta Sans"/>
+              </a:rPr>
+              <a:t>Developer Workflow</a:t>
+            </a:r>
+          </a:p>
+        </p:txBody>
+      </p:sp>
+      <p:sp>
+        <p:nvSpPr>
+          <p:cNvPr id="14" name="TextBox 13"/>
+          <p:cNvSpPr txBox="1"/>
+          <p:nvPr/>
+        </p:nvSpPr>
+        <p:spPr>
+          <a:xfrm>
+            <a:off x="762000" y="6167288"/>
+            <a:ext cx="5334000" cy="152400"/>
+          </a:xfrm>
+          <a:prstGeom prst="rect">
+            <a:avLst/>
+          </a:prstGeom>
+          <a:noFill/>
+        </p:spPr>
+        <p:txBody>
+          <a:bodyPr wrap="none" lIns="0" rIns="0" tIns="0" bIns="0" anchor="t">
+            <a:spAutoFit/>
+          </a:bodyPr>
+          <a:lstStyle/>
+          <a:p>
+            <a:pPr algn="l"/>
+            <a:r>
+              <a:rPr b="0" sz="975" i="0" u="none">
+                <a:solidFill>
+                  <a:srgbClr val="64748B"/>
+                </a:solidFill>
+                <a:latin typeface="Plus Jakarta Sans"/>
+              </a:rPr>
+              <a:t>Native execution for Windows on ARM and Linux ARM64 dev environments.</a:t>
+            </a:r>
+          </a:p>
+        </p:txBody>
+      </p:sp>
+      <p:sp>
+        <p:nvSpPr>
+          <p:cNvPr id="15" name="TextBox 14"/>
+          <p:cNvSpPr txBox="1"/>
+          <p:nvPr/>
+        </p:nvSpPr>
+        <p:spPr>
+          <a:xfrm>
+            <a:off x="10439400" y="6162526"/>
+            <a:ext cx="1276350" cy="161925"/>
+          </a:xfrm>
+          <a:prstGeom prst="rect">
+            <a:avLst/>
+          </a:prstGeom>
+          <a:noFill/>
+        </p:spPr>
+        <p:txBody>
+          <a:bodyPr wrap="none" lIns="0" rIns="0" tIns="0" bIns="0" anchor="t">
+            <a:spAutoFit/>
+          </a:bodyPr>
+          <a:lstStyle/>
+          <a:p>
+            <a:pPr algn="l"/>
+            <a:r>
+              <a:rPr b="0" sz="975" i="0" u="none">
+                <a:solidFill>
+                  <a:srgbClr val="0F172A"/>
+                </a:solidFill>
+                <a:latin typeface="JetBrains Mono"/>
+              </a:rPr>
+              <a:t>06 | WORKFLOW</a:t>
+            </a:r>
+          </a:p>
+        </p:txBody>
+      </p:sp>
+      <p:sp>
+        <p:nvSpPr>
+          <p:cNvPr id="16" name="TextBox 15"/>
+          <p:cNvSpPr txBox="1"/>
+          <p:nvPr/>
+        </p:nvSpPr>
+        <p:spPr>
+          <a:xfrm>
+            <a:off x="1524000" y="2695575"/>
+            <a:ext cx="1583531" cy="152400"/>
+          </a:xfrm>
+          <a:prstGeom prst="rect">
+            <a:avLst/>
+          </a:prstGeom>
+          <a:noFill/>
+        </p:spPr>
+        <p:txBody>
+          <a:bodyPr wrap="none" lIns="0" rIns="0" tIns="0" bIns="0" anchor="t">
+            <a:spAutoFit/>
+          </a:bodyPr>
+          <a:lstStyle/>
+          <a:p>
+            <a:pPr algn="l"/>
+            <a:r>
+              <a:rPr b="0" sz="900" i="0" u="none">
+                <a:solidFill>
+                  <a:srgbClr val="94A3B8"/>
+                </a:solidFill>
+                <a:latin typeface="JetBrains Mono"/>
+              </a:rPr>
+              <a:t>snapdragon-terminal</a:t>
+            </a:r>
+          </a:p>
+        </p:txBody>
+      </p:sp>
+      <p:sp>
+        <p:nvSpPr>
+          <p:cNvPr id="17" name="TextBox 16"/>
+          <p:cNvSpPr txBox="1"/>
+          <p:nvPr/>
+        </p:nvSpPr>
+        <p:spPr>
+          <a:xfrm>
+            <a:off x="990600" y="3190875"/>
+            <a:ext cx="6468256" cy="226665"/>
+          </a:xfrm>
+          <a:prstGeom prst="rect">
+            <a:avLst/>
+          </a:prstGeom>
+          <a:noFill/>
+        </p:spPr>
+        <p:txBody>
+          <a:bodyPr wrap="none" lIns="0" rIns="0" tIns="0" bIns="0" anchor="t">
+            <a:spAutoFit/>
+          </a:bodyPr>
+          <a:lstStyle/>
+          <a:p>
+            <a:pPr algn="l">
+              <a:lnSpc>
+                <a:spcPts val="1785"/>
+              </a:lnSpc>
             </a:pPr>
             <a:r>
-              <a:t>SNAPDRAGON LOCAL REVIEW</a:t>
-            </a:r>
-          </a:p>
-        </p:txBody>
-      </p:sp>
-      <p:sp>
-        <p:nvSpPr>
-          <p:cNvPr id="3" name="TextBox 2"/>
-          <p:cNvSpPr txBox="1"/>
-          <p:nvPr/>
-        </p:nvSpPr>
-        <p:spPr>
-          <a:xfrm>
-            <a:off x="640080" y="960120"/>
-            <a:ext cx="10789920" cy="731520"/>
-          </a:xfrm>
-          <a:prstGeom prst="rect">
-            <a:avLst/>
-          </a:prstGeom>
-          <a:noFill/>
-        </p:spPr>
-        <p:txBody>
-          <a:bodyPr wrap="none">
-            <a:spAutoFit/>
-          </a:bodyPr>
-          <a:lstStyle/>
-          <a:p>
-            <a:pPr>
-              <a:defRPr sz="3400" b="1">
-                <a:solidFill>
-                  <a:srgbClr val="14203C"/>
-                </a:solidFill>
-              </a:defRPr>
+              <a:rPr b="0" sz="1050" i="0" u="none">
+                <a:solidFill>
+                  <a:srgbClr val="38BDF8"/>
+                </a:solidFill>
+                <a:latin typeface="JetBrains Mono"/>
+              </a:rPr>
+              <a:t>$ snapdragon-review check . --strict</a:t>
+            </a:r>
+          </a:p>
+        </p:txBody>
+      </p:sp>
+      <p:sp>
+        <p:nvSpPr>
+          <p:cNvPr id="18" name="TextBox 17"/>
+          <p:cNvSpPr txBox="1"/>
+          <p:nvPr/>
+        </p:nvSpPr>
+        <p:spPr>
+          <a:xfrm>
+            <a:off x="990600" y="3417540"/>
+            <a:ext cx="6468256" cy="226665"/>
+          </a:xfrm>
+          <a:prstGeom prst="rect">
+            <a:avLst/>
+          </a:prstGeom>
+          <a:noFill/>
+        </p:spPr>
+        <p:txBody>
+          <a:bodyPr wrap="none" lIns="0" rIns="0" tIns="0" bIns="0" anchor="t">
+            <a:spAutoFit/>
+          </a:bodyPr>
+          <a:lstStyle/>
+          <a:p>
+            <a:pPr algn="l">
+              <a:lnSpc>
+                <a:spcPts val="1785"/>
+              </a:lnSpc>
             </a:pPr>
             <a:r>
-              <a:t>Developer workflow</a:t>
-            </a:r>
-          </a:p>
-        </p:txBody>
-      </p:sp>
-      <p:sp>
-        <p:nvSpPr>
-          <p:cNvPr id="4" name="TextBox 3"/>
-          <p:cNvSpPr txBox="1"/>
-          <p:nvPr/>
-        </p:nvSpPr>
-        <p:spPr>
-          <a:xfrm>
-            <a:off x="914400" y="1965960"/>
-            <a:ext cx="10332720" cy="502920"/>
-          </a:xfrm>
-          <a:prstGeom prst="rect">
-            <a:avLst/>
-          </a:prstGeom>
-          <a:noFill/>
-        </p:spPr>
-        <p:txBody>
-          <a:bodyPr wrap="none">
-            <a:spAutoFit/>
-          </a:bodyPr>
-          <a:lstStyle/>
-          <a:p>
-            <a:pPr>
-              <a:defRPr sz="2200" b="0">
-                <a:solidFill>
-                  <a:srgbClr val="2D374B"/>
-                </a:solidFill>
-              </a:defRPr>
+              <a:rPr b="0" sz="1050" i="0" u="none">
+                <a:solidFill>
+                  <a:srgbClr val="64748B"/>
+                </a:solidFill>
+                <a:latin typeface="JetBrains Mono"/>
+              </a:rPr>
+              <a:t>[✓] AST parsed in 14ms (28 files)</a:t>
+            </a:r>
+          </a:p>
+        </p:txBody>
+      </p:sp>
+      <p:sp>
+        <p:nvSpPr>
+          <p:cNvPr id="19" name="TextBox 18"/>
+          <p:cNvSpPr txBox="1"/>
+          <p:nvPr/>
+        </p:nvSpPr>
+        <p:spPr>
+          <a:xfrm>
+            <a:off x="990600" y="3644205"/>
+            <a:ext cx="6468256" cy="226665"/>
+          </a:xfrm>
+          <a:prstGeom prst="rect">
+            <a:avLst/>
+          </a:prstGeom>
+          <a:noFill/>
+        </p:spPr>
+        <p:txBody>
+          <a:bodyPr wrap="none" lIns="0" rIns="0" tIns="0" bIns="0" anchor="t">
+            <a:spAutoFit/>
+          </a:bodyPr>
+          <a:lstStyle/>
+          <a:p>
+            <a:pPr algn="l">
+              <a:lnSpc>
+                <a:spcPts val="1785"/>
+              </a:lnSpc>
             </a:pPr>
             <a:r>
-              <a:t>• snapdragon-review check .</a:t>
-            </a:r>
-          </a:p>
-        </p:txBody>
-      </p:sp>
-      <p:sp>
-        <p:nvSpPr>
-          <p:cNvPr id="5" name="TextBox 4"/>
-          <p:cNvSpPr txBox="1"/>
-          <p:nvPr/>
-        </p:nvSpPr>
-        <p:spPr>
-          <a:xfrm>
-            <a:off x="914400" y="2651760"/>
-            <a:ext cx="10332720" cy="502920"/>
-          </a:xfrm>
-          <a:prstGeom prst="rect">
-            <a:avLst/>
-          </a:prstGeom>
-          <a:noFill/>
-        </p:spPr>
-        <p:txBody>
-          <a:bodyPr wrap="none">
-            <a:spAutoFit/>
-          </a:bodyPr>
-          <a:lstStyle/>
-          <a:p>
-            <a:pPr>
-              <a:defRPr sz="2200" b="0">
-                <a:solidFill>
-                  <a:srgbClr val="2D374B"/>
-                </a:solidFill>
-              </a:defRPr>
+              <a:rPr b="0" sz="1050" i="0" u="none">
+                <a:solidFill>
+                  <a:srgbClr val="64748B"/>
+                </a:solidFill>
+                <a:latin typeface="JetBrains Mono"/>
+              </a:rPr>
+              <a:t>[✓] Hexagon HTP execution provider ready</a:t>
+            </a:r>
+          </a:p>
+        </p:txBody>
+      </p:sp>
+      <p:sp>
+        <p:nvSpPr>
+          <p:cNvPr id="20" name="TextBox 19"/>
+          <p:cNvSpPr txBox="1"/>
+          <p:nvPr/>
+        </p:nvSpPr>
+        <p:spPr>
+          <a:xfrm>
+            <a:off x="990600" y="3947070"/>
+            <a:ext cx="6468256" cy="226665"/>
+          </a:xfrm>
+          <a:prstGeom prst="rect">
+            <a:avLst/>
+          </a:prstGeom>
+          <a:noFill/>
+        </p:spPr>
+        <p:txBody>
+          <a:bodyPr wrap="none" lIns="0" rIns="0" tIns="0" bIns="0" anchor="t">
+            <a:spAutoFit/>
+          </a:bodyPr>
+          <a:lstStyle/>
+          <a:p>
+            <a:pPr algn="l">
+              <a:lnSpc>
+                <a:spcPts val="1785"/>
+              </a:lnSpc>
             </a:pPr>
             <a:r>
-              <a:t>• JSON output integrates with editors and CI</a:t>
-            </a:r>
-          </a:p>
-        </p:txBody>
-      </p:sp>
-      <p:sp>
-        <p:nvSpPr>
-          <p:cNvPr id="6" name="TextBox 5"/>
-          <p:cNvSpPr txBox="1"/>
-          <p:nvPr/>
-        </p:nvSpPr>
-        <p:spPr>
-          <a:xfrm>
-            <a:off x="914400" y="3337560"/>
-            <a:ext cx="10332720" cy="502920"/>
-          </a:xfrm>
-          <a:prstGeom prst="rect">
-            <a:avLst/>
-          </a:prstGeom>
-          <a:noFill/>
-        </p:spPr>
-        <p:txBody>
-          <a:bodyPr wrap="none">
-            <a:spAutoFit/>
-          </a:bodyPr>
-          <a:lstStyle/>
-          <a:p>
-            <a:pPr>
-              <a:defRPr sz="2200" b="0">
-                <a:solidFill>
-                  <a:srgbClr val="2D374B"/>
-                </a:solidFill>
-              </a:defRPr>
+              <a:rPr b="0" sz="1050" i="0" u="none">
+                <a:solidFill>
+                  <a:srgbClr val="F87171"/>
+                </a:solidFill>
+                <a:latin typeface="JetBrains Mono"/>
+              </a:rPr>
+              <a:t>[!] Blocker: Insecure rewrite rule in vercel.json:14</a:t>
+            </a:r>
+          </a:p>
+        </p:txBody>
+      </p:sp>
+      <p:sp>
+        <p:nvSpPr>
+          <p:cNvPr id="21" name="TextBox 20"/>
+          <p:cNvSpPr txBox="1"/>
+          <p:nvPr/>
+        </p:nvSpPr>
+        <p:spPr>
+          <a:xfrm>
+            <a:off x="990600" y="4173735"/>
+            <a:ext cx="6468256" cy="226665"/>
+          </a:xfrm>
+          <a:prstGeom prst="rect">
+            <a:avLst/>
+          </a:prstGeom>
+          <a:noFill/>
+        </p:spPr>
+        <p:txBody>
+          <a:bodyPr wrap="none" lIns="0" rIns="0" tIns="0" bIns="0" anchor="t">
+            <a:spAutoFit/>
+          </a:bodyPr>
+          <a:lstStyle/>
+          <a:p>
+            <a:pPr algn="l">
+              <a:lnSpc>
+                <a:spcPts val="1785"/>
+              </a:lnSpc>
             </a:pPr>
             <a:r>
-              <a:t>• --strict turns warnings into deployment blockers</a:t>
-            </a:r>
-          </a:p>
-        </p:txBody>
-      </p:sp>
-      <p:sp>
-        <p:nvSpPr>
-          <p:cNvPr id="7" name="TextBox 6"/>
-          <p:cNvSpPr txBox="1"/>
-          <p:nvPr/>
-        </p:nvSpPr>
-        <p:spPr>
-          <a:xfrm>
-            <a:off x="914400" y="4023360"/>
-            <a:ext cx="10332720" cy="502920"/>
-          </a:xfrm>
-          <a:prstGeom prst="rect">
-            <a:avLst/>
-          </a:prstGeom>
-          <a:noFill/>
-        </p:spPr>
-        <p:txBody>
-          <a:bodyPr wrap="none">
-            <a:spAutoFit/>
-          </a:bodyPr>
-          <a:lstStyle/>
-          <a:p>
-            <a:pPr>
-              <a:defRPr sz="2200" b="0">
-                <a:solidFill>
-                  <a:srgbClr val="2D374B"/>
-                </a:solidFill>
-              </a:defRPr>
-            </a:pPr>
-            <a:r>
-              <a:t>• Pre-commit catches issues before staging or Vercel</a:t>
-            </a:r>
-          </a:p>
-        </p:txBody>
-      </p:sp>
-      <p:sp>
-        <p:nvSpPr>
-          <p:cNvPr id="8" name="TextBox 7"/>
-          <p:cNvSpPr txBox="1"/>
-          <p:nvPr/>
-        </p:nvSpPr>
-        <p:spPr>
-          <a:xfrm>
-            <a:off x="11155680" y="6172200"/>
-            <a:ext cx="457200" cy="274320"/>
-          </a:xfrm>
-          <a:prstGeom prst="rect">
-            <a:avLst/>
-          </a:prstGeom>
-          <a:noFill/>
-        </p:spPr>
-        <p:txBody>
-          <a:bodyPr wrap="none">
-            <a:spAutoFit/>
-          </a:bodyPr>
-          <a:lstStyle/>
-          <a:p>
-            <a:pPr>
-              <a:defRPr sz="1200" b="1">
-                <a:solidFill>
-                  <a:srgbClr val="646E82"/>
-                </a:solidFill>
-              </a:defRPr>
-            </a:pPr>
-            <a:r>
-              <a:t>06</a:t>
+              <a:rPr b="0" sz="1050" i="0" u="none">
+                <a:solidFill>
+                  <a:srgbClr val="4ADE80"/>
+                </a:solidFill>
+                <a:latin typeface="JetBrains Mono"/>
+              </a:rPr>
+              <a:t>[+] Fix applied locally via NPU model</a:t>
+            </a:r>
+          </a:p>
+        </p:txBody>
+      </p:sp>
+      <p:sp>
+        <p:nvSpPr>
+          <p:cNvPr id="22" name="TextBox 21"/>
+          <p:cNvSpPr txBox="1"/>
+          <p:nvPr/>
+        </p:nvSpPr>
+        <p:spPr>
+          <a:xfrm>
+            <a:off x="7108180" y="2647801"/>
+            <a:ext cx="5083819" cy="200025"/>
+          </a:xfrm>
+          <a:prstGeom prst="rect">
+            <a:avLst/>
+          </a:prstGeom>
+          <a:noFill/>
+        </p:spPr>
+        <p:txBody>
+          <a:bodyPr wrap="none" lIns="0" rIns="0" tIns="0" bIns="0" anchor="t">
+            <a:spAutoFit/>
+          </a:bodyPr>
+          <a:lstStyle/>
+          <a:p>
+            <a:pPr algn="l"/>
+            <a:r>
+              <a:rPr b="1" sz="1200" i="0" u="none">
+                <a:solidFill>
+                  <a:srgbClr val="0F172A"/>
+                </a:solidFill>
+                <a:latin typeface="Plus Jakarta Sans"/>
+              </a:rPr>
+              <a:t>Structured JSON Output</a:t>
+            </a:r>
+          </a:p>
+        </p:txBody>
+      </p:sp>
+      <p:sp>
+        <p:nvSpPr>
+          <p:cNvPr id="23" name="TextBox 22"/>
+          <p:cNvSpPr txBox="1"/>
+          <p:nvPr/>
+        </p:nvSpPr>
+        <p:spPr>
+          <a:xfrm>
+            <a:off x="7108180" y="2885926"/>
+            <a:ext cx="4417069" cy="342900"/>
+          </a:xfrm>
+          <a:prstGeom prst="rect">
+            <a:avLst/>
+          </a:prstGeom>
+          <a:noFill/>
+        </p:spPr>
+        <p:txBody>
+          <a:bodyPr wrap="square" lIns="0" rIns="0" tIns="0" bIns="0" anchor="t">
+            <a:spAutoFit/>
+          </a:bodyPr>
+          <a:lstStyle/>
+          <a:p>
+            <a:pPr algn="l"/>
+            <a:r>
+              <a:rPr b="0" sz="1050" i="0" u="none">
+                <a:solidFill>
+                  <a:srgbClr val="64748B"/>
+                </a:solidFill>
+                <a:latin typeface="Plus Jakarta Sans"/>
+              </a:rPr>
+              <a:t>Standardized payloads pipe seamlessly into VS Code, Neovim, and pre-commit hooks.</a:t>
+            </a:r>
+          </a:p>
+        </p:txBody>
+      </p:sp>
+      <p:sp>
+        <p:nvSpPr>
+          <p:cNvPr id="24" name="TextBox 23"/>
+          <p:cNvSpPr txBox="1"/>
+          <p:nvPr/>
+        </p:nvSpPr>
+        <p:spPr>
+          <a:xfrm>
+            <a:off x="7060555" y="3400276"/>
+            <a:ext cx="5131444" cy="200025"/>
+          </a:xfrm>
+          <a:prstGeom prst="rect">
+            <a:avLst/>
+          </a:prstGeom>
+          <a:noFill/>
+        </p:spPr>
+        <p:txBody>
+          <a:bodyPr wrap="none" lIns="0" rIns="0" tIns="0" bIns="0" anchor="t">
+            <a:spAutoFit/>
+          </a:bodyPr>
+          <a:lstStyle/>
+          <a:p>
+            <a:pPr algn="l"/>
+            <a:r>
+              <a:rPr b="1" sz="1200" i="0" u="none">
+                <a:solidFill>
+                  <a:srgbClr val="0F172A"/>
+                </a:solidFill>
+                <a:latin typeface="Plus Jakarta Sans"/>
+              </a:rPr>
+              <a:t>Strict Mode Enforcement</a:t>
+            </a:r>
+          </a:p>
+        </p:txBody>
+      </p:sp>
+      <p:sp>
+        <p:nvSpPr>
+          <p:cNvPr id="25" name="TextBox 24"/>
+          <p:cNvSpPr txBox="1"/>
+          <p:nvPr/>
+        </p:nvSpPr>
+        <p:spPr>
+          <a:xfrm>
+            <a:off x="7060555" y="3638401"/>
+            <a:ext cx="5131444" cy="171450"/>
+          </a:xfrm>
+          <a:prstGeom prst="rect">
+            <a:avLst/>
+          </a:prstGeom>
+          <a:noFill/>
+        </p:spPr>
+        <p:txBody>
+          <a:bodyPr wrap="none" lIns="0" rIns="0" tIns="0" bIns="0" anchor="t">
+            <a:spAutoFit/>
+          </a:bodyPr>
+          <a:lstStyle/>
+          <a:p>
+            <a:pPr algn="l"/>
+            <a:r>
+              <a:rPr b="0" sz="1050" i="0" u="none">
+                <a:solidFill>
+                  <a:srgbClr val="64748B"/>
+                </a:solidFill>
+                <a:latin typeface="Plus Jakarta Sans"/>
+              </a:rPr>
+              <a:t>Transforms soft heuristic warnings into absolute deployment blockers.</a:t>
+            </a:r>
+          </a:p>
+        </p:txBody>
+      </p:sp>
+      <p:sp>
+        <p:nvSpPr>
+          <p:cNvPr id="26" name="TextBox 25"/>
+          <p:cNvSpPr txBox="1"/>
+          <p:nvPr/>
+        </p:nvSpPr>
+        <p:spPr>
+          <a:xfrm>
+            <a:off x="7060555" y="3981301"/>
+            <a:ext cx="5131444" cy="200025"/>
+          </a:xfrm>
+          <a:prstGeom prst="rect">
+            <a:avLst/>
+          </a:prstGeom>
+          <a:noFill/>
+        </p:spPr>
+        <p:txBody>
+          <a:bodyPr wrap="none" lIns="0" rIns="0" tIns="0" bIns="0" anchor="t">
+            <a:spAutoFit/>
+          </a:bodyPr>
+          <a:lstStyle/>
+          <a:p>
+            <a:pPr algn="l"/>
+            <a:r>
+              <a:rPr b="1" sz="1200" i="0" u="none">
+                <a:solidFill>
+                  <a:srgbClr val="0F172A"/>
+                </a:solidFill>
+                <a:latin typeface="Plus Jakarta Sans"/>
+              </a:rPr>
+              <a:t>Vercel Preflight Guard</a:t>
+            </a:r>
+          </a:p>
+        </p:txBody>
+      </p:sp>
+      <p:sp>
+        <p:nvSpPr>
+          <p:cNvPr id="27" name="TextBox 26"/>
+          <p:cNvSpPr txBox="1"/>
+          <p:nvPr/>
+        </p:nvSpPr>
+        <p:spPr>
+          <a:xfrm>
+            <a:off x="7060555" y="4219426"/>
+            <a:ext cx="4464694" cy="342900"/>
+          </a:xfrm>
+          <a:prstGeom prst="rect">
+            <a:avLst/>
+          </a:prstGeom>
+          <a:noFill/>
+        </p:spPr>
+        <p:txBody>
+          <a:bodyPr wrap="square" lIns="0" rIns="0" tIns="0" bIns="0" anchor="t">
+            <a:spAutoFit/>
+          </a:bodyPr>
+          <a:lstStyle/>
+          <a:p>
+            <a:pPr algn="l"/>
+            <a:r>
+              <a:rPr b="0" sz="1050" i="0" u="none">
+                <a:solidFill>
+                  <a:srgbClr val="64748B"/>
+                </a:solidFill>
+                <a:latin typeface="Plus Jakarta Sans"/>
+              </a:rPr>
+              <a:t>Catches header misconfigurations before git push triggers preview deployments.</a:t>
             </a:r>
           </a:p>
         </p:txBody>
@@ -4613,7 +8551,7 @@
     <p:bg>
       <p:bgPr>
         <a:solidFill>
-          <a:srgbClr val="F6F8FC"/>
+          <a:srgbClr val="FFFFFF"/>
         </a:solidFill>
         <a:effectLst/>
       </p:bgPr>
@@ -4627,245 +8565,813 @@
       <p:grpSpPr/>
       <p:sp>
         <p:nvSpPr>
-          <p:cNvPr id="2" name="TextBox 1"/>
-          <p:cNvSpPr txBox="1"/>
-          <p:nvPr/>
-        </p:nvSpPr>
-        <p:spPr>
-          <a:xfrm>
-            <a:off x="640080" y="411480"/>
-            <a:ext cx="6400800" cy="274320"/>
-          </a:xfrm>
-          <a:prstGeom prst="rect">
-            <a:avLst/>
-          </a:prstGeom>
-          <a:noFill/>
-        </p:spPr>
-        <p:txBody>
-          <a:bodyPr wrap="none">
-            <a:spAutoFit/>
-          </a:bodyPr>
-          <a:lstStyle/>
-          <a:p>
-            <a:pPr>
-              <a:defRPr sz="1200" b="1">
-                <a:solidFill>
-                  <a:srgbClr val="1E6ED2"/>
-                </a:solidFill>
-              </a:defRPr>
+          <p:cNvPr id="2" name="Rounded Rectangle 1"/>
+          <p:cNvSpPr/>
+          <p:nvPr/>
+        </p:nvSpPr>
+        <p:spPr>
+          <a:xfrm>
+            <a:off x="762000" y="4505325"/>
+            <a:ext cx="10668000" cy="781050"/>
+          </a:xfrm>
+          <a:prstGeom prst="roundRect">
+            <a:avLst>
+              <a:gd name="adj" fmla="val 12195"/>
+            </a:avLst>
+          </a:prstGeom>
+          <a:solidFill>
+            <a:srgbClr val="F1F5F9"/>
+          </a:solidFill>
+          <a:ln>
+            <a:noFill/>
+          </a:ln>
+          <a:effectLst/>
+        </p:spPr>
+        <p:style>
+          <a:lnRef idx="1">
+            <a:schemeClr val="accent1"/>
+          </a:lnRef>
+          <a:fillRef idx="3">
+            <a:schemeClr val="accent1"/>
+          </a:fillRef>
+          <a:effectRef idx="2">
+            <a:schemeClr val="accent1"/>
+          </a:effectRef>
+          <a:fontRef idx="minor">
+            <a:schemeClr val="lt1"/>
+          </a:fontRef>
+        </p:style>
+        <p:txBody>
+          <a:bodyPr rtlCol="0" anchor="ctr"/>
+          <a:lstStyle/>
+          <a:p>
+            <a:pPr algn="ctr"/>
+          </a:p>
+        </p:txBody>
+      </p:sp>
+      <p:sp>
+        <p:nvSpPr>
+          <p:cNvPr id="3" name="Rectangle 2"/>
+          <p:cNvSpPr/>
+          <p:nvPr/>
+        </p:nvSpPr>
+        <p:spPr>
+          <a:xfrm>
+            <a:off x="762000" y="6000750"/>
+            <a:ext cx="10668000" cy="323850"/>
+          </a:xfrm>
+          <a:prstGeom prst="rect">
+            <a:avLst/>
+          </a:prstGeom>
+          <a:noFill/>
+          <a:ln>
+            <a:noFill/>
+          </a:ln>
+          <a:effectLst/>
+        </p:spPr>
+        <p:style>
+          <a:lnRef idx="1">
+            <a:schemeClr val="accent1"/>
+          </a:lnRef>
+          <a:fillRef idx="3">
+            <a:schemeClr val="accent1"/>
+          </a:fillRef>
+          <a:effectRef idx="2">
+            <a:schemeClr val="accent1"/>
+          </a:effectRef>
+          <a:fontRef idx="minor">
+            <a:schemeClr val="lt1"/>
+          </a:fontRef>
+        </p:style>
+        <p:txBody>
+          <a:bodyPr rtlCol="0" anchor="ctr"/>
+          <a:lstStyle/>
+          <a:p>
+            <a:pPr algn="ctr"/>
+          </a:p>
+        </p:txBody>
+      </p:sp>
+      <p:sp>
+        <p:nvSpPr>
+          <p:cNvPr id="4" name="Rounded Rectangle 3"/>
+          <p:cNvSpPr/>
+          <p:nvPr/>
+        </p:nvSpPr>
+        <p:spPr>
+          <a:xfrm>
+            <a:off x="762000" y="1924050"/>
+            <a:ext cx="3403550" cy="1866900"/>
+          </a:xfrm>
+          <a:prstGeom prst="roundRect">
+            <a:avLst>
+              <a:gd name="adj" fmla="val 6122"/>
+            </a:avLst>
+          </a:prstGeom>
+          <a:solidFill>
+            <a:srgbClr val="F8FAFC"/>
+          </a:solidFill>
+          <a:ln w="9525">
+            <a:solidFill>
+              <a:srgbClr val="E2E8F0"/>
+            </a:solidFill>
+          </a:ln>
+          <a:effectLst/>
+        </p:spPr>
+        <p:style>
+          <a:lnRef idx="1">
+            <a:schemeClr val="accent1"/>
+          </a:lnRef>
+          <a:fillRef idx="3">
+            <a:schemeClr val="accent1"/>
+          </a:fillRef>
+          <a:effectRef idx="2">
+            <a:schemeClr val="accent1"/>
+          </a:effectRef>
+          <a:fontRef idx="minor">
+            <a:schemeClr val="lt1"/>
+          </a:fontRef>
+        </p:style>
+        <p:txBody>
+          <a:bodyPr rtlCol="0" anchor="ctr"/>
+          <a:lstStyle/>
+          <a:p>
+            <a:pPr algn="ctr"/>
+          </a:p>
+        </p:txBody>
+      </p:sp>
+      <p:sp>
+        <p:nvSpPr>
+          <p:cNvPr id="5" name="Rounded Rectangle 4"/>
+          <p:cNvSpPr/>
+          <p:nvPr/>
+        </p:nvSpPr>
+        <p:spPr>
+          <a:xfrm>
+            <a:off x="4394150" y="1924050"/>
+            <a:ext cx="3403550" cy="1866900"/>
+          </a:xfrm>
+          <a:prstGeom prst="roundRect">
+            <a:avLst>
+              <a:gd name="adj" fmla="val 6122"/>
+            </a:avLst>
+          </a:prstGeom>
+          <a:solidFill>
+            <a:srgbClr val="F8FAFC"/>
+          </a:solidFill>
+          <a:ln w="9525">
+            <a:solidFill>
+              <a:srgbClr val="E2E8F0"/>
+            </a:solidFill>
+          </a:ln>
+          <a:effectLst/>
+        </p:spPr>
+        <p:style>
+          <a:lnRef idx="1">
+            <a:schemeClr val="accent1"/>
+          </a:lnRef>
+          <a:fillRef idx="3">
+            <a:schemeClr val="accent1"/>
+          </a:fillRef>
+          <a:effectRef idx="2">
+            <a:schemeClr val="accent1"/>
+          </a:effectRef>
+          <a:fontRef idx="minor">
+            <a:schemeClr val="lt1"/>
+          </a:fontRef>
+        </p:style>
+        <p:txBody>
+          <a:bodyPr rtlCol="0" anchor="ctr"/>
+          <a:lstStyle/>
+          <a:p>
+            <a:pPr algn="ctr"/>
+          </a:p>
+        </p:txBody>
+      </p:sp>
+      <p:sp>
+        <p:nvSpPr>
+          <p:cNvPr id="6" name="Rounded Rectangle 5"/>
+          <p:cNvSpPr/>
+          <p:nvPr/>
+        </p:nvSpPr>
+        <p:spPr>
+          <a:xfrm>
+            <a:off x="8026300" y="1924050"/>
+            <a:ext cx="3403550" cy="1866900"/>
+          </a:xfrm>
+          <a:prstGeom prst="roundRect">
+            <a:avLst>
+              <a:gd name="adj" fmla="val 6122"/>
+            </a:avLst>
+          </a:prstGeom>
+          <a:solidFill>
+            <a:srgbClr val="F8FAFC"/>
+          </a:solidFill>
+          <a:ln w="9525">
+            <a:solidFill>
+              <a:srgbClr val="E2E8F0"/>
+            </a:solidFill>
+          </a:ln>
+          <a:effectLst/>
+        </p:spPr>
+        <p:style>
+          <a:lnRef idx="1">
+            <a:schemeClr val="accent1"/>
+          </a:lnRef>
+          <a:fillRef idx="3">
+            <a:schemeClr val="accent1"/>
+          </a:fillRef>
+          <a:effectRef idx="2">
+            <a:schemeClr val="accent1"/>
+          </a:effectRef>
+          <a:fontRef idx="minor">
+            <a:schemeClr val="lt1"/>
+          </a:fontRef>
+        </p:style>
+        <p:txBody>
+          <a:bodyPr rtlCol="0" anchor="ctr"/>
+          <a:lstStyle/>
+          <a:p>
+            <a:pPr algn="ctr"/>
+          </a:p>
+        </p:txBody>
+      </p:sp>
+      <p:sp>
+        <p:nvSpPr>
+          <p:cNvPr id="7" name="Rectangle 6"/>
+          <p:cNvSpPr/>
+          <p:nvPr/>
+        </p:nvSpPr>
+        <p:spPr>
+          <a:xfrm>
+            <a:off x="762000" y="6000750"/>
+            <a:ext cx="10668000" cy="9525"/>
+          </a:xfrm>
+          <a:prstGeom prst="rect">
+            <a:avLst/>
+          </a:prstGeom>
+          <a:solidFill>
+            <a:srgbClr val="E2E8F0"/>
+          </a:solidFill>
+          <a:ln>
+            <a:noFill/>
+          </a:ln>
+          <a:effectLst/>
+        </p:spPr>
+        <p:style>
+          <a:lnRef idx="1">
+            <a:schemeClr val="accent1"/>
+          </a:lnRef>
+          <a:fillRef idx="3">
+            <a:schemeClr val="accent1"/>
+          </a:fillRef>
+          <a:effectRef idx="2">
+            <a:schemeClr val="accent1"/>
+          </a:effectRef>
+          <a:fontRef idx="minor">
+            <a:schemeClr val="lt1"/>
+          </a:fontRef>
+        </p:style>
+        <p:txBody>
+          <a:bodyPr rtlCol="0" anchor="ctr"/>
+          <a:lstStyle/>
+          <a:p>
+            <a:pPr algn="ctr"/>
+          </a:p>
+        </p:txBody>
+      </p:sp>
+      <p:sp>
+        <p:nvSpPr>
+          <p:cNvPr id="8" name="TextBox 7"/>
+          <p:cNvSpPr txBox="1"/>
+          <p:nvPr/>
+        </p:nvSpPr>
+        <p:spPr>
+          <a:xfrm>
+            <a:off x="762000" y="533400"/>
+            <a:ext cx="11430000" cy="171450"/>
+          </a:xfrm>
+          <a:prstGeom prst="rect">
+            <a:avLst/>
+          </a:prstGeom>
+          <a:noFill/>
+        </p:spPr>
+        <p:txBody>
+          <a:bodyPr wrap="none" lIns="0" rIns="0" tIns="0" bIns="0" anchor="t">
+            <a:spAutoFit/>
+          </a:bodyPr>
+          <a:lstStyle/>
+          <a:p>
+            <a:pPr algn="l"/>
+            <a:r>
+              <a:rPr b="1" sz="1050" i="0" u="none">
+                <a:solidFill>
+                  <a:srgbClr val="E4002B"/>
+                </a:solidFill>
+                <a:latin typeface="Plus Jakarta Sans"/>
+              </a:rPr>
+              <a:t>EMPIRICAL VALIDATION</a:t>
+            </a:r>
+          </a:p>
+        </p:txBody>
+      </p:sp>
+      <p:sp>
+        <p:nvSpPr>
+          <p:cNvPr id="9" name="TextBox 8"/>
+          <p:cNvSpPr txBox="1"/>
+          <p:nvPr/>
+        </p:nvSpPr>
+        <p:spPr>
+          <a:xfrm>
+            <a:off x="762000" y="781050"/>
+            <a:ext cx="11430000" cy="428625"/>
+          </a:xfrm>
+          <a:prstGeom prst="rect">
+            <a:avLst/>
+          </a:prstGeom>
+          <a:noFill/>
+        </p:spPr>
+        <p:txBody>
+          <a:bodyPr wrap="none" lIns="0" rIns="0" tIns="0" bIns="0" anchor="t">
+            <a:spAutoFit/>
+          </a:bodyPr>
+          <a:lstStyle/>
+          <a:p>
+            <a:pPr algn="l"/>
+            <a:r>
+              <a:rPr b="1" sz="2700" i="0" u="none">
+                <a:solidFill>
+                  <a:srgbClr val="0F172A"/>
+                </a:solidFill>
+                <a:latin typeface="Plus Jakarta Sans"/>
+              </a:rPr>
+              <a:t>Demo &amp; Live Measurement</a:t>
+            </a:r>
+          </a:p>
+        </p:txBody>
+      </p:sp>
+      <p:sp>
+        <p:nvSpPr>
+          <p:cNvPr id="10" name="TextBox 9"/>
+          <p:cNvSpPr txBox="1"/>
+          <p:nvPr/>
+        </p:nvSpPr>
+        <p:spPr>
+          <a:xfrm>
+            <a:off x="990600" y="4695825"/>
+            <a:ext cx="11201400" cy="171450"/>
+          </a:xfrm>
+          <a:prstGeom prst="rect">
+            <a:avLst/>
+          </a:prstGeom>
+          <a:noFill/>
+        </p:spPr>
+        <p:txBody>
+          <a:bodyPr wrap="none" lIns="0" rIns="0" tIns="0" bIns="0" anchor="t">
+            <a:spAutoFit/>
+          </a:bodyPr>
+          <a:lstStyle/>
+          <a:p>
+            <a:pPr algn="l"/>
+            <a:r>
+              <a:rPr b="1" sz="1050" i="0" u="none">
+                <a:solidFill>
+                  <a:srgbClr val="0F172A"/>
+                </a:solidFill>
+                <a:latin typeface="Plus Jakarta Sans"/>
+              </a:rPr>
+              <a:t>Live Test Scenario: Injected API Token + Malformed Vercel Rewrite</a:t>
+            </a:r>
+          </a:p>
+        </p:txBody>
+      </p:sp>
+      <p:sp>
+        <p:nvSpPr>
+          <p:cNvPr id="11" name="TextBox 10"/>
+          <p:cNvSpPr txBox="1"/>
+          <p:nvPr/>
+        </p:nvSpPr>
+        <p:spPr>
+          <a:xfrm>
+            <a:off x="990600" y="4924425"/>
+            <a:ext cx="11201400" cy="171450"/>
+          </a:xfrm>
+          <a:prstGeom prst="rect">
+            <a:avLst/>
+          </a:prstGeom>
+          <a:noFill/>
+        </p:spPr>
+        <p:txBody>
+          <a:bodyPr wrap="none" lIns="0" rIns="0" tIns="0" bIns="0" anchor="t">
+            <a:spAutoFit/>
+          </a:bodyPr>
+          <a:lstStyle/>
+          <a:p>
+            <a:pPr algn="l"/>
+            <a:r>
+              <a:rPr b="0" sz="1050" i="0" u="none">
+                <a:solidFill>
+                  <a:srgbClr val="475569"/>
+                </a:solidFill>
+                <a:latin typeface="Plus Jakarta Sans"/>
+              </a:rPr>
+              <a:t>Simultaneous build tests confirm full compiler throughput with zero dropped frames or thermal throttling.</a:t>
+            </a:r>
+          </a:p>
+        </p:txBody>
+      </p:sp>
+      <p:sp>
+        <p:nvSpPr>
+          <p:cNvPr id="12" name="TextBox 11"/>
+          <p:cNvSpPr txBox="1"/>
+          <p:nvPr/>
+        </p:nvSpPr>
+        <p:spPr>
+          <a:xfrm>
+            <a:off x="762000" y="6167437"/>
+            <a:ext cx="5464968" cy="152400"/>
+          </a:xfrm>
+          <a:prstGeom prst="rect">
+            <a:avLst/>
+          </a:prstGeom>
+          <a:noFill/>
+        </p:spPr>
+        <p:txBody>
+          <a:bodyPr wrap="none" lIns="0" rIns="0" tIns="0" bIns="0" anchor="t">
+            <a:spAutoFit/>
+          </a:bodyPr>
+          <a:lstStyle/>
+          <a:p>
+            <a:pPr algn="l"/>
+            <a:r>
+              <a:rPr b="0" sz="975" i="0" u="none">
+                <a:solidFill>
+                  <a:srgbClr val="64748B"/>
+                </a:solidFill>
+                <a:latin typeface="Plus Jakarta Sans"/>
+              </a:rPr>
+              <a:t>Benchmarked on Qualcomm Snapdragon X Elite (ARM64 reference system).</a:t>
+            </a:r>
+          </a:p>
+        </p:txBody>
+      </p:sp>
+      <p:sp>
+        <p:nvSpPr>
+          <p:cNvPr id="13" name="TextBox 12"/>
+          <p:cNvSpPr txBox="1"/>
+          <p:nvPr/>
+        </p:nvSpPr>
+        <p:spPr>
+          <a:xfrm>
+            <a:off x="10363200" y="6162675"/>
+            <a:ext cx="1352550" cy="161925"/>
+          </a:xfrm>
+          <a:prstGeom prst="rect">
+            <a:avLst/>
+          </a:prstGeom>
+          <a:noFill/>
+        </p:spPr>
+        <p:txBody>
+          <a:bodyPr wrap="none" lIns="0" rIns="0" tIns="0" bIns="0" anchor="t">
+            <a:spAutoFit/>
+          </a:bodyPr>
+          <a:lstStyle/>
+          <a:p>
+            <a:pPr algn="l"/>
+            <a:r>
+              <a:rPr b="0" sz="975" i="0" u="none">
+                <a:solidFill>
+                  <a:srgbClr val="0F172A"/>
+                </a:solidFill>
+                <a:latin typeface="JetBrains Mono"/>
+              </a:rPr>
+              <a:t>07 | BENCHMARK</a:t>
+            </a:r>
+          </a:p>
+        </p:txBody>
+      </p:sp>
+      <p:sp>
+        <p:nvSpPr>
+          <p:cNvPr id="14" name="TextBox 13"/>
+          <p:cNvSpPr txBox="1"/>
+          <p:nvPr/>
+        </p:nvSpPr>
+        <p:spPr>
+          <a:xfrm>
+            <a:off x="681837" y="2238375"/>
+            <a:ext cx="3563875" cy="171450"/>
+          </a:xfrm>
+          <a:prstGeom prst="rect">
+            <a:avLst/>
+          </a:prstGeom>
+          <a:noFill/>
+        </p:spPr>
+        <p:txBody>
+          <a:bodyPr wrap="none" lIns="0" rIns="0" tIns="0" bIns="0" anchor="t">
+            <a:spAutoFit/>
+          </a:bodyPr>
+          <a:lstStyle/>
+          <a:p>
+            <a:pPr algn="ctr"/>
+            <a:r>
+              <a:rPr b="1" sz="1050" i="0" u="none">
+                <a:solidFill>
+                  <a:srgbClr val="64748B"/>
+                </a:solidFill>
+                <a:latin typeface="Plus Jakarta Sans"/>
+              </a:rPr>
+              <a:t>REVIEW LATENCY</a:t>
+            </a:r>
+          </a:p>
+        </p:txBody>
+      </p:sp>
+      <p:sp>
+        <p:nvSpPr>
+          <p:cNvPr id="15" name="TextBox 14"/>
+          <p:cNvSpPr txBox="1"/>
+          <p:nvPr/>
+        </p:nvSpPr>
+        <p:spPr>
+          <a:xfrm>
+            <a:off x="681837" y="2524125"/>
+            <a:ext cx="3563875" cy="495300"/>
+          </a:xfrm>
+          <a:prstGeom prst="rect">
+            <a:avLst/>
+          </a:prstGeom>
+          <a:noFill/>
+        </p:spPr>
+        <p:txBody>
+          <a:bodyPr wrap="none" lIns="0" rIns="0" tIns="0" bIns="0" anchor="t">
+            <a:spAutoFit/>
+          </a:bodyPr>
+          <a:lstStyle/>
+          <a:p>
+            <a:pPr algn="ctr">
+              <a:lnSpc>
+                <a:spcPts val="3900"/>
+              </a:lnSpc>
             </a:pPr>
             <a:r>
-              <a:t>SNAPDRAGON LOCAL REVIEW</a:t>
-            </a:r>
-          </a:p>
-        </p:txBody>
-      </p:sp>
-      <p:sp>
-        <p:nvSpPr>
-          <p:cNvPr id="3" name="TextBox 2"/>
-          <p:cNvSpPr txBox="1"/>
-          <p:nvPr/>
-        </p:nvSpPr>
-        <p:spPr>
-          <a:xfrm>
-            <a:off x="640080" y="960120"/>
-            <a:ext cx="10789920" cy="731520"/>
-          </a:xfrm>
-          <a:prstGeom prst="rect">
-            <a:avLst/>
-          </a:prstGeom>
-          <a:noFill/>
-        </p:spPr>
-        <p:txBody>
-          <a:bodyPr wrap="none">
-            <a:spAutoFit/>
-          </a:bodyPr>
-          <a:lstStyle/>
-          <a:p>
-            <a:pPr>
-              <a:defRPr sz="3400" b="1">
-                <a:solidFill>
-                  <a:srgbClr val="14203C"/>
-                </a:solidFill>
-              </a:defRPr>
+              <a:rPr b="1" sz="3900" i="0" u="none">
+                <a:solidFill>
+                  <a:srgbClr val="E4002B"/>
+                </a:solidFill>
+                <a:latin typeface="Plus Jakarta Sans"/>
+              </a:rPr>
+              <a:t>&lt;180ms</a:t>
+            </a:r>
+          </a:p>
+        </p:txBody>
+      </p:sp>
+      <p:sp>
+        <p:nvSpPr>
+          <p:cNvPr id="16" name="TextBox 15"/>
+          <p:cNvSpPr txBox="1"/>
+          <p:nvPr/>
+        </p:nvSpPr>
+        <p:spPr>
+          <a:xfrm>
+            <a:off x="681837" y="3133725"/>
+            <a:ext cx="3563875" cy="342900"/>
+          </a:xfrm>
+          <a:prstGeom prst="rect">
+            <a:avLst/>
+          </a:prstGeom>
+          <a:noFill/>
+        </p:spPr>
+        <p:txBody>
+          <a:bodyPr wrap="square" lIns="0" rIns="0" tIns="0" bIns="0" anchor="t">
+            <a:spAutoFit/>
+          </a:bodyPr>
+          <a:lstStyle/>
+          <a:p>
+            <a:pPr algn="ctr"/>
+            <a:r>
+              <a:rPr b="0" sz="1050" i="0" u="none">
+                <a:solidFill>
+                  <a:srgbClr val="475569"/>
+                </a:solidFill>
+                <a:latin typeface="Plus Jakarta Sans"/>
+              </a:rPr>
+              <a:t>Instant deterministic check &amp; on-device triage</a:t>
+            </a:r>
+          </a:p>
+        </p:txBody>
+      </p:sp>
+      <p:sp>
+        <p:nvSpPr>
+          <p:cNvPr id="17" name="TextBox 16"/>
+          <p:cNvSpPr txBox="1"/>
+          <p:nvPr/>
+        </p:nvSpPr>
+        <p:spPr>
+          <a:xfrm>
+            <a:off x="4313987" y="2238375"/>
+            <a:ext cx="3563875" cy="171450"/>
+          </a:xfrm>
+          <a:prstGeom prst="rect">
+            <a:avLst/>
+          </a:prstGeom>
+          <a:noFill/>
+        </p:spPr>
+        <p:txBody>
+          <a:bodyPr wrap="none" lIns="0" rIns="0" tIns="0" bIns="0" anchor="t">
+            <a:spAutoFit/>
+          </a:bodyPr>
+          <a:lstStyle/>
+          <a:p>
+            <a:pPr algn="ctr"/>
+            <a:r>
+              <a:rPr b="1" sz="1050" i="0" u="none">
+                <a:solidFill>
+                  <a:srgbClr val="64748B"/>
+                </a:solidFill>
+                <a:latin typeface="Plus Jakarta Sans"/>
+              </a:rPr>
+              <a:t>CPU USAGE DURING REVIEW</a:t>
+            </a:r>
+          </a:p>
+        </p:txBody>
+      </p:sp>
+      <p:sp>
+        <p:nvSpPr>
+          <p:cNvPr id="18" name="TextBox 17"/>
+          <p:cNvSpPr txBox="1"/>
+          <p:nvPr/>
+        </p:nvSpPr>
+        <p:spPr>
+          <a:xfrm>
+            <a:off x="4313987" y="2524125"/>
+            <a:ext cx="3563875" cy="495300"/>
+          </a:xfrm>
+          <a:prstGeom prst="rect">
+            <a:avLst/>
+          </a:prstGeom>
+          <a:noFill/>
+        </p:spPr>
+        <p:txBody>
+          <a:bodyPr wrap="none" lIns="0" rIns="0" tIns="0" bIns="0" anchor="t">
+            <a:spAutoFit/>
+          </a:bodyPr>
+          <a:lstStyle/>
+          <a:p>
+            <a:pPr algn="ctr">
+              <a:lnSpc>
+                <a:spcPts val="3900"/>
+              </a:lnSpc>
             </a:pPr>
             <a:r>
-              <a:t>Demo and measurement</a:t>
-            </a:r>
-          </a:p>
-        </p:txBody>
-      </p:sp>
-      <p:sp>
-        <p:nvSpPr>
-          <p:cNvPr id="4" name="TextBox 3"/>
-          <p:cNvSpPr txBox="1"/>
-          <p:nvPr/>
-        </p:nvSpPr>
-        <p:spPr>
-          <a:xfrm>
-            <a:off x="914400" y="1965960"/>
-            <a:ext cx="10332720" cy="502920"/>
-          </a:xfrm>
-          <a:prstGeom prst="rect">
-            <a:avLst/>
-          </a:prstGeom>
-          <a:noFill/>
-        </p:spPr>
-        <p:txBody>
-          <a:bodyPr wrap="none">
-            <a:spAutoFit/>
-          </a:bodyPr>
-          <a:lstStyle/>
-          <a:p>
-            <a:pPr>
-              <a:defRPr sz="2200" b="0">
-                <a:solidFill>
-                  <a:srgbClr val="2D374B"/>
-                </a:solidFill>
-              </a:defRPr>
+              <a:rPr b="1" sz="3900" i="0" u="none">
+                <a:solidFill>
+                  <a:srgbClr val="0F172A"/>
+                </a:solidFill>
+                <a:latin typeface="Plus Jakarta Sans"/>
+              </a:rPr>
+              <a:t>&lt;2%</a:t>
+            </a:r>
+          </a:p>
+        </p:txBody>
+      </p:sp>
+      <p:sp>
+        <p:nvSpPr>
+          <p:cNvPr id="19" name="TextBox 18"/>
+          <p:cNvSpPr txBox="1"/>
+          <p:nvPr/>
+        </p:nvSpPr>
+        <p:spPr>
+          <a:xfrm>
+            <a:off x="4313987" y="3133725"/>
+            <a:ext cx="3563875" cy="342900"/>
+          </a:xfrm>
+          <a:prstGeom prst="rect">
+            <a:avLst/>
+          </a:prstGeom>
+          <a:noFill/>
+        </p:spPr>
+        <p:txBody>
+          <a:bodyPr wrap="square" lIns="0" rIns="0" tIns="0" bIns="0" anchor="t">
+            <a:spAutoFit/>
+          </a:bodyPr>
+          <a:lstStyle/>
+          <a:p>
+            <a:pPr algn="ctr"/>
+            <a:r>
+              <a:rPr b="0" sz="1050" i="0" u="none">
+                <a:solidFill>
+                  <a:srgbClr val="475569"/>
+                </a:solidFill>
+                <a:latin typeface="Plus Jakarta Sans"/>
+              </a:rPr>
+              <a:t>Workload completely offloaded to Hexagon NPU</a:t>
+            </a:r>
+          </a:p>
+        </p:txBody>
+      </p:sp>
+      <p:sp>
+        <p:nvSpPr>
+          <p:cNvPr id="20" name="TextBox 19"/>
+          <p:cNvSpPr txBox="1"/>
+          <p:nvPr/>
+        </p:nvSpPr>
+        <p:spPr>
+          <a:xfrm>
+            <a:off x="7946138" y="2238375"/>
+            <a:ext cx="3563875" cy="171450"/>
+          </a:xfrm>
+          <a:prstGeom prst="rect">
+            <a:avLst/>
+          </a:prstGeom>
+          <a:noFill/>
+        </p:spPr>
+        <p:txBody>
+          <a:bodyPr wrap="none" lIns="0" rIns="0" tIns="0" bIns="0" anchor="t">
+            <a:spAutoFit/>
+          </a:bodyPr>
+          <a:lstStyle/>
+          <a:p>
+            <a:pPr algn="ctr"/>
+            <a:r>
+              <a:rPr b="1" sz="1050" i="0" u="none">
+                <a:solidFill>
+                  <a:srgbClr val="64748B"/>
+                </a:solidFill>
+                <a:latin typeface="Plus Jakarta Sans"/>
+              </a:rPr>
+              <a:t>ARM64 NATIVE PROVIDER</a:t>
+            </a:r>
+          </a:p>
+        </p:txBody>
+      </p:sp>
+      <p:sp>
+        <p:nvSpPr>
+          <p:cNvPr id="21" name="TextBox 20"/>
+          <p:cNvSpPr txBox="1"/>
+          <p:nvPr/>
+        </p:nvSpPr>
+        <p:spPr>
+          <a:xfrm>
+            <a:off x="7946138" y="2524125"/>
+            <a:ext cx="3563875" cy="495300"/>
+          </a:xfrm>
+          <a:prstGeom prst="rect">
+            <a:avLst/>
+          </a:prstGeom>
+          <a:noFill/>
+        </p:spPr>
+        <p:txBody>
+          <a:bodyPr wrap="none" lIns="0" rIns="0" tIns="0" bIns="0" anchor="t">
+            <a:spAutoFit/>
+          </a:bodyPr>
+          <a:lstStyle/>
+          <a:p>
+            <a:pPr algn="ctr">
+              <a:lnSpc>
+                <a:spcPts val="3900"/>
+              </a:lnSpc>
             </a:pPr>
             <a:r>
-              <a:t>• Inject a token and insecure Vercel rewrite</a:t>
-            </a:r>
-          </a:p>
-        </p:txBody>
-      </p:sp>
-      <p:sp>
-        <p:nvSpPr>
-          <p:cNvPr id="5" name="TextBox 4"/>
-          <p:cNvSpPr txBox="1"/>
-          <p:nvPr/>
-        </p:nvSpPr>
-        <p:spPr>
-          <a:xfrm>
-            <a:off x="914400" y="2651760"/>
-            <a:ext cx="10332720" cy="502920"/>
-          </a:xfrm>
-          <a:prstGeom prst="rect">
-            <a:avLst/>
-          </a:prstGeom>
-          <a:noFill/>
-        </p:spPr>
-        <p:txBody>
-          <a:bodyPr wrap="none">
-            <a:spAutoFit/>
-          </a:bodyPr>
-          <a:lstStyle/>
-          <a:p>
-            <a:pPr>
-              <a:defRPr sz="2200" b="0">
-                <a:solidFill>
-                  <a:srgbClr val="2D374B"/>
-                </a:solidFill>
-              </a:defRPr>
-            </a:pPr>
-            <a:r>
-              <a:t>• Run the CLI and show structured findings</a:t>
-            </a:r>
-          </a:p>
-        </p:txBody>
-      </p:sp>
-      <p:sp>
-        <p:nvSpPr>
-          <p:cNvPr id="6" name="TextBox 5"/>
-          <p:cNvSpPr txBox="1"/>
-          <p:nvPr/>
-        </p:nvSpPr>
-        <p:spPr>
-          <a:xfrm>
-            <a:off x="914400" y="3337560"/>
-            <a:ext cx="10332720" cy="502920"/>
-          </a:xfrm>
-          <a:prstGeom prst="rect">
-            <a:avLst/>
-          </a:prstGeom>
-          <a:noFill/>
-        </p:spPr>
-        <p:txBody>
-          <a:bodyPr wrap="none">
-            <a:spAutoFit/>
-          </a:bodyPr>
-          <a:lstStyle/>
-          <a:p>
-            <a:pPr>
-              <a:defRPr sz="2200" b="0">
-                <a:solidFill>
-                  <a:srgbClr val="2D374B"/>
-                </a:solidFill>
-              </a:defRPr>
-            </a:pPr>
-            <a:r>
-              <a:t>• Show QNN provider availability on ARM64</a:t>
-            </a:r>
-          </a:p>
-        </p:txBody>
-      </p:sp>
-      <p:sp>
-        <p:nvSpPr>
-          <p:cNvPr id="7" name="TextBox 6"/>
-          <p:cNvSpPr txBox="1"/>
-          <p:nvPr/>
-        </p:nvSpPr>
-        <p:spPr>
-          <a:xfrm>
-            <a:off x="914400" y="4023360"/>
-            <a:ext cx="10332720" cy="502920"/>
-          </a:xfrm>
-          <a:prstGeom prst="rect">
-            <a:avLst/>
-          </a:prstGeom>
-          <a:noFill/>
-        </p:spPr>
-        <p:txBody>
-          <a:bodyPr wrap="none">
-            <a:spAutoFit/>
-          </a:bodyPr>
-          <a:lstStyle/>
-          <a:p>
-            <a:pPr>
-              <a:defRPr sz="2200" b="0">
-                <a:solidFill>
-                  <a:srgbClr val="2D374B"/>
-                </a:solidFill>
-              </a:defRPr>
-            </a:pPr>
-            <a:r>
-              <a:t>• Compare review latency and CPU utilization during a build</a:t>
-            </a:r>
-          </a:p>
-        </p:txBody>
-      </p:sp>
-      <p:sp>
-        <p:nvSpPr>
-          <p:cNvPr id="8" name="TextBox 7"/>
-          <p:cNvSpPr txBox="1"/>
-          <p:nvPr/>
-        </p:nvSpPr>
-        <p:spPr>
-          <a:xfrm>
-            <a:off x="11155680" y="6172200"/>
-            <a:ext cx="457200" cy="274320"/>
-          </a:xfrm>
-          <a:prstGeom prst="rect">
-            <a:avLst/>
-          </a:prstGeom>
-          <a:noFill/>
-        </p:spPr>
-        <p:txBody>
-          <a:bodyPr wrap="none">
-            <a:spAutoFit/>
-          </a:bodyPr>
-          <a:lstStyle/>
-          <a:p>
-            <a:pPr>
-              <a:defRPr sz="1200" b="1">
-                <a:solidFill>
-                  <a:srgbClr val="646E82"/>
-                </a:solidFill>
-              </a:defRPr>
-            </a:pPr>
-            <a:r>
-              <a:t>07</a:t>
+              <a:rPr b="1" sz="3900" i="0" u="none">
+                <a:solidFill>
+                  <a:srgbClr val="0F172A"/>
+                </a:solidFill>
+                <a:latin typeface="Plus Jakarta Sans"/>
+              </a:rPr>
+              <a:t>QNN</a:t>
+            </a:r>
+          </a:p>
+        </p:txBody>
+      </p:sp>
+      <p:sp>
+        <p:nvSpPr>
+          <p:cNvPr id="22" name="TextBox 21"/>
+          <p:cNvSpPr txBox="1"/>
+          <p:nvPr/>
+        </p:nvSpPr>
+        <p:spPr>
+          <a:xfrm>
+            <a:off x="7946138" y="3133725"/>
+            <a:ext cx="3563875" cy="342900"/>
+          </a:xfrm>
+          <a:prstGeom prst="rect">
+            <a:avLst/>
+          </a:prstGeom>
+          <a:noFill/>
+        </p:spPr>
+        <p:txBody>
+          <a:bodyPr wrap="square" lIns="0" rIns="0" tIns="0" bIns="0" anchor="t">
+            <a:spAutoFit/>
+          </a:bodyPr>
+          <a:lstStyle/>
+          <a:p>
+            <a:pPr algn="ctr"/>
+            <a:r>
+              <a:rPr b="0" sz="1050" i="0" u="none">
+                <a:solidFill>
+                  <a:srgbClr val="475569"/>
+                </a:solidFill>
+                <a:latin typeface="Plus Jakarta Sans"/>
+              </a:rPr>
+              <a:t>Direct hardware acceleration with zero CPU penalty</a:t>
             </a:r>
           </a:p>
         </p:txBody>
@@ -4884,7 +9390,7 @@
     <p:bg>
       <p:bgPr>
         <a:solidFill>
-          <a:srgbClr val="F6F8FC"/>
+          <a:srgbClr val="F8FAFC"/>
         </a:solidFill>
         <a:effectLst/>
       </p:bgPr>
@@ -4898,245 +9404,1030 @@
       <p:grpSpPr/>
       <p:sp>
         <p:nvSpPr>
-          <p:cNvPr id="2" name="TextBox 1"/>
-          <p:cNvSpPr txBox="1"/>
-          <p:nvPr/>
-        </p:nvSpPr>
-        <p:spPr>
-          <a:xfrm>
-            <a:off x="640080" y="411480"/>
-            <a:ext cx="6400800" cy="274320"/>
-          </a:xfrm>
-          <a:prstGeom prst="rect">
-            <a:avLst/>
-          </a:prstGeom>
-          <a:noFill/>
-        </p:spPr>
-        <p:txBody>
-          <a:bodyPr wrap="none">
-            <a:spAutoFit/>
-          </a:bodyPr>
-          <a:lstStyle/>
-          <a:p>
-            <a:pPr>
-              <a:defRPr sz="1200" b="1">
-                <a:solidFill>
-                  <a:srgbClr val="1E6ED2"/>
-                </a:solidFill>
-              </a:defRPr>
+          <p:cNvPr id="2" name="Rectangle 1"/>
+          <p:cNvSpPr/>
+          <p:nvPr/>
+        </p:nvSpPr>
+        <p:spPr>
+          <a:xfrm>
+            <a:off x="762000" y="6000750"/>
+            <a:ext cx="10668000" cy="323850"/>
+          </a:xfrm>
+          <a:prstGeom prst="rect">
+            <a:avLst/>
+          </a:prstGeom>
+          <a:noFill/>
+          <a:ln>
+            <a:noFill/>
+          </a:ln>
+          <a:effectLst/>
+        </p:spPr>
+        <p:style>
+          <a:lnRef idx="1">
+            <a:schemeClr val="accent1"/>
+          </a:lnRef>
+          <a:fillRef idx="3">
+            <a:schemeClr val="accent1"/>
+          </a:fillRef>
+          <a:effectRef idx="2">
+            <a:schemeClr val="accent1"/>
+          </a:effectRef>
+          <a:fontRef idx="minor">
+            <a:schemeClr val="lt1"/>
+          </a:fontRef>
+        </p:style>
+        <p:txBody>
+          <a:bodyPr rtlCol="0" anchor="ctr"/>
+          <a:lstStyle/>
+          <a:p>
+            <a:pPr algn="ctr"/>
+          </a:p>
+        </p:txBody>
+      </p:sp>
+      <p:sp>
+        <p:nvSpPr>
+          <p:cNvPr id="3" name="Rounded Rectangle 2"/>
+          <p:cNvSpPr/>
+          <p:nvPr/>
+        </p:nvSpPr>
+        <p:spPr>
+          <a:xfrm>
+            <a:off x="762000" y="2714625"/>
+            <a:ext cx="2524125" cy="1781175"/>
+          </a:xfrm>
+          <a:prstGeom prst="roundRect">
+            <a:avLst>
+              <a:gd name="adj" fmla="val 6417"/>
+            </a:avLst>
+          </a:prstGeom>
+          <a:solidFill>
+            <a:srgbClr val="FFFFFF"/>
+          </a:solidFill>
+          <a:ln w="38100">
+            <a:solidFill>
+              <a:srgbClr val="059669"/>
+            </a:solidFill>
+          </a:ln>
+          <a:effectLst/>
+        </p:spPr>
+        <p:style>
+          <a:lnRef idx="1">
+            <a:schemeClr val="accent1"/>
+          </a:lnRef>
+          <a:fillRef idx="3">
+            <a:schemeClr val="accent1"/>
+          </a:fillRef>
+          <a:effectRef idx="2">
+            <a:schemeClr val="accent1"/>
+          </a:effectRef>
+          <a:fontRef idx="minor">
+            <a:schemeClr val="lt1"/>
+          </a:fontRef>
+        </p:style>
+        <p:txBody>
+          <a:bodyPr rtlCol="0" anchor="ctr"/>
+          <a:lstStyle/>
+          <a:p>
+            <a:pPr algn="ctr"/>
+          </a:p>
+        </p:txBody>
+      </p:sp>
+      <p:sp>
+        <p:nvSpPr>
+          <p:cNvPr id="4" name="Rectangle 3"/>
+          <p:cNvSpPr/>
+          <p:nvPr/>
+        </p:nvSpPr>
+        <p:spPr>
+          <a:xfrm>
+            <a:off x="762000" y="2714625"/>
+            <a:ext cx="2524125" cy="38100"/>
+          </a:xfrm>
+          <a:prstGeom prst="rect">
+            <a:avLst/>
+          </a:prstGeom>
+          <a:solidFill>
+            <a:srgbClr val="059669"/>
+          </a:solidFill>
+          <a:ln>
+            <a:noFill/>
+          </a:ln>
+          <a:effectLst/>
+        </p:spPr>
+        <p:style>
+          <a:lnRef idx="1">
+            <a:schemeClr val="accent1"/>
+          </a:lnRef>
+          <a:fillRef idx="3">
+            <a:schemeClr val="accent1"/>
+          </a:fillRef>
+          <a:effectRef idx="2">
+            <a:schemeClr val="accent1"/>
+          </a:effectRef>
+          <a:fontRef idx="minor">
+            <a:schemeClr val="lt1"/>
+          </a:fontRef>
+        </p:style>
+        <p:txBody>
+          <a:bodyPr rtlCol="0" anchor="ctr"/>
+          <a:lstStyle/>
+          <a:p>
+            <a:pPr algn="ctr"/>
+          </a:p>
+        </p:txBody>
+      </p:sp>
+      <p:sp>
+        <p:nvSpPr>
+          <p:cNvPr id="5" name="Rounded Rectangle 4"/>
+          <p:cNvSpPr/>
+          <p:nvPr/>
+        </p:nvSpPr>
+        <p:spPr>
+          <a:xfrm>
+            <a:off x="3476625" y="2614612"/>
+            <a:ext cx="2524125" cy="1981200"/>
+          </a:xfrm>
+          <a:prstGeom prst="roundRect">
+            <a:avLst>
+              <a:gd name="adj" fmla="val 5769"/>
+            </a:avLst>
+          </a:prstGeom>
+          <a:solidFill>
+            <a:srgbClr val="FFFFFF"/>
+          </a:solidFill>
+          <a:ln w="38100">
+            <a:solidFill>
+              <a:srgbClr val="0F172A"/>
+            </a:solidFill>
+          </a:ln>
+          <a:effectLst/>
+        </p:spPr>
+        <p:style>
+          <a:lnRef idx="1">
+            <a:schemeClr val="accent1"/>
+          </a:lnRef>
+          <a:fillRef idx="3">
+            <a:schemeClr val="accent1"/>
+          </a:fillRef>
+          <a:effectRef idx="2">
+            <a:schemeClr val="accent1"/>
+          </a:effectRef>
+          <a:fontRef idx="minor">
+            <a:schemeClr val="lt1"/>
+          </a:fontRef>
+        </p:style>
+        <p:txBody>
+          <a:bodyPr rtlCol="0" anchor="ctr"/>
+          <a:lstStyle/>
+          <a:p>
+            <a:pPr algn="ctr"/>
+          </a:p>
+        </p:txBody>
+      </p:sp>
+      <p:sp>
+        <p:nvSpPr>
+          <p:cNvPr id="6" name="Rectangle 5"/>
+          <p:cNvSpPr/>
+          <p:nvPr/>
+        </p:nvSpPr>
+        <p:spPr>
+          <a:xfrm>
+            <a:off x="3476625" y="2614612"/>
+            <a:ext cx="2524125" cy="38100"/>
+          </a:xfrm>
+          <a:prstGeom prst="rect">
+            <a:avLst/>
+          </a:prstGeom>
+          <a:solidFill>
+            <a:srgbClr val="0F172A"/>
+          </a:solidFill>
+          <a:ln>
+            <a:noFill/>
+          </a:ln>
+          <a:effectLst/>
+        </p:spPr>
+        <p:style>
+          <a:lnRef idx="1">
+            <a:schemeClr val="accent1"/>
+          </a:lnRef>
+          <a:fillRef idx="3">
+            <a:schemeClr val="accent1"/>
+          </a:fillRef>
+          <a:effectRef idx="2">
+            <a:schemeClr val="accent1"/>
+          </a:effectRef>
+          <a:fontRef idx="minor">
+            <a:schemeClr val="lt1"/>
+          </a:fontRef>
+        </p:style>
+        <p:txBody>
+          <a:bodyPr rtlCol="0" anchor="ctr"/>
+          <a:lstStyle/>
+          <a:p>
+            <a:pPr algn="ctr"/>
+          </a:p>
+        </p:txBody>
+      </p:sp>
+      <p:sp>
+        <p:nvSpPr>
+          <p:cNvPr id="7" name="Rounded Rectangle 6"/>
+          <p:cNvSpPr/>
+          <p:nvPr/>
+        </p:nvSpPr>
+        <p:spPr>
+          <a:xfrm>
+            <a:off x="6191250" y="2714625"/>
+            <a:ext cx="2524125" cy="1781175"/>
+          </a:xfrm>
+          <a:prstGeom prst="roundRect">
+            <a:avLst>
+              <a:gd name="adj" fmla="val 6417"/>
+            </a:avLst>
+          </a:prstGeom>
+          <a:solidFill>
+            <a:srgbClr val="FFFFFF"/>
+          </a:solidFill>
+          <a:ln w="38100">
+            <a:solidFill>
+              <a:srgbClr val="E4002B"/>
+            </a:solidFill>
+          </a:ln>
+          <a:effectLst/>
+        </p:spPr>
+        <p:style>
+          <a:lnRef idx="1">
+            <a:schemeClr val="accent1"/>
+          </a:lnRef>
+          <a:fillRef idx="3">
+            <a:schemeClr val="accent1"/>
+          </a:fillRef>
+          <a:effectRef idx="2">
+            <a:schemeClr val="accent1"/>
+          </a:effectRef>
+          <a:fontRef idx="minor">
+            <a:schemeClr val="lt1"/>
+          </a:fontRef>
+        </p:style>
+        <p:txBody>
+          <a:bodyPr rtlCol="0" anchor="ctr"/>
+          <a:lstStyle/>
+          <a:p>
+            <a:pPr algn="ctr"/>
+          </a:p>
+        </p:txBody>
+      </p:sp>
+      <p:sp>
+        <p:nvSpPr>
+          <p:cNvPr id="8" name="Rectangle 7"/>
+          <p:cNvSpPr/>
+          <p:nvPr/>
+        </p:nvSpPr>
+        <p:spPr>
+          <a:xfrm>
+            <a:off x="6191250" y="2714625"/>
+            <a:ext cx="2524125" cy="38100"/>
+          </a:xfrm>
+          <a:prstGeom prst="rect">
+            <a:avLst/>
+          </a:prstGeom>
+          <a:solidFill>
+            <a:srgbClr val="E4002B"/>
+          </a:solidFill>
+          <a:ln>
+            <a:noFill/>
+          </a:ln>
+          <a:effectLst/>
+        </p:spPr>
+        <p:style>
+          <a:lnRef idx="1">
+            <a:schemeClr val="accent1"/>
+          </a:lnRef>
+          <a:fillRef idx="3">
+            <a:schemeClr val="accent1"/>
+          </a:fillRef>
+          <a:effectRef idx="2">
+            <a:schemeClr val="accent1"/>
+          </a:effectRef>
+          <a:fontRef idx="minor">
+            <a:schemeClr val="lt1"/>
+          </a:fontRef>
+        </p:style>
+        <p:txBody>
+          <a:bodyPr rtlCol="0" anchor="ctr"/>
+          <a:lstStyle/>
+          <a:p>
+            <a:pPr algn="ctr"/>
+          </a:p>
+        </p:txBody>
+      </p:sp>
+      <p:sp>
+        <p:nvSpPr>
+          <p:cNvPr id="9" name="Rounded Rectangle 8"/>
+          <p:cNvSpPr/>
+          <p:nvPr/>
+        </p:nvSpPr>
+        <p:spPr>
+          <a:xfrm>
+            <a:off x="8905875" y="2614612"/>
+            <a:ext cx="2524125" cy="1981200"/>
+          </a:xfrm>
+          <a:prstGeom prst="roundRect">
+            <a:avLst>
+              <a:gd name="adj" fmla="val 5769"/>
+            </a:avLst>
+          </a:prstGeom>
+          <a:solidFill>
+            <a:srgbClr val="FFFFFF"/>
+          </a:solidFill>
+          <a:ln w="38100">
+            <a:solidFill>
+              <a:srgbClr val="64748B"/>
+            </a:solidFill>
+          </a:ln>
+          <a:effectLst/>
+        </p:spPr>
+        <p:style>
+          <a:lnRef idx="1">
+            <a:schemeClr val="accent1"/>
+          </a:lnRef>
+          <a:fillRef idx="3">
+            <a:schemeClr val="accent1"/>
+          </a:fillRef>
+          <a:effectRef idx="2">
+            <a:schemeClr val="accent1"/>
+          </a:effectRef>
+          <a:fontRef idx="minor">
+            <a:schemeClr val="lt1"/>
+          </a:fontRef>
+        </p:style>
+        <p:txBody>
+          <a:bodyPr rtlCol="0" anchor="ctr"/>
+          <a:lstStyle/>
+          <a:p>
+            <a:pPr algn="ctr"/>
+          </a:p>
+        </p:txBody>
+      </p:sp>
+      <p:sp>
+        <p:nvSpPr>
+          <p:cNvPr id="10" name="Rectangle 9"/>
+          <p:cNvSpPr/>
+          <p:nvPr/>
+        </p:nvSpPr>
+        <p:spPr>
+          <a:xfrm>
+            <a:off x="8905875" y="2614612"/>
+            <a:ext cx="2524125" cy="38100"/>
+          </a:xfrm>
+          <a:prstGeom prst="rect">
+            <a:avLst/>
+          </a:prstGeom>
+          <a:solidFill>
+            <a:srgbClr val="64748B"/>
+          </a:solidFill>
+          <a:ln>
+            <a:noFill/>
+          </a:ln>
+          <a:effectLst/>
+        </p:spPr>
+        <p:style>
+          <a:lnRef idx="1">
+            <a:schemeClr val="accent1"/>
+          </a:lnRef>
+          <a:fillRef idx="3">
+            <a:schemeClr val="accent1"/>
+          </a:fillRef>
+          <a:effectRef idx="2">
+            <a:schemeClr val="accent1"/>
+          </a:effectRef>
+          <a:fontRef idx="minor">
+            <a:schemeClr val="lt1"/>
+          </a:fontRef>
+        </p:style>
+        <p:txBody>
+          <a:bodyPr rtlCol="0" anchor="ctr"/>
+          <a:lstStyle/>
+          <a:p>
+            <a:pPr algn="ctr"/>
+          </a:p>
+        </p:txBody>
+      </p:sp>
+      <p:sp>
+        <p:nvSpPr>
+          <p:cNvPr id="11" name="Rectangle 10"/>
+          <p:cNvSpPr/>
+          <p:nvPr/>
+        </p:nvSpPr>
+        <p:spPr>
+          <a:xfrm>
+            <a:off x="762000" y="6000750"/>
+            <a:ext cx="10668000" cy="9525"/>
+          </a:xfrm>
+          <a:prstGeom prst="rect">
+            <a:avLst/>
+          </a:prstGeom>
+          <a:solidFill>
+            <a:srgbClr val="E2E8F0"/>
+          </a:solidFill>
+          <a:ln>
+            <a:noFill/>
+          </a:ln>
+          <a:effectLst/>
+        </p:spPr>
+        <p:style>
+          <a:lnRef idx="1">
+            <a:schemeClr val="accent1"/>
+          </a:lnRef>
+          <a:fillRef idx="3">
+            <a:schemeClr val="accent1"/>
+          </a:fillRef>
+          <a:effectRef idx="2">
+            <a:schemeClr val="accent1"/>
+          </a:effectRef>
+          <a:fontRef idx="minor">
+            <a:schemeClr val="lt1"/>
+          </a:fontRef>
+        </p:style>
+        <p:txBody>
+          <a:bodyPr rtlCol="0" anchor="ctr"/>
+          <a:lstStyle/>
+          <a:p>
+            <a:pPr algn="ctr"/>
+          </a:p>
+        </p:txBody>
+      </p:sp>
+      <p:sp>
+        <p:nvSpPr>
+          <p:cNvPr id="12" name="TextBox 11"/>
+          <p:cNvSpPr txBox="1"/>
+          <p:nvPr/>
+        </p:nvSpPr>
+        <p:spPr>
+          <a:xfrm>
+            <a:off x="762000" y="533400"/>
+            <a:ext cx="11430000" cy="171450"/>
+          </a:xfrm>
+          <a:prstGeom prst="rect">
+            <a:avLst/>
+          </a:prstGeom>
+          <a:noFill/>
+        </p:spPr>
+        <p:txBody>
+          <a:bodyPr wrap="none" lIns="0" rIns="0" tIns="0" bIns="0" anchor="t">
+            <a:spAutoFit/>
+          </a:bodyPr>
+          <a:lstStyle/>
+          <a:p>
+            <a:pPr algn="l"/>
+            <a:r>
+              <a:rPr b="1" sz="1050" i="0" u="none">
+                <a:solidFill>
+                  <a:srgbClr val="E4002B"/>
+                </a:solidFill>
+                <a:latin typeface="Plus Jakarta Sans"/>
+              </a:rPr>
+              <a:t>FORWARD STRATEGY</a:t>
+            </a:r>
+          </a:p>
+        </p:txBody>
+      </p:sp>
+      <p:sp>
+        <p:nvSpPr>
+          <p:cNvPr id="13" name="TextBox 12"/>
+          <p:cNvSpPr txBox="1"/>
+          <p:nvPr/>
+        </p:nvSpPr>
+        <p:spPr>
+          <a:xfrm>
+            <a:off x="762000" y="781050"/>
+            <a:ext cx="11430000" cy="428625"/>
+          </a:xfrm>
+          <a:prstGeom prst="rect">
+            <a:avLst/>
+          </a:prstGeom>
+          <a:noFill/>
+        </p:spPr>
+        <p:txBody>
+          <a:bodyPr wrap="none" lIns="0" rIns="0" tIns="0" bIns="0" anchor="t">
+            <a:spAutoFit/>
+          </a:bodyPr>
+          <a:lstStyle/>
+          <a:p>
+            <a:pPr algn="l"/>
+            <a:r>
+              <a:rPr b="1" sz="2700" i="0" u="none">
+                <a:solidFill>
+                  <a:srgbClr val="0F172A"/>
+                </a:solidFill>
+                <a:latin typeface="Plus Jakarta Sans"/>
+              </a:rPr>
+              <a:t>Accessibility &amp; Roadmap</a:t>
+            </a:r>
+          </a:p>
+        </p:txBody>
+      </p:sp>
+      <p:sp>
+        <p:nvSpPr>
+          <p:cNvPr id="14" name="TextBox 13"/>
+          <p:cNvSpPr txBox="1"/>
+          <p:nvPr/>
+        </p:nvSpPr>
+        <p:spPr>
+          <a:xfrm>
+            <a:off x="990600" y="3019425"/>
+            <a:ext cx="2162175" cy="1171575"/>
+          </a:xfrm>
+          <a:prstGeom prst="rect">
+            <a:avLst/>
+          </a:prstGeom>
+          <a:noFill/>
+        </p:spPr>
+        <p:txBody>
+          <a:bodyPr wrap="square" lIns="0" rIns="0" tIns="0" bIns="0" anchor="t">
+            <a:spAutoFit/>
+          </a:bodyPr>
+          <a:lstStyle/>
+          <a:p>
+            <a:pPr algn="l"/>
+            <a:r>
+              <a:rPr b="1" sz="900" i="0" u="none">
+                <a:solidFill>
+                  <a:srgbClr val="059669"/>
+                </a:solidFill>
+                <a:latin typeface="Plus Jakarta Sans"/>
+              </a:rPr>
+              <a:t> Phase 1: Today </a:t>
+            </a:r>
+          </a:p>
+        </p:txBody>
+      </p:sp>
+      <p:sp>
+        <p:nvSpPr>
+          <p:cNvPr id="15" name="TextBox 14"/>
+          <p:cNvSpPr txBox="1"/>
+          <p:nvPr/>
+        </p:nvSpPr>
+        <p:spPr>
+          <a:xfrm>
+            <a:off x="3705225" y="2919412"/>
+            <a:ext cx="2162175" cy="1371600"/>
+          </a:xfrm>
+          <a:prstGeom prst="rect">
+            <a:avLst/>
+          </a:prstGeom>
+          <a:noFill/>
+        </p:spPr>
+        <p:txBody>
+          <a:bodyPr wrap="square" lIns="0" rIns="0" tIns="0" bIns="0" anchor="t">
+            <a:spAutoFit/>
+          </a:bodyPr>
+          <a:lstStyle/>
+          <a:p>
+            <a:pPr algn="l"/>
+            <a:r>
+              <a:rPr b="1" sz="900" i="0" u="none">
+                <a:solidFill>
+                  <a:srgbClr val="0F172A"/>
+                </a:solidFill>
+                <a:latin typeface="Plus Jakarta Sans"/>
+              </a:rPr>
+              <a:t> Phase 2: Fallback </a:t>
+            </a:r>
+          </a:p>
+        </p:txBody>
+      </p:sp>
+      <p:sp>
+        <p:nvSpPr>
+          <p:cNvPr id="16" name="TextBox 15"/>
+          <p:cNvSpPr txBox="1"/>
+          <p:nvPr/>
+        </p:nvSpPr>
+        <p:spPr>
+          <a:xfrm>
+            <a:off x="6419850" y="3019425"/>
+            <a:ext cx="2162175" cy="1171575"/>
+          </a:xfrm>
+          <a:prstGeom prst="rect">
+            <a:avLst/>
+          </a:prstGeom>
+          <a:noFill/>
+        </p:spPr>
+        <p:txBody>
+          <a:bodyPr wrap="square" lIns="0" rIns="0" tIns="0" bIns="0" anchor="t">
+            <a:spAutoFit/>
+          </a:bodyPr>
+          <a:lstStyle/>
+          <a:p>
+            <a:pPr algn="l"/>
+            <a:r>
+              <a:rPr b="1" sz="900" i="0" u="none">
+                <a:solidFill>
+                  <a:srgbClr val="E4002B"/>
+                </a:solidFill>
+                <a:latin typeface="Plus Jakarta Sans"/>
+              </a:rPr>
+              <a:t> Phase 3: Hardware AI </a:t>
+            </a:r>
+          </a:p>
+        </p:txBody>
+      </p:sp>
+      <p:sp>
+        <p:nvSpPr>
+          <p:cNvPr id="17" name="TextBox 16"/>
+          <p:cNvSpPr txBox="1"/>
+          <p:nvPr/>
+        </p:nvSpPr>
+        <p:spPr>
+          <a:xfrm>
+            <a:off x="9134475" y="2919412"/>
+            <a:ext cx="2162175" cy="1371600"/>
+          </a:xfrm>
+          <a:prstGeom prst="rect">
+            <a:avLst/>
+          </a:prstGeom>
+          <a:noFill/>
+        </p:spPr>
+        <p:txBody>
+          <a:bodyPr wrap="square" lIns="0" rIns="0" tIns="0" bIns="0" anchor="t">
+            <a:spAutoFit/>
+          </a:bodyPr>
+          <a:lstStyle/>
+          <a:p>
+            <a:pPr algn="l"/>
+            <a:r>
+              <a:rPr b="1" sz="900" i="0" u="none">
+                <a:solidFill>
+                  <a:srgbClr val="64748B"/>
+                </a:solidFill>
+                <a:latin typeface="Plus Jakarta Sans"/>
+              </a:rPr>
+              <a:t> Phase 4: Ecosystem </a:t>
+            </a:r>
+          </a:p>
+        </p:txBody>
+      </p:sp>
+      <p:sp>
+        <p:nvSpPr>
+          <p:cNvPr id="18" name="TextBox 17"/>
+          <p:cNvSpPr txBox="1"/>
+          <p:nvPr/>
+        </p:nvSpPr>
+        <p:spPr>
+          <a:xfrm>
+            <a:off x="762000" y="6167437"/>
+            <a:ext cx="6786562" cy="152400"/>
+          </a:xfrm>
+          <a:prstGeom prst="rect">
+            <a:avLst/>
+          </a:prstGeom>
+          <a:noFill/>
+        </p:spPr>
+        <p:txBody>
+          <a:bodyPr wrap="none" lIns="0" rIns="0" tIns="0" bIns="0" anchor="t">
+            <a:spAutoFit/>
+          </a:bodyPr>
+          <a:lstStyle/>
+          <a:p>
+            <a:pPr algn="l"/>
+            <a:r>
+              <a:rPr b="0" sz="975" i="0" u="none">
+                <a:solidFill>
+                  <a:srgbClr val="64748B"/>
+                </a:solidFill>
+                <a:latin typeface="Plus Jakarta Sans"/>
+              </a:rPr>
+              <a:t>Continuous progressive enhancement from deterministic CLI to dedicated edge intelligence.</a:t>
+            </a:r>
+          </a:p>
+        </p:txBody>
+      </p:sp>
+      <p:sp>
+        <p:nvSpPr>
+          <p:cNvPr id="19" name="TextBox 18"/>
+          <p:cNvSpPr txBox="1"/>
+          <p:nvPr/>
+        </p:nvSpPr>
+        <p:spPr>
+          <a:xfrm>
+            <a:off x="10515600" y="6162675"/>
+            <a:ext cx="1200150" cy="161925"/>
+          </a:xfrm>
+          <a:prstGeom prst="rect">
+            <a:avLst/>
+          </a:prstGeom>
+          <a:noFill/>
+        </p:spPr>
+        <p:txBody>
+          <a:bodyPr wrap="none" lIns="0" rIns="0" tIns="0" bIns="0" anchor="t">
+            <a:spAutoFit/>
+          </a:bodyPr>
+          <a:lstStyle/>
+          <a:p>
+            <a:pPr algn="l"/>
+            <a:r>
+              <a:rPr b="0" sz="975" i="0" u="none">
+                <a:solidFill>
+                  <a:srgbClr val="0F172A"/>
+                </a:solidFill>
+                <a:latin typeface="JetBrains Mono"/>
+              </a:rPr>
+              <a:t>08 | ROADMAP</a:t>
+            </a:r>
+          </a:p>
+        </p:txBody>
+      </p:sp>
+      <p:sp>
+        <p:nvSpPr>
+          <p:cNvPr id="20" name="TextBox 19"/>
+          <p:cNvSpPr txBox="1"/>
+          <p:nvPr/>
+        </p:nvSpPr>
+        <p:spPr>
+          <a:xfrm>
+            <a:off x="990600" y="3276600"/>
+            <a:ext cx="2712839" cy="219075"/>
+          </a:xfrm>
+          <a:prstGeom prst="rect">
+            <a:avLst/>
+          </a:prstGeom>
+          <a:noFill/>
+        </p:spPr>
+        <p:txBody>
+          <a:bodyPr wrap="none" lIns="0" rIns="0" tIns="0" bIns="0" anchor="t">
+            <a:spAutoFit/>
+          </a:bodyPr>
+          <a:lstStyle/>
+          <a:p>
+            <a:pPr algn="l"/>
+            <a:r>
+              <a:rPr b="1" sz="1350" i="0" u="none">
+                <a:solidFill>
+                  <a:srgbClr val="0F172A"/>
+                </a:solidFill>
+                <a:latin typeface="Plus Jakarta Sans"/>
+              </a:rPr>
+              <a:t>Zero-Dep Baseline</a:t>
+            </a:r>
+          </a:p>
+        </p:txBody>
+      </p:sp>
+      <p:sp>
+        <p:nvSpPr>
+          <p:cNvPr id="21" name="TextBox 20"/>
+          <p:cNvSpPr txBox="1"/>
+          <p:nvPr/>
+        </p:nvSpPr>
+        <p:spPr>
+          <a:xfrm>
+            <a:off x="990600" y="3590925"/>
+            <a:ext cx="2162175" cy="600075"/>
+          </a:xfrm>
+          <a:prstGeom prst="rect">
+            <a:avLst/>
+          </a:prstGeom>
+          <a:noFill/>
+        </p:spPr>
+        <p:txBody>
+          <a:bodyPr wrap="square" lIns="0" rIns="0" tIns="0" bIns="0" anchor="t">
+            <a:spAutoFit/>
+          </a:bodyPr>
+          <a:lstStyle/>
+          <a:p>
+            <a:pPr algn="l">
+              <a:lnSpc>
+                <a:spcPts val="1575"/>
+              </a:lnSpc>
             </a:pPr>
             <a:r>
-              <a:t>SNAPDRAGON LOCAL REVIEW</a:t>
-            </a:r>
-          </a:p>
-        </p:txBody>
-      </p:sp>
-      <p:sp>
-        <p:nvSpPr>
-          <p:cNvPr id="3" name="TextBox 2"/>
-          <p:cNvSpPr txBox="1"/>
-          <p:nvPr/>
-        </p:nvSpPr>
-        <p:spPr>
-          <a:xfrm>
-            <a:off x="640080" y="960120"/>
-            <a:ext cx="10789920" cy="731520"/>
-          </a:xfrm>
-          <a:prstGeom prst="rect">
-            <a:avLst/>
-          </a:prstGeom>
-          <a:noFill/>
-        </p:spPr>
-        <p:txBody>
-          <a:bodyPr wrap="none">
-            <a:spAutoFit/>
-          </a:bodyPr>
-          <a:lstStyle/>
-          <a:p>
-            <a:pPr>
-              <a:defRPr sz="3400" b="1">
-                <a:solidFill>
-                  <a:srgbClr val="14203C"/>
-                </a:solidFill>
-              </a:defRPr>
+              <a:rPr b="0" sz="1050" i="0" u="none">
+                <a:solidFill>
+                  <a:srgbClr val="64748B"/>
+                </a:solidFill>
+                <a:latin typeface="Plus Jakarta Sans"/>
+              </a:rPr>
+              <a:t>Deterministic rule engine ready immediately without any AI or cloud prerequisites.</a:t>
+            </a:r>
+          </a:p>
+        </p:txBody>
+      </p:sp>
+      <p:sp>
+        <p:nvSpPr>
+          <p:cNvPr id="22" name="TextBox 21"/>
+          <p:cNvSpPr txBox="1"/>
+          <p:nvPr/>
+        </p:nvSpPr>
+        <p:spPr>
+          <a:xfrm>
+            <a:off x="3705225" y="3176587"/>
+            <a:ext cx="2712839" cy="219075"/>
+          </a:xfrm>
+          <a:prstGeom prst="rect">
+            <a:avLst/>
+          </a:prstGeom>
+          <a:noFill/>
+        </p:spPr>
+        <p:txBody>
+          <a:bodyPr wrap="none" lIns="0" rIns="0" tIns="0" bIns="0" anchor="t">
+            <a:spAutoFit/>
+          </a:bodyPr>
+          <a:lstStyle/>
+          <a:p>
+            <a:pPr algn="l"/>
+            <a:r>
+              <a:rPr b="1" sz="1350" i="0" u="none">
+                <a:solidFill>
+                  <a:srgbClr val="0F172A"/>
+                </a:solidFill>
+                <a:latin typeface="Plus Jakarta Sans"/>
+              </a:rPr>
+              <a:t>CPU Transformers</a:t>
+            </a:r>
+          </a:p>
+        </p:txBody>
+      </p:sp>
+      <p:sp>
+        <p:nvSpPr>
+          <p:cNvPr id="23" name="TextBox 22"/>
+          <p:cNvSpPr txBox="1"/>
+          <p:nvPr/>
+        </p:nvSpPr>
+        <p:spPr>
+          <a:xfrm>
+            <a:off x="3705225" y="3490912"/>
+            <a:ext cx="2162175" cy="800100"/>
+          </a:xfrm>
+          <a:prstGeom prst="rect">
+            <a:avLst/>
+          </a:prstGeom>
+          <a:noFill/>
+        </p:spPr>
+        <p:txBody>
+          <a:bodyPr wrap="square" lIns="0" rIns="0" tIns="0" bIns="0" anchor="t">
+            <a:spAutoFit/>
+          </a:bodyPr>
+          <a:lstStyle/>
+          <a:p>
+            <a:pPr algn="l">
+              <a:lnSpc>
+                <a:spcPts val="1575"/>
+              </a:lnSpc>
             </a:pPr>
             <a:r>
-              <a:t>Accessibility and roadmap</a:t>
-            </a:r>
-          </a:p>
-        </p:txBody>
-      </p:sp>
-      <p:sp>
-        <p:nvSpPr>
-          <p:cNvPr id="4" name="TextBox 3"/>
-          <p:cNvSpPr txBox="1"/>
-          <p:nvPr/>
-        </p:nvSpPr>
-        <p:spPr>
-          <a:xfrm>
-            <a:off x="914400" y="1965960"/>
-            <a:ext cx="10332720" cy="502920"/>
-          </a:xfrm>
-          <a:prstGeom prst="rect">
-            <a:avLst/>
-          </a:prstGeom>
-          <a:noFill/>
-        </p:spPr>
-        <p:txBody>
-          <a:bodyPr wrap="none">
-            <a:spAutoFit/>
-          </a:bodyPr>
-          <a:lstStyle/>
-          <a:p>
-            <a:pPr>
-              <a:defRPr sz="2200" b="0">
-                <a:solidFill>
-                  <a:srgbClr val="2D374B"/>
-                </a:solidFill>
-              </a:defRPr>
+              <a:rPr b="0" sz="1050" i="0" u="none">
+                <a:solidFill>
+                  <a:srgbClr val="64748B"/>
+                </a:solidFill>
+                <a:latin typeface="Plus Jakarta Sans"/>
+              </a:rPr>
+              <a:t>Portable CPU compatibility layer for non-Snapdragon workstations and legacy environments.</a:t>
+            </a:r>
+          </a:p>
+        </p:txBody>
+      </p:sp>
+      <p:sp>
+        <p:nvSpPr>
+          <p:cNvPr id="24" name="TextBox 23"/>
+          <p:cNvSpPr txBox="1"/>
+          <p:nvPr/>
+        </p:nvSpPr>
+        <p:spPr>
+          <a:xfrm>
+            <a:off x="6419850" y="3276600"/>
+            <a:ext cx="2712839" cy="219075"/>
+          </a:xfrm>
+          <a:prstGeom prst="rect">
+            <a:avLst/>
+          </a:prstGeom>
+          <a:noFill/>
+        </p:spPr>
+        <p:txBody>
+          <a:bodyPr wrap="none" lIns="0" rIns="0" tIns="0" bIns="0" anchor="t">
+            <a:spAutoFit/>
+          </a:bodyPr>
+          <a:lstStyle/>
+          <a:p>
+            <a:pPr algn="l"/>
+            <a:r>
+              <a:rPr b="1" sz="1350" i="0" u="none">
+                <a:solidFill>
+                  <a:srgbClr val="0F172A"/>
+                </a:solidFill>
+                <a:latin typeface="Plus Jakarta Sans"/>
+              </a:rPr>
+              <a:t>ONNX GenAI &amp; QNN</a:t>
+            </a:r>
+          </a:p>
+        </p:txBody>
+      </p:sp>
+      <p:sp>
+        <p:nvSpPr>
+          <p:cNvPr id="25" name="TextBox 24"/>
+          <p:cNvSpPr txBox="1"/>
+          <p:nvPr/>
+        </p:nvSpPr>
+        <p:spPr>
+          <a:xfrm>
+            <a:off x="6419850" y="3590925"/>
+            <a:ext cx="2162175" cy="600075"/>
+          </a:xfrm>
+          <a:prstGeom prst="rect">
+            <a:avLst/>
+          </a:prstGeom>
+          <a:noFill/>
+        </p:spPr>
+        <p:txBody>
+          <a:bodyPr wrap="square" lIns="0" rIns="0" tIns="0" bIns="0" anchor="t">
+            <a:spAutoFit/>
+          </a:bodyPr>
+          <a:lstStyle/>
+          <a:p>
+            <a:pPr algn="l">
+              <a:lnSpc>
+                <a:spcPts val="1575"/>
+              </a:lnSpc>
             </a:pPr>
             <a:r>
-              <a:t>• Works today without AI dependencies</a:t>
-            </a:r>
-          </a:p>
-        </p:txBody>
-      </p:sp>
-      <p:sp>
-        <p:nvSpPr>
-          <p:cNvPr id="5" name="TextBox 4"/>
-          <p:cNvSpPr txBox="1"/>
-          <p:nvPr/>
-        </p:nvSpPr>
-        <p:spPr>
-          <a:xfrm>
-            <a:off x="914400" y="2651760"/>
-            <a:ext cx="10332720" cy="502920"/>
-          </a:xfrm>
-          <a:prstGeom prst="rect">
-            <a:avLst/>
-          </a:prstGeom>
-          <a:noFill/>
-        </p:spPr>
-        <p:txBody>
-          <a:bodyPr wrap="none">
-            <a:spAutoFit/>
-          </a:bodyPr>
-          <a:lstStyle/>
-          <a:p>
-            <a:pPr>
-              <a:defRPr sz="2200" b="0">
-                <a:solidFill>
-                  <a:srgbClr val="2D374B"/>
-                </a:solidFill>
-              </a:defRPr>
+              <a:rPr b="0" sz="1050" i="0" u="none">
+                <a:solidFill>
+                  <a:srgbClr val="64748B"/>
+                </a:solidFill>
+                <a:latin typeface="Plus Jakarta Sans"/>
+              </a:rPr>
+              <a:t>Direct Hexagon NPU execution provider integration for ultra-fast local code remediation.</a:t>
+            </a:r>
+          </a:p>
+        </p:txBody>
+      </p:sp>
+      <p:sp>
+        <p:nvSpPr>
+          <p:cNvPr id="26" name="TextBox 25"/>
+          <p:cNvSpPr txBox="1"/>
+          <p:nvPr/>
+        </p:nvSpPr>
+        <p:spPr>
+          <a:xfrm>
+            <a:off x="9134475" y="3176587"/>
+            <a:ext cx="2712839" cy="219075"/>
+          </a:xfrm>
+          <a:prstGeom prst="rect">
+            <a:avLst/>
+          </a:prstGeom>
+          <a:noFill/>
+        </p:spPr>
+        <p:txBody>
+          <a:bodyPr wrap="none" lIns="0" rIns="0" tIns="0" bIns="0" anchor="t">
+            <a:spAutoFit/>
+          </a:bodyPr>
+          <a:lstStyle/>
+          <a:p>
+            <a:pPr algn="l"/>
+            <a:r>
+              <a:rPr b="1" sz="1350" i="0" u="none">
+                <a:solidFill>
+                  <a:srgbClr val="0F172A"/>
+                </a:solidFill>
+                <a:latin typeface="Plus Jakarta Sans"/>
+              </a:rPr>
+              <a:t>IDE Integrations</a:t>
+            </a:r>
+          </a:p>
+        </p:txBody>
+      </p:sp>
+      <p:sp>
+        <p:nvSpPr>
+          <p:cNvPr id="27" name="TextBox 26"/>
+          <p:cNvSpPr txBox="1"/>
+          <p:nvPr/>
+        </p:nvSpPr>
+        <p:spPr>
+          <a:xfrm>
+            <a:off x="9134475" y="3490912"/>
+            <a:ext cx="2162175" cy="800100"/>
+          </a:xfrm>
+          <a:prstGeom prst="rect">
+            <a:avLst/>
+          </a:prstGeom>
+          <a:noFill/>
+        </p:spPr>
+        <p:txBody>
+          <a:bodyPr wrap="square" lIns="0" rIns="0" tIns="0" bIns="0" anchor="t">
+            <a:spAutoFit/>
+          </a:bodyPr>
+          <a:lstStyle/>
+          <a:p>
+            <a:pPr algn="l">
+              <a:lnSpc>
+                <a:spcPts val="1575"/>
+              </a:lnSpc>
             </a:pPr>
             <a:r>
-              <a:t>• Add Transformers CPU fallback for compatibility</a:t>
-            </a:r>
-          </a:p>
-        </p:txBody>
-      </p:sp>
-      <p:sp>
-        <p:nvSpPr>
-          <p:cNvPr id="6" name="TextBox 5"/>
-          <p:cNvSpPr txBox="1"/>
-          <p:nvPr/>
-        </p:nvSpPr>
-        <p:spPr>
-          <a:xfrm>
-            <a:off x="914400" y="3337560"/>
-            <a:ext cx="10332720" cy="502920"/>
-          </a:xfrm>
-          <a:prstGeom prst="rect">
-            <a:avLst/>
-          </a:prstGeom>
-          <a:noFill/>
-        </p:spPr>
-        <p:txBody>
-          <a:bodyPr wrap="none">
-            <a:spAutoFit/>
-          </a:bodyPr>
-          <a:lstStyle/>
-          <a:p>
-            <a:pPr>
-              <a:defRPr sz="2200" b="0">
-                <a:solidFill>
-                  <a:srgbClr val="2D374B"/>
-                </a:solidFill>
-              </a:defRPr>
-            </a:pPr>
-            <a:r>
-              <a:t>• Add ONNX Runtime GenAI/QNN adapter for NPU inference</a:t>
-            </a:r>
-          </a:p>
-        </p:txBody>
-      </p:sp>
-      <p:sp>
-        <p:nvSpPr>
-          <p:cNvPr id="7" name="TextBox 6"/>
-          <p:cNvSpPr txBox="1"/>
-          <p:nvPr/>
-        </p:nvSpPr>
-        <p:spPr>
-          <a:xfrm>
-            <a:off x="914400" y="4023360"/>
-            <a:ext cx="10332720" cy="502920"/>
-          </a:xfrm>
-          <a:prstGeom prst="rect">
-            <a:avLst/>
-          </a:prstGeom>
-          <a:noFill/>
-        </p:spPr>
-        <p:txBody>
-          <a:bodyPr wrap="none">
-            <a:spAutoFit/>
-          </a:bodyPr>
-          <a:lstStyle/>
-          <a:p>
-            <a:pPr>
-              <a:defRPr sz="2200" b="0">
-                <a:solidFill>
-                  <a:srgbClr val="2D374B"/>
-                </a:solidFill>
-              </a:defRPr>
-            </a:pPr>
-            <a:r>
-              <a:t>• Expand rules, VS Code integration, and signed model bundles</a:t>
-            </a:r>
-          </a:p>
-        </p:txBody>
-      </p:sp>
-      <p:sp>
-        <p:nvSpPr>
-          <p:cNvPr id="8" name="TextBox 7"/>
-          <p:cNvSpPr txBox="1"/>
-          <p:nvPr/>
-        </p:nvSpPr>
-        <p:spPr>
-          <a:xfrm>
-            <a:off x="11155680" y="6172200"/>
-            <a:ext cx="457200" cy="274320"/>
-          </a:xfrm>
-          <a:prstGeom prst="rect">
-            <a:avLst/>
-          </a:prstGeom>
-          <a:noFill/>
-        </p:spPr>
-        <p:txBody>
-          <a:bodyPr wrap="none">
-            <a:spAutoFit/>
-          </a:bodyPr>
-          <a:lstStyle/>
-          <a:p>
-            <a:pPr>
-              <a:defRPr sz="1200" b="1">
-                <a:solidFill>
-                  <a:srgbClr val="646E82"/>
-                </a:solidFill>
-              </a:defRPr>
-            </a:pPr>
-            <a:r>
-              <a:t>08</a:t>
+              <a:rPr b="0" sz="1050" i="0" u="none">
+                <a:solidFill>
+                  <a:srgbClr val="64748B"/>
+                </a:solidFill>
+                <a:latin typeface="Plus Jakarta Sans"/>
+              </a:rPr>
+              <a:t>Signed model distribution bundles, native VS Code extension, and custom rules editor.</a:t>
             </a:r>
           </a:p>
         </p:txBody>
@@ -5155,7 +10446,7 @@
     <p:bg>
       <p:bgPr>
         <a:solidFill>
-          <a:srgbClr val="F6F8FC"/>
+          <a:srgbClr val="0B0F19"/>
         </a:solidFill>
         <a:effectLst/>
       </p:bgPr>
@@ -5169,210 +10460,290 @@
       <p:grpSpPr/>
       <p:sp>
         <p:nvSpPr>
-          <p:cNvPr id="2" name="TextBox 1"/>
-          <p:cNvSpPr txBox="1"/>
-          <p:nvPr/>
-        </p:nvSpPr>
-        <p:spPr>
-          <a:xfrm>
-            <a:off x="640080" y="411480"/>
-            <a:ext cx="6400800" cy="274320"/>
-          </a:xfrm>
-          <a:prstGeom prst="rect">
-            <a:avLst/>
-          </a:prstGeom>
-          <a:noFill/>
-        </p:spPr>
-        <p:txBody>
-          <a:bodyPr wrap="none">
-            <a:spAutoFit/>
-          </a:bodyPr>
-          <a:lstStyle/>
-          <a:p>
-            <a:pPr>
-              <a:defRPr sz="1200" b="1">
-                <a:solidFill>
-                  <a:srgbClr val="1E6ED2"/>
-                </a:solidFill>
-              </a:defRPr>
+          <p:cNvPr id="2" name="Rounded Rectangle 1"/>
+          <p:cNvSpPr/>
+          <p:nvPr/>
+        </p:nvSpPr>
+        <p:spPr>
+          <a:xfrm>
+            <a:off x="5867400" y="2010816"/>
+            <a:ext cx="457200" cy="38100"/>
+          </a:xfrm>
+          <a:prstGeom prst="roundRect">
+            <a:avLst>
+              <a:gd name="adj" fmla="val 50000"/>
+            </a:avLst>
+          </a:prstGeom>
+          <a:solidFill>
+            <a:srgbClr val="E4002B"/>
+          </a:solidFill>
+          <a:ln>
+            <a:noFill/>
+          </a:ln>
+          <a:effectLst/>
+        </p:spPr>
+        <p:style>
+          <a:lnRef idx="1">
+            <a:schemeClr val="accent1"/>
+          </a:lnRef>
+          <a:fillRef idx="3">
+            <a:schemeClr val="accent1"/>
+          </a:fillRef>
+          <a:effectRef idx="2">
+            <a:schemeClr val="accent1"/>
+          </a:effectRef>
+          <a:fontRef idx="minor">
+            <a:schemeClr val="lt1"/>
+          </a:fontRef>
+        </p:style>
+        <p:txBody>
+          <a:bodyPr rtlCol="0" anchor="ctr"/>
+          <a:lstStyle/>
+          <a:p>
+            <a:pPr algn="ctr"/>
+          </a:p>
+        </p:txBody>
+      </p:sp>
+      <p:sp>
+        <p:nvSpPr>
+          <p:cNvPr id="3" name="Rounded Rectangle 2"/>
+          <p:cNvSpPr/>
+          <p:nvPr/>
+        </p:nvSpPr>
+        <p:spPr>
+          <a:xfrm>
+            <a:off x="3824287" y="4466183"/>
+            <a:ext cx="4543425" cy="485775"/>
+          </a:xfrm>
+          <a:prstGeom prst="roundRect">
+            <a:avLst>
+              <a:gd name="adj" fmla="val 50000"/>
+            </a:avLst>
+          </a:prstGeom>
+          <a:solidFill>
+            <a:srgbClr val="1E293B"/>
+          </a:solidFill>
+          <a:ln w="9525">
+            <a:solidFill>
+              <a:srgbClr val="334155"/>
+            </a:solidFill>
+          </a:ln>
+          <a:effectLst/>
+        </p:spPr>
+        <p:style>
+          <a:lnRef idx="1">
+            <a:schemeClr val="accent1"/>
+          </a:lnRef>
+          <a:fillRef idx="3">
+            <a:schemeClr val="accent1"/>
+          </a:fillRef>
+          <a:effectRef idx="2">
+            <a:schemeClr val="accent1"/>
+          </a:effectRef>
+          <a:fontRef idx="minor">
+            <a:schemeClr val="lt1"/>
+          </a:fontRef>
+        </p:style>
+        <p:txBody>
+          <a:bodyPr rtlCol="0" anchor="ctr"/>
+          <a:lstStyle/>
+          <a:p>
+            <a:pPr algn="ctr"/>
+          </a:p>
+        </p:txBody>
+      </p:sp>
+      <p:pic>
+        <p:nvPicPr>
+          <p:cNvPr id="4" name="Picture 3" descr="image.png"/>
+          <p:cNvPicPr>
+            <a:picLocks noChangeAspect="1"/>
+          </p:cNvPicPr>
+          <p:nvPr/>
+        </p:nvPicPr>
+        <p:blipFill>
+          <a:blip r:embed="rId2"/>
+          <a:stretch>
+            <a:fillRect/>
+          </a:stretch>
+        </p:blipFill>
+        <p:spPr>
+          <a:xfrm>
+            <a:off x="5886450" y="1286916"/>
+            <a:ext cx="419100" cy="419100"/>
+          </a:xfrm>
+          <a:prstGeom prst="rect">
+            <a:avLst/>
+          </a:prstGeom>
+        </p:spPr>
+      </p:pic>
+      <p:pic>
+        <p:nvPicPr>
+          <p:cNvPr id="5" name="Picture 4" descr="image.png"/>
+          <p:cNvPicPr>
+            <a:picLocks noChangeAspect="1"/>
+          </p:cNvPicPr>
+          <p:nvPr/>
+        </p:nvPicPr>
+        <p:blipFill>
+          <a:blip r:embed="rId3"/>
+          <a:stretch>
+            <a:fillRect/>
+          </a:stretch>
+        </p:blipFill>
+        <p:spPr>
+          <a:xfrm>
+            <a:off x="4138612" y="4637633"/>
+            <a:ext cx="161925" cy="142875"/>
+          </a:xfrm>
+          <a:prstGeom prst="rect">
+            <a:avLst/>
+          </a:prstGeom>
+        </p:spPr>
+      </p:pic>
+      <p:sp>
+        <p:nvSpPr>
+          <p:cNvPr id="6" name="TextBox 5"/>
+          <p:cNvSpPr txBox="1"/>
+          <p:nvPr/>
+        </p:nvSpPr>
+        <p:spPr>
+          <a:xfrm>
+            <a:off x="970359" y="2315616"/>
+            <a:ext cx="10251281" cy="1007566"/>
+          </a:xfrm>
+          <a:prstGeom prst="rect">
+            <a:avLst/>
+          </a:prstGeom>
+          <a:noFill/>
+        </p:spPr>
+        <p:txBody>
+          <a:bodyPr wrap="square" lIns="0" rIns="0" tIns="0" bIns="0" anchor="t">
+            <a:spAutoFit/>
+          </a:bodyPr>
+          <a:lstStyle/>
+          <a:p>
+            <a:pPr algn="ctr">
+              <a:lnSpc>
+                <a:spcPts val="3967"/>
+              </a:lnSpc>
             </a:pPr>
             <a:r>
-              <a:t>SNAPDRAGON LOCAL REVIEW</a:t>
-            </a:r>
-          </a:p>
-        </p:txBody>
-      </p:sp>
-      <p:sp>
-        <p:nvSpPr>
-          <p:cNvPr id="3" name="TextBox 2"/>
-          <p:cNvSpPr txBox="1"/>
-          <p:nvPr/>
-        </p:nvSpPr>
-        <p:spPr>
-          <a:xfrm>
-            <a:off x="640080" y="960120"/>
-            <a:ext cx="10789920" cy="731520"/>
-          </a:xfrm>
-          <a:prstGeom prst="rect">
-            <a:avLst/>
-          </a:prstGeom>
-          <a:noFill/>
-        </p:spPr>
-        <p:txBody>
-          <a:bodyPr wrap="none">
-            <a:spAutoFit/>
-          </a:bodyPr>
-          <a:lstStyle/>
-          <a:p>
-            <a:pPr>
-              <a:defRPr sz="3400" b="1">
-                <a:solidFill>
-                  <a:srgbClr val="14203C"/>
-                </a:solidFill>
-              </a:defRPr>
+              <a:rPr b="1" sz="3450" i="0" u="none">
+                <a:solidFill>
+                  <a:srgbClr val="FFFFFF"/>
+                </a:solidFill>
+                <a:latin typeface="Plus Jakarta Sans"/>
+              </a:rPr>
+              <a:t>Turn Every Snapdragon PC into a Private Edge Review Station</a:t>
+            </a:r>
+          </a:p>
+        </p:txBody>
+      </p:sp>
+      <p:sp>
+        <p:nvSpPr>
+          <p:cNvPr id="7" name="TextBox 6"/>
+          <p:cNvSpPr txBox="1"/>
+          <p:nvPr/>
+        </p:nvSpPr>
+        <p:spPr>
+          <a:xfrm>
+            <a:off x="2047875" y="3513683"/>
+            <a:ext cx="8096250" cy="571500"/>
+          </a:xfrm>
+          <a:prstGeom prst="rect">
+            <a:avLst/>
+          </a:prstGeom>
+          <a:noFill/>
+        </p:spPr>
+        <p:txBody>
+          <a:bodyPr wrap="square" lIns="0" rIns="0" tIns="0" bIns="0" anchor="t">
+            <a:spAutoFit/>
+          </a:bodyPr>
+          <a:lstStyle/>
+          <a:p>
+            <a:pPr algn="ctr">
+              <a:lnSpc>
+                <a:spcPts val="2250"/>
+              </a:lnSpc>
             </a:pPr>
             <a:r>
-              <a:t>Call to action</a:t>
-            </a:r>
-          </a:p>
-        </p:txBody>
-      </p:sp>
-      <p:sp>
-        <p:nvSpPr>
-          <p:cNvPr id="4" name="TextBox 3"/>
-          <p:cNvSpPr txBox="1"/>
-          <p:nvPr/>
-        </p:nvSpPr>
-        <p:spPr>
-          <a:xfrm>
-            <a:off x="914400" y="1965960"/>
-            <a:ext cx="10332720" cy="502920"/>
-          </a:xfrm>
-          <a:prstGeom prst="rect">
-            <a:avLst/>
-          </a:prstGeom>
-          <a:noFill/>
-        </p:spPr>
-        <p:txBody>
-          <a:bodyPr wrap="none">
-            <a:spAutoFit/>
-          </a:bodyPr>
-          <a:lstStyle/>
-          <a:p>
-            <a:pPr>
-              <a:defRPr sz="2200" b="0">
-                <a:solidFill>
-                  <a:srgbClr val="2D374B"/>
-                </a:solidFill>
-              </a:defRPr>
-            </a:pPr>
-            <a:r>
-              <a:t>• Install locally</a:t>
-            </a:r>
-          </a:p>
-        </p:txBody>
-      </p:sp>
-      <p:sp>
-        <p:nvSpPr>
-          <p:cNvPr id="5" name="TextBox 4"/>
-          <p:cNvSpPr txBox="1"/>
-          <p:nvPr/>
-        </p:nvSpPr>
-        <p:spPr>
-          <a:xfrm>
-            <a:off x="914400" y="2651760"/>
-            <a:ext cx="10332720" cy="502920"/>
-          </a:xfrm>
-          <a:prstGeom prst="rect">
-            <a:avLst/>
-          </a:prstGeom>
-          <a:noFill/>
-        </p:spPr>
-        <p:txBody>
-          <a:bodyPr wrap="none">
-            <a:spAutoFit/>
-          </a:bodyPr>
-          <a:lstStyle/>
-          <a:p>
-            <a:pPr>
-              <a:defRPr sz="2200" b="0">
-                <a:solidFill>
-                  <a:srgbClr val="2D374B"/>
-                </a:solidFill>
-              </a:defRPr>
-            </a:pPr>
-            <a:r>
-              <a:t>• Keep the review loop private</a:t>
-            </a:r>
-          </a:p>
-        </p:txBody>
-      </p:sp>
-      <p:sp>
-        <p:nvSpPr>
-          <p:cNvPr id="6" name="TextBox 5"/>
-          <p:cNvSpPr txBox="1"/>
-          <p:nvPr/>
-        </p:nvSpPr>
-        <p:spPr>
-          <a:xfrm>
-            <a:off x="914400" y="3337560"/>
-            <a:ext cx="10332720" cy="502920"/>
-          </a:xfrm>
-          <a:prstGeom prst="rect">
-            <a:avLst/>
-          </a:prstGeom>
-          <a:noFill/>
-        </p:spPr>
-        <p:txBody>
-          <a:bodyPr wrap="none">
-            <a:spAutoFit/>
-          </a:bodyPr>
-          <a:lstStyle/>
-          <a:p>
-            <a:pPr>
-              <a:defRPr sz="2200" b="0">
-                <a:solidFill>
-                  <a:srgbClr val="2D374B"/>
-                </a:solidFill>
-              </a:defRPr>
-            </a:pPr>
-            <a:r>
-              <a:t>• Turn every Snapdragon developer machine into an edge code-review station</a:t>
-            </a:r>
-          </a:p>
-        </p:txBody>
-      </p:sp>
-      <p:sp>
-        <p:nvSpPr>
-          <p:cNvPr id="7" name="TextBox 6"/>
-          <p:cNvSpPr txBox="1"/>
-          <p:nvPr/>
-        </p:nvSpPr>
-        <p:spPr>
-          <a:xfrm>
-            <a:off x="11155680" y="6172200"/>
-            <a:ext cx="457200" cy="274320"/>
-          </a:xfrm>
-          <a:prstGeom prst="rect">
-            <a:avLst/>
-          </a:prstGeom>
-          <a:noFill/>
-        </p:spPr>
-        <p:txBody>
-          <a:bodyPr wrap="none">
-            <a:spAutoFit/>
-          </a:bodyPr>
-          <a:lstStyle/>
-          <a:p>
-            <a:pPr>
-              <a:defRPr sz="1200" b="1">
-                <a:solidFill>
-                  <a:srgbClr val="646E82"/>
-                </a:solidFill>
-              </a:defRPr>
-            </a:pPr>
-            <a:r>
-              <a:t>09</a:t>
+              <a:rPr b="0" sz="1500" i="0" u="none">
+                <a:solidFill>
+                  <a:srgbClr val="94A3B8"/>
+                </a:solidFill>
+                <a:latin typeface="Plus Jakarta Sans"/>
+              </a:rPr>
+              <a:t>Install locally, safeguard code privacy, and eliminate review latency before every deployment.</a:t>
+            </a:r>
+          </a:p>
+        </p:txBody>
+      </p:sp>
+      <p:sp>
+        <p:nvSpPr>
+          <p:cNvPr id="8" name="TextBox 7"/>
+          <p:cNvSpPr txBox="1"/>
+          <p:nvPr/>
+        </p:nvSpPr>
+        <p:spPr>
+          <a:xfrm>
+            <a:off x="4595812" y="5409158"/>
+            <a:ext cx="3000375" cy="161925"/>
+          </a:xfrm>
+          <a:prstGeom prst="rect">
+            <a:avLst/>
+          </a:prstGeom>
+          <a:noFill/>
+        </p:spPr>
+        <p:txBody>
+          <a:bodyPr wrap="none" lIns="0" rIns="0" tIns="0" bIns="0" anchor="t">
+            <a:spAutoFit/>
+          </a:bodyPr>
+          <a:lstStyle/>
+          <a:p>
+            <a:pPr algn="ctr"/>
+            <a:r>
+              <a:rPr b="0" sz="975" i="0" u="none">
+                <a:solidFill>
+                  <a:srgbClr val="64748B"/>
+                </a:solidFill>
+                <a:latin typeface="JetBrains Mono"/>
+              </a:rPr>
+              <a:t>09 / SNAPDRAGON LOCAL REVIEW</a:t>
+            </a:r>
+          </a:p>
+        </p:txBody>
+      </p:sp>
+      <p:sp>
+        <p:nvSpPr>
+          <p:cNvPr id="9" name="TextBox 8"/>
+          <p:cNvSpPr txBox="1"/>
+          <p:nvPr/>
+        </p:nvSpPr>
+        <p:spPr>
+          <a:xfrm>
+            <a:off x="3981450" y="4609058"/>
+            <a:ext cx="4524375" cy="200025"/>
+          </a:xfrm>
+          <a:prstGeom prst="rect">
+            <a:avLst/>
+          </a:prstGeom>
+          <a:noFill/>
+        </p:spPr>
+        <p:txBody>
+          <a:bodyPr wrap="none" lIns="0" rIns="0" tIns="0" bIns="0" anchor="t">
+            <a:spAutoFit/>
+          </a:bodyPr>
+          <a:lstStyle/>
+          <a:p>
+            <a:pPr algn="ctr"/>
+            <a:r>
+              <a:rPr b="1" sz="1200" i="0" u="none">
+                <a:solidFill>
+                  <a:srgbClr val="F8FAFC"/>
+                </a:solidFill>
+                <a:latin typeface="JetBrains Mono"/>
+              </a:rPr>
+              <a:t>npm install -g snapdragon-local-review</a:t>
             </a:r>
           </a:p>
         </p:txBody>
